--- a/ccao-f-study-guide.pptx
+++ b/ccao-f-study-guide.pptx
@@ -25,9 +25,11 @@
     <p:sldId id="273" r:id="rId19"/>
     <p:sldId id="274" r:id="rId20"/>
     <p:sldId id="275" r:id="rId21"/>
+    <p:sldId id="276" r:id="rId22"/>
+    <p:sldId id="277" r:id="rId23"/>
   </p:sldIdLst>
   <p:notesMasterIdLst>
-    <p:notesMasterId r:id="rId22"/>
+    <p:notesMasterId r:id="rId24"/>
   </p:notesMasterIdLst>
   <p:sldSz cx="12192000" cy="6858000"/>
   <p:notesSz cx="6858000" cy="12192000"/>
@@ -1601,6 +1603,182 @@
             <a:fld id="{F7021451-1387-4CA6-816F-3879F97B5CBC}" type="slidenum">
               <a:rPr lang="en-US"/>
               <a:t>20</a:t>
+            </a:fld>
+            <a:endParaRPr lang="en-US"/>
+          </a:p>
+        </p:txBody>
+      </p:sp>
+    </p:spTree>
+    <p:extLst>
+      <p:ext uri="{BB962C8B-B14F-4D97-AF65-F5344CB8AC3E}">
+        <p14:creationId xmlns:p14="http://schemas.microsoft.com/office/powerpoint/2010/main" val="1024086991"/>
+      </p:ext>
+    </p:extLst>
+  </p:cSld>
+  <p:clrMapOvr>
+    <a:masterClrMapping/>
+  </p:clrMapOvr>
+</p:notes>
+</file>
+
+<file path=ppt/notesSlides/notesSlide21.xml><?xml version="1.0" encoding="utf-8"?>
+<p:notes xmlns:a="http://schemas.openxmlformats.org/drawingml/2006/main" xmlns:r="http://schemas.openxmlformats.org/officeDocument/2006/relationships" xmlns:p="http://schemas.openxmlformats.org/presentationml/2006/main">
+  <p:cSld>
+    <p:spTree>
+      <p:nvGrpSpPr>
+        <p:cNvPr id="1" name=""/>
+        <p:cNvGrpSpPr/>
+        <p:nvPr/>
+      </p:nvGrpSpPr>
+      <p:grpSpPr>
+        <a:xfrm>
+          <a:off x="0" y="0"/>
+          <a:ext cx="0" cy="0"/>
+          <a:chOff x="0" y="0"/>
+          <a:chExt cx="0" cy="0"/>
+        </a:xfrm>
+      </p:grpSpPr>
+      <p:sp>
+        <p:nvSpPr>
+          <p:cNvPr id="2" name="Slide Image Placeholder 1"/>
+          <p:cNvSpPr>
+            <a:spLocks noGrp="1" noRot="1" noChangeAspect="1"/>
+          </p:cNvSpPr>
+          <p:nvPr>
+            <p:ph type="sldImg"/>
+          </p:nvPr>
+        </p:nvSpPr>
+        <p:spPr/>
+      </p:sp>
+      <p:sp>
+        <p:nvSpPr>
+          <p:cNvPr id="3" name="Notes Placeholder 2"/>
+          <p:cNvSpPr>
+            <a:spLocks noGrp="1"/>
+          </p:cNvSpPr>
+          <p:nvPr>
+            <p:ph type="body" idx="1"/>
+          </p:nvPr>
+        </p:nvSpPr>
+        <p:spPr/>
+        <p:txBody>
+          <a:bodyPr/>
+          <a:lstStyle/>
+          <a:p>
+            <a:r>
+              <a:rPr lang="en-US" dirty="0"/>
+              <a:t/>
+            </a:r>
+            <a:endParaRPr lang="en-US" dirty="0"/>
+          </a:p>
+        </p:txBody>
+      </p:sp>
+      <p:sp>
+        <p:nvSpPr>
+          <p:cNvPr id="4" name="Slide Number Placeholder 3"/>
+          <p:cNvSpPr>
+            <a:spLocks noGrp="1"/>
+          </p:cNvSpPr>
+          <p:nvPr>
+            <p:ph type="sldNum" sz="quarter" idx="10"/>
+          </p:nvPr>
+        </p:nvSpPr>
+        <p:spPr/>
+        <p:txBody>
+          <a:bodyPr/>
+          <a:lstStyle/>
+          <a:p>
+            <a:fld id="{F7021451-1387-4CA6-816F-3879F97B5CBC}" type="slidenum">
+              <a:rPr lang="en-US"/>
+              <a:t>21</a:t>
+            </a:fld>
+            <a:endParaRPr lang="en-US"/>
+          </a:p>
+        </p:txBody>
+      </p:sp>
+    </p:spTree>
+    <p:extLst>
+      <p:ext uri="{BB962C8B-B14F-4D97-AF65-F5344CB8AC3E}">
+        <p14:creationId xmlns:p14="http://schemas.microsoft.com/office/powerpoint/2010/main" val="1024086991"/>
+      </p:ext>
+    </p:extLst>
+  </p:cSld>
+  <p:clrMapOvr>
+    <a:masterClrMapping/>
+  </p:clrMapOvr>
+</p:notes>
+</file>
+
+<file path=ppt/notesSlides/notesSlide22.xml><?xml version="1.0" encoding="utf-8"?>
+<p:notes xmlns:a="http://schemas.openxmlformats.org/drawingml/2006/main" xmlns:r="http://schemas.openxmlformats.org/officeDocument/2006/relationships" xmlns:p="http://schemas.openxmlformats.org/presentationml/2006/main">
+  <p:cSld>
+    <p:spTree>
+      <p:nvGrpSpPr>
+        <p:cNvPr id="1" name=""/>
+        <p:cNvGrpSpPr/>
+        <p:nvPr/>
+      </p:nvGrpSpPr>
+      <p:grpSpPr>
+        <a:xfrm>
+          <a:off x="0" y="0"/>
+          <a:ext cx="0" cy="0"/>
+          <a:chOff x="0" y="0"/>
+          <a:chExt cx="0" cy="0"/>
+        </a:xfrm>
+      </p:grpSpPr>
+      <p:sp>
+        <p:nvSpPr>
+          <p:cNvPr id="2" name="Slide Image Placeholder 1"/>
+          <p:cNvSpPr>
+            <a:spLocks noGrp="1" noRot="1" noChangeAspect="1"/>
+          </p:cNvSpPr>
+          <p:nvPr>
+            <p:ph type="sldImg"/>
+          </p:nvPr>
+        </p:nvSpPr>
+        <p:spPr/>
+      </p:sp>
+      <p:sp>
+        <p:nvSpPr>
+          <p:cNvPr id="3" name="Notes Placeholder 2"/>
+          <p:cNvSpPr>
+            <a:spLocks noGrp="1"/>
+          </p:cNvSpPr>
+          <p:nvPr>
+            <p:ph type="body" idx="1"/>
+          </p:nvPr>
+        </p:nvSpPr>
+        <p:spPr/>
+        <p:txBody>
+          <a:bodyPr/>
+          <a:lstStyle/>
+          <a:p>
+            <a:r>
+              <a:rPr lang="en-US" dirty="0"/>
+              <a:t/>
+            </a:r>
+            <a:endParaRPr lang="en-US" dirty="0"/>
+          </a:p>
+        </p:txBody>
+      </p:sp>
+      <p:sp>
+        <p:nvSpPr>
+          <p:cNvPr id="4" name="Slide Number Placeholder 3"/>
+          <p:cNvSpPr>
+            <a:spLocks noGrp="1"/>
+          </p:cNvSpPr>
+          <p:nvPr>
+            <p:ph type="sldNum" sz="quarter" idx="10"/>
+          </p:nvPr>
+        </p:nvSpPr>
+        <p:spPr/>
+        <p:txBody>
+          <a:bodyPr/>
+          <a:lstStyle/>
+          <a:p>
+            <a:fld id="{F7021451-1387-4CA6-816F-3879F97B5CBC}" type="slidenum">
+              <a:rPr lang="en-US"/>
+              <a:t>22</a:t>
             </a:fld>
             <a:endParaRPr lang="en-US"/>
           </a:p>
@@ -4237,6 +4415,441 @@
     <p:bg>
       <p:bgPr>
         <a:solidFill>
+          <a:srgbClr val="FFFFFF"/>
+        </a:solidFill>
+      </p:bgPr>
+    </p:bg>
+    <p:spTree>
+      <p:nvGrpSpPr>
+        <p:cNvPr id="1" name=""/>
+        <p:cNvGrpSpPr/>
+        <p:nvPr/>
+      </p:nvGrpSpPr>
+      <p:grpSpPr>
+        <a:xfrm>
+          <a:off x="0" y="0"/>
+          <a:ext cx="0" cy="0"/>
+          <a:chOff x="0" y="0"/>
+          <a:chExt cx="0" cy="0"/>
+        </a:xfrm>
+      </p:grpSpPr>
+      <p:sp>
+        <p:nvSpPr>
+          <p:cNvPr id="2" name="Text 0"/>
+          <p:cNvSpPr txBox="1"/>
+          <p:nvPr/>
+        </p:nvSpPr>
+        <p:spPr>
+          <a:xfrm>
+            <a:off x="548640" y="411480"/>
+            <a:ext cx="731520" cy="685800"/>
+          </a:xfrm>
+          <a:prstGeom prst="rect">
+            <a:avLst/>
+          </a:prstGeom>
+          <a:noFill/>
+          <a:ln/>
+        </p:spPr>
+        <p:txBody>
+          <a:bodyPr wrap="square" lIns="0" tIns="0" rIns="0" bIns="0" rtlCol="0" anchor="ctr"/>
+          <a:lstStyle/>
+          <a:p>
+            <a:pPr indent="0" marL="0">
+              <a:buNone/>
+            </a:pPr>
+            <a:r>
+              <a:rPr lang="en-US" sz="2400" b="1" dirty="0">
+                <a:solidFill>
+                  <a:srgbClr val="3E64FF"/>
+                </a:solidFill>
+                <a:latin typeface="Cambria" pitchFamily="34" charset="0"/>
+                <a:ea typeface="Cambria" pitchFamily="34" charset="-122"/>
+                <a:cs typeface="Cambria" pitchFamily="34" charset="-120"/>
+              </a:rPr>
+              <a:t>3+</a:t>
+            </a:r>
+            <a:endParaRPr lang="en-US" sz="2400" dirty="0"/>
+          </a:p>
+        </p:txBody>
+      </p:sp>
+      <p:sp>
+        <p:nvSpPr>
+          <p:cNvPr id="3" name="Text 1"/>
+          <p:cNvSpPr txBox="1"/>
+          <p:nvPr/>
+        </p:nvSpPr>
+        <p:spPr>
+          <a:xfrm>
+            <a:off x="1234440" y="457200"/>
+            <a:ext cx="10332720" cy="594360"/>
+          </a:xfrm>
+          <a:prstGeom prst="rect">
+            <a:avLst/>
+          </a:prstGeom>
+          <a:noFill/>
+          <a:ln/>
+        </p:spPr>
+        <p:txBody>
+          <a:bodyPr wrap="square" lIns="0" tIns="0" rIns="0" bIns="0" rtlCol="0" anchor="ctr"/>
+          <a:lstStyle/>
+          <a:p>
+            <a:pPr indent="0" marL="0">
+              <a:buNone/>
+            </a:pPr>
+            <a:r>
+              <a:rPr lang="en-US" sz="2200" b="1" dirty="0">
+                <a:solidFill>
+                  <a:srgbClr val="16213E"/>
+                </a:solidFill>
+                <a:latin typeface="Cambria" pitchFamily="34" charset="0"/>
+                <a:ea typeface="Cambria" pitchFamily="34" charset="-122"/>
+                <a:cs typeface="Cambria" pitchFamily="34" charset="-120"/>
+              </a:rPr>
+              <a:t>追加の着眼点: 分野1・2</a:t>
+            </a:r>
+            <a:endParaRPr lang="en-US" sz="2200" dirty="0"/>
+          </a:p>
+        </p:txBody>
+      </p:sp>
+      <p:sp>
+        <p:nvSpPr>
+          <p:cNvPr id="4" name="Text 2"/>
+          <p:cNvSpPr txBox="1"/>
+          <p:nvPr/>
+        </p:nvSpPr>
+        <p:spPr>
+          <a:xfrm>
+            <a:off x="548640" y="1325880"/>
+            <a:ext cx="10881360" cy="365760"/>
+          </a:xfrm>
+          <a:prstGeom prst="rect">
+            <a:avLst/>
+          </a:prstGeom>
+          <a:noFill/>
+          <a:ln/>
+        </p:spPr>
+        <p:txBody>
+          <a:bodyPr wrap="square" lIns="0" tIns="0" rIns="0" bIns="0" rtlCol="0" anchor="ctr"/>
+          <a:lstStyle/>
+          <a:p>
+            <a:pPr indent="0" marL="0">
+              <a:buNone/>
+            </a:pPr>
+            <a:r>
+              <a:rPr lang="en-US" sz="1250" i="1" dirty="0">
+                <a:solidFill>
+                  <a:srgbClr val="5B6B8C"/>
+                </a:solidFill>
+                <a:latin typeface="Calibri" pitchFamily="34" charset="0"/>
+                <a:ea typeface="Calibri" pitchFamily="34" charset="-122"/>
+                <a:cs typeface="Calibri" pitchFamily="34" charset="-120"/>
+              </a:rPr>
+              <a:t>模擬試験(Udemy)で確認できた追加パターン</a:t>
+            </a:r>
+            <a:endParaRPr lang="en-US" sz="1250" dirty="0"/>
+          </a:p>
+        </p:txBody>
+      </p:sp>
+      <p:sp>
+        <p:nvSpPr>
+          <p:cNvPr id="5" name="Text 3"/>
+          <p:cNvSpPr txBox="1"/>
+          <p:nvPr/>
+        </p:nvSpPr>
+        <p:spPr>
+          <a:xfrm>
+            <a:off x="548640" y="1783080"/>
+            <a:ext cx="10881360" cy="320040"/>
+          </a:xfrm>
+          <a:prstGeom prst="rect">
+            <a:avLst/>
+          </a:prstGeom>
+          <a:noFill/>
+          <a:ln/>
+        </p:spPr>
+        <p:txBody>
+          <a:bodyPr wrap="square" lIns="0" tIns="0" rIns="0" bIns="0" rtlCol="0" anchor="ctr"/>
+          <a:lstStyle/>
+          <a:p>
+            <a:pPr indent="0" marL="0">
+              <a:buNone/>
+            </a:pPr>
+            <a:r>
+              <a:rPr lang="en-US" sz="1350" b="1" dirty="0">
+                <a:solidFill>
+                  <a:srgbClr val="3E64FF"/>
+                </a:solidFill>
+                <a:latin typeface="Calibri" pitchFamily="34" charset="0"/>
+                <a:ea typeface="Calibri" pitchFamily="34" charset="-122"/>
+                <a:cs typeface="Calibri" pitchFamily="34" charset="-120"/>
+              </a:rPr>
+              <a:t>分野1: 制約を「先に」与えるか「後で」適用するか</a:t>
+            </a:r>
+            <a:endParaRPr lang="en-US" sz="1350" dirty="0"/>
+          </a:p>
+        </p:txBody>
+      </p:sp>
+      <p:sp>
+        <p:nvSpPr>
+          <p:cNvPr id="6" name="Text 4"/>
+          <p:cNvSpPr txBox="1"/>
+          <p:nvPr/>
+        </p:nvSpPr>
+        <p:spPr>
+          <a:xfrm>
+            <a:off x="548640" y="2103120"/>
+            <a:ext cx="10881360" cy="1371600"/>
+          </a:xfrm>
+          <a:prstGeom prst="rect">
+            <a:avLst/>
+          </a:prstGeom>
+          <a:noFill/>
+          <a:ln/>
+        </p:spPr>
+        <p:txBody>
+          <a:bodyPr wrap="square" lIns="0" tIns="0" rIns="0" bIns="0" rtlCol="0" anchor="ctr"/>
+          <a:lstStyle/>
+          <a:p>
+            <a:pPr marL="342900" indent="-342900">
+              <a:spcAft>
+                <a:spcPts val="600"/>
+              </a:spcAft>
+              <a:buSzPct val="100000"/>
+              <a:buChar char="•"/>
+            </a:pPr>
+            <a:r>
+              <a:rPr lang="en-US" sz="1100" dirty="0">
+                <a:solidFill>
+                  <a:srgbClr val="16213E"/>
+                </a:solidFill>
+                <a:latin typeface="Calibri" pitchFamily="34" charset="0"/>
+                <a:ea typeface="Calibri" pitchFamily="34" charset="-122"/>
+                <a:cs typeface="Calibri" pitchFamily="34" charset="-120"/>
+              </a:rPr>
+              <a:t>ブレインストーミング: まず幅広く発散的にアイデアを求め、その後に予算・時間枠などの条件で絞り込む(先に制約を与えると「無難な案」に偏りやすい)</a:t>
+            </a:r>
+            <a:endParaRPr lang="en-US" sz="1100" dirty="0"/>
+          </a:p>
+          <a:p>
+            <a:pPr marL="342900" indent="-342900">
+              <a:spcAft>
+                <a:spcPts val="600"/>
+              </a:spcAft>
+              <a:buSzPct val="100000"/>
+              <a:buChar char="•"/>
+            </a:pPr>
+            <a:r>
+              <a:rPr lang="en-US" sz="1100" dirty="0">
+                <a:solidFill>
+                  <a:srgbClr val="16213E"/>
+                </a:solidFill>
+                <a:latin typeface="Calibri" pitchFamily="34" charset="0"/>
+                <a:ea typeface="Calibri" pitchFamily="34" charset="-122"/>
+                <a:cs typeface="Calibri" pitchFamily="34" charset="-120"/>
+              </a:rPr>
+              <a:t>コンプライアンス制約(承認済み文言・禁止表現など): こちらは最初から明示した方がよい — 必須要件と好みの絞り込み条件を区別する</a:t>
+            </a:r>
+            <a:endParaRPr lang="en-US" sz="1100" dirty="0"/>
+          </a:p>
+        </p:txBody>
+      </p:sp>
+      <p:sp>
+        <p:nvSpPr>
+          <p:cNvPr id="7" name="Text 5"/>
+          <p:cNvSpPr txBox="1"/>
+          <p:nvPr/>
+        </p:nvSpPr>
+        <p:spPr>
+          <a:xfrm>
+            <a:off x="548640" y="3657600"/>
+            <a:ext cx="10881360" cy="320040"/>
+          </a:xfrm>
+          <a:prstGeom prst="rect">
+            <a:avLst/>
+          </a:prstGeom>
+          <a:noFill/>
+          <a:ln/>
+        </p:spPr>
+        <p:txBody>
+          <a:bodyPr wrap="square" lIns="0" tIns="0" rIns="0" bIns="0" rtlCol="0" anchor="ctr"/>
+          <a:lstStyle/>
+          <a:p>
+            <a:pPr indent="0" marL="0">
+              <a:buNone/>
+            </a:pPr>
+            <a:r>
+              <a:rPr lang="en-US" sz="1350" b="1" dirty="0">
+                <a:solidFill>
+                  <a:srgbClr val="3E64FF"/>
+                </a:solidFill>
+                <a:latin typeface="Calibri" pitchFamily="34" charset="0"/>
+                <a:ea typeface="Calibri" pitchFamily="34" charset="-122"/>
+                <a:cs typeface="Calibri" pitchFamily="34" charset="-120"/>
+              </a:rPr>
+              <a:t>分野2: 多項目比較には表形式</a:t>
+            </a:r>
+            <a:endParaRPr lang="en-US" sz="1350" dirty="0"/>
+          </a:p>
+        </p:txBody>
+      </p:sp>
+      <p:sp>
+        <p:nvSpPr>
+          <p:cNvPr id="8" name="Shape 6"/>
+          <p:cNvSpPr/>
+          <p:nvPr/>
+        </p:nvSpPr>
+        <p:spPr>
+          <a:xfrm>
+            <a:off x="548640" y="3977640"/>
+            <a:ext cx="10881360" cy="1280160"/>
+          </a:xfrm>
+          <a:prstGeom prst="roundRect">
+            <a:avLst>
+              <a:gd name="adj" fmla="val 5714"/>
+            </a:avLst>
+          </a:prstGeom>
+          <a:solidFill>
+            <a:srgbClr val="F5F7FB"/>
+          </a:solidFill>
+          <a:ln w="12700">
+            <a:solidFill>
+              <a:srgbClr val="E1E6F0"/>
+            </a:solidFill>
+            <a:prstDash val="solid"/>
+          </a:ln>
+        </p:spPr>
+      </p:sp>
+      <p:sp>
+        <p:nvSpPr>
+          <p:cNvPr id="9" name="Text 7"/>
+          <p:cNvSpPr txBox="1"/>
+          <p:nvPr/>
+        </p:nvSpPr>
+        <p:spPr>
+          <a:xfrm>
+            <a:off x="777240" y="4160520"/>
+            <a:ext cx="10424160" cy="1005840"/>
+          </a:xfrm>
+          <a:prstGeom prst="rect">
+            <a:avLst/>
+          </a:prstGeom>
+          <a:noFill/>
+          <a:ln/>
+        </p:spPr>
+        <p:txBody>
+          <a:bodyPr wrap="square" lIns="0" tIns="0" rIns="0" bIns="0" rtlCol="0" anchor="ctr"/>
+          <a:lstStyle/>
+          <a:p>
+            <a:pPr indent="0" marL="0">
+              <a:buNone/>
+            </a:pPr>
+            <a:r>
+              <a:rPr lang="en-US" sz="1100" dirty="0">
+                <a:solidFill>
+                  <a:srgbClr val="16213E"/>
+                </a:solidFill>
+                <a:latin typeface="Calibri" pitchFamily="34" charset="0"/>
+                <a:ea typeface="Calibri" pitchFamily="34" charset="-122"/>
+                <a:cs typeface="Calibri" pitchFamily="34" charset="-120"/>
+              </a:rPr>
+              <a:t>多数の項目(例: 12地域×複数指標)を限られた時間で素早く横断比較する場面では、物語形式や箇条書きより「行・列が揃った構造化された表」が最適。詳細を「求めに応じて後出し」にする設計は、全項目を同じ基準で見比べたいという要件に反する</a:t>
+            </a:r>
+            <a:endParaRPr lang="en-US" sz="1100" dirty="0"/>
+          </a:p>
+        </p:txBody>
+      </p:sp>
+      <p:sp>
+        <p:nvSpPr>
+          <p:cNvPr id="10" name="Text 8"/>
+          <p:cNvSpPr txBox="1"/>
+          <p:nvPr/>
+        </p:nvSpPr>
+        <p:spPr>
+          <a:xfrm>
+            <a:off x="548640" y="6400800"/>
+            <a:ext cx="11064240" cy="320040"/>
+          </a:xfrm>
+          <a:prstGeom prst="rect">
+            <a:avLst/>
+          </a:prstGeom>
+          <a:noFill/>
+          <a:ln/>
+        </p:spPr>
+        <p:txBody>
+          <a:bodyPr wrap="square" lIns="0" tIns="0" rIns="0" bIns="0" rtlCol="0" anchor="ctr"/>
+          <a:lstStyle/>
+          <a:p>
+            <a:pPr indent="0" marL="0">
+              <a:buNone/>
+            </a:pPr>
+            <a:r>
+              <a:rPr lang="en-US" sz="900" i="1" dirty="0">
+                <a:solidFill>
+                  <a:srgbClr val="5B6B8C"/>
+                </a:solidFill>
+                <a:latin typeface="Calibri" pitchFamily="34" charset="0"/>
+                <a:ea typeface="Calibri" pitchFamily="34" charset="-122"/>
+                <a:cs typeface="Calibri" pitchFamily="34" charset="-120"/>
+              </a:rPr>
+              <a:t>出典: ユーザー提供のUdemy模擬試験(Practice Exams Claude Certified Associate Foundations CCAO-F)より</a:t>
+            </a:r>
+            <a:endParaRPr lang="en-US" sz="900" dirty="0"/>
+          </a:p>
+        </p:txBody>
+      </p:sp>
+      <p:sp>
+        <p:nvSpPr>
+          <p:cNvPr id="11" name="Text 9"/>
+          <p:cNvSpPr txBox="1"/>
+          <p:nvPr/>
+        </p:nvSpPr>
+        <p:spPr>
+          <a:xfrm>
+            <a:off x="11521440" y="6492240"/>
+            <a:ext cx="457200" cy="274320"/>
+          </a:xfrm>
+          <a:prstGeom prst="rect">
+            <a:avLst/>
+          </a:prstGeom>
+          <a:noFill/>
+          <a:ln/>
+        </p:spPr>
+        <p:txBody>
+          <a:bodyPr wrap="square" lIns="0" tIns="0" rIns="0" bIns="0" rtlCol="0" anchor="ctr"/>
+          <a:lstStyle/>
+          <a:p>
+            <a:pPr algn="r" indent="0" marL="0">
+              <a:buNone/>
+            </a:pPr>
+            <a:r>
+              <a:rPr lang="en-US" sz="1000" dirty="0">
+                <a:solidFill>
+                  <a:srgbClr val="5B6B8C"/>
+                </a:solidFill>
+                <a:latin typeface="Calibri" pitchFamily="34" charset="0"/>
+                <a:ea typeface="Calibri" pitchFamily="34" charset="-122"/>
+                <a:cs typeface="Calibri" pitchFamily="34" charset="-120"/>
+              </a:rPr>
+              <a:t>13</a:t>
+            </a:r>
+            <a:endParaRPr lang="en-US" sz="1000" dirty="0"/>
+          </a:p>
+        </p:txBody>
+      </p:sp>
+    </p:spTree>
+  </p:cSld>
+  <p:clrMapOvr>
+    <a:masterClrMapping/>
+  </p:clrMapOvr>
+</p:sld>
+</file>
+
+<file path=ppt/slides/slide14.xml><?xml version="1.0" encoding="utf-8"?>
+<p:sld xmlns:a="http://schemas.openxmlformats.org/drawingml/2006/main" xmlns:r="http://schemas.openxmlformats.org/officeDocument/2006/relationships" xmlns:p="http://schemas.openxmlformats.org/presentationml/2006/main">
+  <p:cSld name="Slide 14">
+    <p:bg>
+      <p:bgPr>
+        <a:solidFill>
           <a:srgbClr val="16213E"/>
         </a:solidFill>
       </p:bgPr>
@@ -4288,7 +4901,7 @@
                 <a:ea typeface="Cambria" pitchFamily="34" charset="-122"/>
                 <a:cs typeface="Cambria" pitchFamily="34" charset="-120"/>
               </a:rPr>
-              <a:t>4</a:t>
+              <a:t>4+</a:t>
             </a:r>
             <a:endParaRPr lang="en-US" sz="2400" dirty="0"/>
           </a:p>
@@ -4327,7 +4940,7 @@
                 <a:ea typeface="Cambria" pitchFamily="34" charset="-122"/>
                 <a:cs typeface="Cambria" pitchFamily="34" charset="-120"/>
               </a:rPr>
-              <a:t>試験対策テクニック: 「動詞パターン」のヒント</a:t>
+              <a:t>追加の着眼点: 分野4・6</a:t>
             </a:r>
             <a:endParaRPr lang="en-US" sz="2200" dirty="0"/>
           </a:p>
@@ -4341,7 +4954,7 @@
         </p:nvSpPr>
         <p:spPr>
           <a:xfrm>
-            <a:off x="548640" y="1371600"/>
+            <a:off x="548640" y="1325880"/>
             <a:ext cx="10881360" cy="365760"/>
           </a:xfrm>
           <a:prstGeom prst="rect">
@@ -4366,7 +4979,7 @@
                 <a:ea typeface="Calibri" pitchFamily="34" charset="-122"/>
                 <a:cs typeface="Calibri" pitchFamily="34" charset="-120"/>
               </a:rPr>
-              <a:t>英語読解の実務的なコツ(受験記事より)</a:t>
+              <a:t>模擬試験(Udemy)で確認できた追加パターン</a:t>
             </a:r>
             <a:endParaRPr lang="en-US" sz="1250" dirty="0"/>
           </a:p>
@@ -4374,30 +4987,42 @@
       </p:sp>
       <p:sp>
         <p:nvSpPr>
-          <p:cNvPr id="5" name="Shape 3"/>
-          <p:cNvSpPr/>
-          <p:nvPr/>
-        </p:nvSpPr>
-        <p:spPr>
-          <a:xfrm>
-            <a:off x="548640" y="1920240"/>
-            <a:ext cx="5303520" cy="2926080"/>
-          </a:xfrm>
-          <a:prstGeom prst="roundRect">
-            <a:avLst>
-              <a:gd name="adj" fmla="val 3125"/>
-            </a:avLst>
-          </a:prstGeom>
-          <a:solidFill>
-            <a:srgbClr val="16331F"/>
-          </a:solidFill>
-          <a:ln w="12700">
-            <a:solidFill>
-              <a:srgbClr val="2E6B3E"/>
-            </a:solidFill>
-            <a:prstDash val="solid"/>
-          </a:ln>
-        </p:spPr>
+          <p:cNvPr id="5" name="Text 3"/>
+          <p:cNvSpPr txBox="1"/>
+          <p:nvPr/>
+        </p:nvSpPr>
+        <p:spPr>
+          <a:xfrm>
+            <a:off x="548640" y="1783080"/>
+            <a:ext cx="10881360" cy="320040"/>
+          </a:xfrm>
+          <a:prstGeom prst="rect">
+            <a:avLst/>
+          </a:prstGeom>
+          <a:noFill/>
+          <a:ln/>
+        </p:spPr>
+        <p:txBody>
+          <a:bodyPr wrap="square" lIns="0" tIns="0" rIns="0" bIns="0" rtlCol="0" anchor="ctr"/>
+          <a:lstStyle/>
+          <a:p>
+            <a:pPr indent="0" marL="0">
+              <a:buNone/>
+            </a:pPr>
+            <a:r>
+              <a:rPr lang="en-US" sz="1350" b="1" dirty="0">
+                <a:solidFill>
+                  <a:srgbClr val="2CB1BC"/>
+                </a:solidFill>
+                <a:latin typeface="Calibri" pitchFamily="34" charset="0"/>
+                <a:ea typeface="Calibri" pitchFamily="34" charset="-122"/>
+                <a:cs typeface="Calibri" pitchFamily="34" charset="-120"/>
+              </a:rPr>
+              <a:t>分野4: 実データに基づく分析 / 再設計の型 / 根本原因対処</a:t>
+            </a:r>
+            <a:endParaRPr lang="en-US" sz="1350" dirty="0"/>
+          </a:p>
+        </p:txBody>
       </p:sp>
       <p:sp>
         <p:nvSpPr>
@@ -4407,47 +5032,8 @@
         </p:nvSpPr>
         <p:spPr>
           <a:xfrm>
-            <a:off x="777240" y="2103120"/>
-            <a:ext cx="4846320" cy="365760"/>
-          </a:xfrm>
-          <a:prstGeom prst="rect">
-            <a:avLst/>
-          </a:prstGeom>
-          <a:noFill/>
-          <a:ln/>
-        </p:spPr>
-        <p:txBody>
-          <a:bodyPr wrap="square" lIns="0" tIns="0" rIns="0" bIns="0" rtlCol="0" anchor="ctr"/>
-          <a:lstStyle/>
-          <a:p>
-            <a:pPr indent="0" marL="0">
-              <a:buNone/>
-            </a:pPr>
-            <a:r>
-              <a:rPr lang="en-US" sz="1400" b="1" dirty="0">
-                <a:solidFill>
-                  <a:srgbClr val="6FCF97"/>
-                </a:solidFill>
-                <a:latin typeface="Calibri" pitchFamily="34" charset="0"/>
-                <a:ea typeface="Calibri" pitchFamily="34" charset="-122"/>
-                <a:cs typeface="Calibri" pitchFamily="34" charset="-120"/>
-              </a:rPr>
-              <a:t>正解側に出やすい動詞</a:t>
-            </a:r>
-            <a:endParaRPr lang="en-US" sz="1400" dirty="0"/>
-          </a:p>
-        </p:txBody>
-      </p:sp>
-      <p:sp>
-        <p:nvSpPr>
-          <p:cNvPr id="7" name="Text 5"/>
-          <p:cNvSpPr txBox="1"/>
-          <p:nvPr/>
-        </p:nvSpPr>
-        <p:spPr>
-          <a:xfrm>
-            <a:off x="777240" y="2560320"/>
-            <a:ext cx="4846320" cy="2103120"/>
+            <a:off x="548640" y="2103120"/>
+            <a:ext cx="10881360" cy="1737360"/>
           </a:xfrm>
           <a:prstGeom prst="rect">
             <a:avLst/>
@@ -4461,13 +5047,13 @@
           <a:p>
             <a:pPr marL="342900" indent="-342900">
               <a:spcAft>
-                <a:spcPts val="1000"/>
+                <a:spcPts val="500"/>
               </a:spcAft>
               <a:buSzPct val="100000"/>
               <a:buChar char="•"/>
             </a:pPr>
             <a:r>
-              <a:rPr lang="en-US" sz="1300" dirty="0">
+              <a:rPr lang="en-US" sz="1050" dirty="0">
                 <a:solidFill>
                   <a:srgbClr val="F2F4F8"/>
                 </a:solidFill>
@@ -4475,20 +5061,20 @@
                 <a:ea typeface="Calibri" pitchFamily="34" charset="-122"/>
                 <a:cs typeface="Calibri" pitchFamily="34" charset="-120"/>
               </a:rPr>
-              <a:t>verify(確認する)</a:t>
-            </a:r>
-            <a:endParaRPr lang="en-US" sz="1300" dirty="0"/>
+              <a:t>手元の完了記録・ログなどの実データを使ってボトルネックを特定する(一般的なベストプラクティスの当てはめだけでは組織固有の実態を反映できない)</a:t>
+            </a:r>
+            <a:endParaRPr lang="en-US" sz="1050" dirty="0"/>
           </a:p>
           <a:p>
             <a:pPr marL="342900" indent="-342900">
               <a:spcAft>
-                <a:spcPts val="1000"/>
+                <a:spcPts val="500"/>
               </a:spcAft>
               <a:buSzPct val="100000"/>
               <a:buChar char="•"/>
             </a:pPr>
             <a:r>
-              <a:rPr lang="en-US" sz="1300" dirty="0">
+              <a:rPr lang="en-US" sz="1050" dirty="0">
                 <a:solidFill>
                   <a:srgbClr val="F2F4F8"/>
                 </a:solidFill>
@@ -4496,20 +5082,20 @@
                 <a:ea typeface="Calibri" pitchFamily="34" charset="-122"/>
                 <a:cs typeface="Calibri" pitchFamily="34" charset="-120"/>
               </a:rPr>
-              <a:t>escalate(エスカレーションする)</a:t>
-            </a:r>
-            <a:endParaRPr lang="en-US" sz="1300" dirty="0"/>
+              <a:t>ワークフロー再設計の型: 収集(出所記録)→矛盾のフラグ→人間承認→成果物作成→配布、の順序を守る</a:t>
+            </a:r>
+            <a:endParaRPr lang="en-US" sz="1050" dirty="0"/>
           </a:p>
           <a:p>
             <a:pPr marL="342900" indent="-342900">
               <a:spcAft>
-                <a:spcPts val="1000"/>
+                <a:spcPts val="500"/>
               </a:spcAft>
               <a:buSzPct val="100000"/>
               <a:buChar char="•"/>
             </a:pPr>
             <a:r>
-              <a:rPr lang="en-US" sz="1300" dirty="0">
+              <a:rPr lang="en-US" sz="1050" dirty="0">
                 <a:solidFill>
                   <a:srgbClr val="F2F4F8"/>
                 </a:solidFill>
@@ -4517,20 +5103,81 @@
                 <a:ea typeface="Calibri" pitchFamily="34" charset="-122"/>
                 <a:cs typeface="Calibri" pitchFamily="34" charset="-120"/>
               </a:rPr>
-              <a:t>flag(注意喚起する)</a:t>
-            </a:r>
-            <a:endParaRPr lang="en-US" sz="1300" dirty="0"/>
-          </a:p>
+              <a:t>非効率なワークフローの改善は、対症療法(文書を増やす等)ではなく根本原因(データソースの不統一)を解消する</a:t>
+            </a:r>
+            <a:endParaRPr lang="en-US" sz="1050" dirty="0"/>
+          </a:p>
+        </p:txBody>
+      </p:sp>
+      <p:sp>
+        <p:nvSpPr>
+          <p:cNvPr id="7" name="Text 5"/>
+          <p:cNvSpPr txBox="1"/>
+          <p:nvPr/>
+        </p:nvSpPr>
+        <p:spPr>
+          <a:xfrm>
+            <a:off x="548640" y="4114800"/>
+            <a:ext cx="10881360" cy="320040"/>
+          </a:xfrm>
+          <a:prstGeom prst="rect">
+            <a:avLst/>
+          </a:prstGeom>
+          <a:noFill/>
+          <a:ln/>
+        </p:spPr>
+        <p:txBody>
+          <a:bodyPr wrap="square" lIns="0" tIns="0" rIns="0" bIns="0" rtlCol="0" anchor="ctr"/>
+          <a:lstStyle/>
+          <a:p>
+            <a:pPr indent="0" marL="0">
+              <a:buNone/>
+            </a:pPr>
+            <a:r>
+              <a:rPr lang="en-US" sz="1350" b="1" dirty="0">
+                <a:solidFill>
+                  <a:srgbClr val="2CB1BC"/>
+                </a:solidFill>
+                <a:latin typeface="Calibri" pitchFamily="34" charset="0"/>
+                <a:ea typeface="Calibri" pitchFamily="34" charset="-122"/>
+                <a:cs typeface="Calibri" pitchFamily="34" charset="-120"/>
+              </a:rPr>
+              <a:t>分野6: PIIの機微度判断 / 適切なユースケースの境界線</a:t>
+            </a:r>
+            <a:endParaRPr lang="en-US" sz="1350" dirty="0"/>
+          </a:p>
+        </p:txBody>
+      </p:sp>
+      <p:sp>
+        <p:nvSpPr>
+          <p:cNvPr id="8" name="Text 6"/>
+          <p:cNvSpPr txBox="1"/>
+          <p:nvPr/>
+        </p:nvSpPr>
+        <p:spPr>
+          <a:xfrm>
+            <a:off x="548640" y="4434840"/>
+            <a:ext cx="10881360" cy="1554480"/>
+          </a:xfrm>
+          <a:prstGeom prst="rect">
+            <a:avLst/>
+          </a:prstGeom>
+          <a:noFill/>
+          <a:ln/>
+        </p:spPr>
+        <p:txBody>
+          <a:bodyPr wrap="square" lIns="0" tIns="0" rIns="0" bIns="0" rtlCol="0" anchor="ctr"/>
+          <a:lstStyle/>
           <a:p>
             <a:pPr marL="342900" indent="-342900">
               <a:spcAft>
-                <a:spcPts val="1000"/>
+                <a:spcPts val="500"/>
               </a:spcAft>
               <a:buSzPct val="100000"/>
               <a:buChar char="•"/>
             </a:pPr>
             <a:r>
-              <a:rPr lang="en-US" sz="1300" dirty="0">
+              <a:rPr lang="en-US" sz="1050" dirty="0">
                 <a:solidFill>
                   <a:srgbClr val="F2F4F8"/>
                 </a:solidFill>
@@ -4538,108 +5185,20 @@
                 <a:ea typeface="Calibri" pitchFamily="34" charset="-122"/>
                 <a:cs typeface="Calibri" pitchFamily="34" charset="-120"/>
               </a:rPr>
-              <a:t>anonymize / redact(匿名化する)</a:t>
-            </a:r>
-            <a:endParaRPr lang="en-US" sz="1300" dirty="0"/>
-          </a:p>
-        </p:txBody>
-      </p:sp>
-      <p:sp>
-        <p:nvSpPr>
-          <p:cNvPr id="8" name="Shape 6"/>
-          <p:cNvSpPr/>
-          <p:nvPr/>
-        </p:nvSpPr>
-        <p:spPr>
-          <a:xfrm>
-            <a:off x="6126480" y="1920240"/>
-            <a:ext cx="5303520" cy="2926080"/>
-          </a:xfrm>
-          <a:prstGeom prst="roundRect">
-            <a:avLst>
-              <a:gd name="adj" fmla="val 3125"/>
-            </a:avLst>
-          </a:prstGeom>
-          <a:solidFill>
-            <a:srgbClr val="33181B"/>
-          </a:solidFill>
-          <a:ln w="12700">
-            <a:solidFill>
-              <a:srgbClr val="6B2E33"/>
-            </a:solidFill>
-            <a:prstDash val="solid"/>
-          </a:ln>
-        </p:spPr>
-      </p:sp>
-      <p:sp>
-        <p:nvSpPr>
-          <p:cNvPr id="9" name="Text 7"/>
-          <p:cNvSpPr txBox="1"/>
-          <p:nvPr/>
-        </p:nvSpPr>
-        <p:spPr>
-          <a:xfrm>
-            <a:off x="6355080" y="2103120"/>
-            <a:ext cx="4846320" cy="365760"/>
-          </a:xfrm>
-          <a:prstGeom prst="rect">
-            <a:avLst/>
-          </a:prstGeom>
-          <a:noFill/>
-          <a:ln/>
-        </p:spPr>
-        <p:txBody>
-          <a:bodyPr wrap="square" lIns="0" tIns="0" rIns="0" bIns="0" rtlCol="0" anchor="ctr"/>
-          <a:lstStyle/>
-          <a:p>
-            <a:pPr indent="0" marL="0">
-              <a:buNone/>
-            </a:pPr>
-            <a:r>
-              <a:rPr lang="en-US" sz="1400" b="1" dirty="0">
-                <a:solidFill>
-                  <a:srgbClr val="EB8F8F"/>
-                </a:solidFill>
-                <a:latin typeface="Calibri" pitchFamily="34" charset="0"/>
-                <a:ea typeface="Calibri" pitchFamily="34" charset="-122"/>
-                <a:cs typeface="Calibri" pitchFamily="34" charset="-120"/>
-              </a:rPr>
-              <a:t>不正解側に出やすい動詞</a:t>
-            </a:r>
-            <a:endParaRPr lang="en-US" sz="1400" dirty="0"/>
-          </a:p>
-        </p:txBody>
-      </p:sp>
-      <p:sp>
-        <p:nvSpPr>
-          <p:cNvPr id="10" name="Text 8"/>
-          <p:cNvSpPr txBox="1"/>
-          <p:nvPr/>
-        </p:nvSpPr>
-        <p:spPr>
-          <a:xfrm>
-            <a:off x="6355080" y="2560320"/>
-            <a:ext cx="4846320" cy="2103120"/>
-          </a:xfrm>
-          <a:prstGeom prst="rect">
-            <a:avLst/>
-          </a:prstGeom>
-          <a:noFill/>
-          <a:ln/>
-        </p:spPr>
-        <p:txBody>
-          <a:bodyPr wrap="square" lIns="0" tIns="0" rIns="0" bIns="0" rtlCol="0" anchor="ctr"/>
-          <a:lstStyle/>
+              <a:t>政府発行ID+決済カード番号全桁+氏名の紐付けのように複数の機微要素が重なるデータが、最も明確に追加対応(削除・匿名化・個別認可)を要する</a:t>
+            </a:r>
+            <a:endParaRPr lang="en-US" sz="1050" dirty="0"/>
+          </a:p>
           <a:p>
             <a:pPr marL="342900" indent="-342900">
               <a:spcAft>
-                <a:spcPts val="1000"/>
+                <a:spcPts val="500"/>
               </a:spcAft>
               <a:buSzPct val="100000"/>
               <a:buChar char="•"/>
             </a:pPr>
             <a:r>
-              <a:rPr lang="en-US" sz="1300" dirty="0">
+              <a:rPr lang="en-US" sz="1050" dirty="0">
                 <a:solidFill>
                   <a:srgbClr val="F2F4F8"/>
                 </a:solidFill>
@@ -4647,96 +5206,15 @@
                 <a:ea typeface="Calibri" pitchFamily="34" charset="-122"/>
                 <a:cs typeface="Calibri" pitchFamily="34" charset="-120"/>
               </a:rPr>
-              <a:t>send as-is(そのまま送る)</a:t>
-            </a:r>
-            <a:endParaRPr lang="en-US" sz="1300" dirty="0"/>
-          </a:p>
-          <a:p>
-            <a:pPr marL="342900" indent="-342900">
-              <a:spcAft>
-                <a:spcPts val="1000"/>
-              </a:spcAft>
-              <a:buSzPct val="100000"/>
-              <a:buChar char="•"/>
-            </a:pPr>
-            <a:r>
-              <a:rPr lang="en-US" sz="1300" dirty="0">
-                <a:solidFill>
-                  <a:srgbClr val="F2F4F8"/>
-                </a:solidFill>
-                <a:latin typeface="Calibri" pitchFamily="34" charset="0"/>
-                <a:ea typeface="Calibri" pitchFamily="34" charset="-122"/>
-                <a:cs typeface="Calibri" pitchFamily="34" charset="-120"/>
-              </a:rPr>
-              <a:t>assume(決めつける)</a:t>
-            </a:r>
-            <a:endParaRPr lang="en-US" sz="1300" dirty="0"/>
-          </a:p>
-          <a:p>
-            <a:pPr marL="342900" indent="-342900">
-              <a:spcAft>
-                <a:spcPts val="1000"/>
-              </a:spcAft>
-              <a:buSzPct val="100000"/>
-              <a:buChar char="•"/>
-            </a:pPr>
-            <a:r>
-              <a:rPr lang="en-US" sz="1300" dirty="0">
-                <a:solidFill>
-                  <a:srgbClr val="F2F4F8"/>
-                </a:solidFill>
-                <a:latin typeface="Calibri" pitchFamily="34" charset="0"/>
-                <a:ea typeface="Calibri" pitchFamily="34" charset="-122"/>
-                <a:cs typeface="Calibri" pitchFamily="34" charset="-120"/>
-              </a:rPr>
-              <a:t>skip(省略する)</a:t>
-            </a:r>
-            <a:endParaRPr lang="en-US" sz="1300" dirty="0"/>
-          </a:p>
-        </p:txBody>
-      </p:sp>
-      <p:sp>
-        <p:nvSpPr>
-          <p:cNvPr id="11" name="Text 9"/>
-          <p:cNvSpPr txBox="1"/>
-          <p:nvPr/>
-        </p:nvSpPr>
-        <p:spPr>
-          <a:xfrm>
-            <a:off x="548640" y="5120640"/>
-            <a:ext cx="10881360" cy="822960"/>
-          </a:xfrm>
-          <a:prstGeom prst="rect">
-            <a:avLst/>
-          </a:prstGeom>
-          <a:noFill/>
-          <a:ln/>
-        </p:spPr>
-        <p:txBody>
-          <a:bodyPr wrap="square" lIns="0" tIns="0" rIns="0" bIns="0" rtlCol="0" anchor="ctr"/>
-          <a:lstStyle/>
-          <a:p>
-            <a:pPr indent="0" marL="0">
-              <a:buNone/>
-            </a:pPr>
-            <a:r>
-              <a:rPr lang="en-US" sz="1200" i="1" dirty="0">
-                <a:solidFill>
-                  <a:srgbClr val="B9C4DB"/>
-                </a:solidFill>
-                <a:latin typeface="Calibri" pitchFamily="34" charset="0"/>
-                <a:ea typeface="Calibri" pitchFamily="34" charset="-122"/>
-                <a:cs typeface="Calibri" pitchFamily="34" charset="-120"/>
-              </a:rPr>
-              <a:t>公式サンプル問題3問すべての正解パターン(照合して確認する／適切なモデル選定／削除・匿名化する)とも一致。迷った際の有力な手がかりになる</a:t>
-            </a:r>
-            <a:endParaRPr lang="en-US" sz="1200" dirty="0"/>
-          </a:p>
-        </p:txBody>
-      </p:sp>
-      <p:sp>
-        <p:nvSpPr>
-          <p:cNvPr id="12" name="Text 10"/>
+              <a:t>適切な使い方の境界線: AIによる下書き作成の一律禁止(過度に保守的)でも、使用前レビューの省略(過度に楽観的)でもなく、人間が使用前に確認・テストする設計が適切</a:t>
+            </a:r>
+            <a:endParaRPr lang="en-US" sz="1050" dirty="0"/>
+          </a:p>
+        </p:txBody>
+      </p:sp>
+      <p:sp>
+        <p:nvSpPr>
+          <p:cNvPr id="9" name="Text 7"/>
           <p:cNvSpPr txBox="1"/>
           <p:nvPr/>
         </p:nvSpPr>
@@ -4767,7 +5245,7 @@
                 <a:ea typeface="Calibri" pitchFamily="34" charset="-122"/>
                 <a:cs typeface="Calibri" pitchFamily="34" charset="-120"/>
               </a:rPr>
-              <a:t>出典: ユーザー収集の受験記事(Qiita)より</a:t>
+              <a:t>出典: ユーザー提供のUdemy模擬試験(Practice Exams Claude Certified Associate Foundations CCAO-F)より</a:t>
             </a:r>
             <a:endParaRPr lang="en-US" sz="900" dirty="0"/>
           </a:p>
@@ -4775,7 +5253,7 @@
       </p:sp>
       <p:sp>
         <p:nvSpPr>
-          <p:cNvPr id="13" name="Text 11"/>
+          <p:cNvPr id="10" name="Text 8"/>
           <p:cNvSpPr txBox="1"/>
           <p:nvPr/>
         </p:nvSpPr>
@@ -4806,7 +5284,7 @@
                 <a:ea typeface="Calibri" pitchFamily="34" charset="-122"/>
                 <a:cs typeface="Calibri" pitchFamily="34" charset="-120"/>
               </a:rPr>
-              <a:t>13</a:t>
+              <a:t>14</a:t>
             </a:r>
             <a:endParaRPr lang="en-US" sz="1000" dirty="0"/>
           </a:p>
@@ -4820,13 +5298,13 @@
 </p:sld>
 </file>
 
-<file path=ppt/slides/slide14.xml><?xml version="1.0" encoding="utf-8"?>
+<file path=ppt/slides/slide15.xml><?xml version="1.0" encoding="utf-8"?>
 <p:sld xmlns:a="http://schemas.openxmlformats.org/drawingml/2006/main" xmlns:r="http://schemas.openxmlformats.org/officeDocument/2006/relationships" xmlns:p="http://schemas.openxmlformats.org/presentationml/2006/main">
-  <p:cSld name="Slide 14">
+  <p:cSld name="Slide 15">
     <p:bg>
       <p:bgPr>
         <a:solidFill>
-          <a:srgbClr val="FFFFFF"/>
+          <a:srgbClr val="16213E"/>
         </a:solidFill>
       </p:bgPr>
     </p:bg>
@@ -4877,7 +5355,7 @@
                 <a:ea typeface="Cambria" pitchFamily="34" charset="-122"/>
                 <a:cs typeface="Cambria" pitchFamily="34" charset="-120"/>
               </a:rPr>
-              <a:t>5</a:t>
+              <a:t>4</a:t>
             </a:r>
             <a:endParaRPr lang="en-US" sz="2400" dirty="0"/>
           </a:p>
@@ -4910,13 +5388,13 @@
             <a:r>
               <a:rPr lang="en-US" sz="2200" b="1" dirty="0">
                 <a:solidFill>
-                  <a:srgbClr val="16213E"/>
+                  <a:srgbClr val="F2F4F8"/>
                 </a:solidFill>
                 <a:latin typeface="Cambria" pitchFamily="34" charset="0"/>
                 <a:ea typeface="Cambria" pitchFamily="34" charset="-122"/>
                 <a:cs typeface="Cambria" pitchFamily="34" charset="-120"/>
               </a:rPr>
-              <a:t>公式サンプル問題 1 — 分野2</a:t>
+              <a:t>試験対策テクニック: 「動詞パターン」のヒント</a:t>
             </a:r>
             <a:endParaRPr lang="en-US" sz="2200" dirty="0"/>
           </a:p>
@@ -4931,33 +5409,33 @@
         <p:spPr>
           <a:xfrm>
             <a:off x="548640" y="1371600"/>
-            <a:ext cx="10881360" cy="1097280"/>
-          </a:xfrm>
-          <a:prstGeom prst="rect">
-            <a:avLst/>
-          </a:prstGeom>
-          <a:noFill/>
-          <a:ln/>
-        </p:spPr>
-        <p:txBody>
-          <a:bodyPr wrap="square" lIns="0" tIns="0" rIns="0" bIns="0" rtlCol="0" anchor="ctr"/>
-          <a:lstStyle/>
-          <a:p>
-            <a:pPr indent="0" marL="0">
-              <a:buNone/>
-            </a:pPr>
-            <a:r>
-              <a:rPr lang="en-US" sz="1200" dirty="0">
-                <a:solidFill>
-                  <a:srgbClr val="16213E"/>
-                </a:solidFill>
-                <a:latin typeface="Calibri" pitchFamily="34" charset="0"/>
-                <a:ea typeface="Calibri" pitchFamily="34" charset="-122"/>
-                <a:cs typeface="Calibri" pitchFamily="34" charset="-120"/>
-              </a:rPr>
-              <a:t>あるアソシエイトがClaudeに新しい規制の要約を依頼したところ、Claudeは特定の項番号を引用した、確信に満ちた要約を作成しました。この要約をコンプライアンスチームに送る前に取るべき最も適切な行動はどれですか。</a:t>
-            </a:r>
-            <a:endParaRPr lang="en-US" sz="1200" dirty="0"/>
+            <a:ext cx="10881360" cy="365760"/>
+          </a:xfrm>
+          <a:prstGeom prst="rect">
+            <a:avLst/>
+          </a:prstGeom>
+          <a:noFill/>
+          <a:ln/>
+        </p:spPr>
+        <p:txBody>
+          <a:bodyPr wrap="square" lIns="0" tIns="0" rIns="0" bIns="0" rtlCol="0" anchor="ctr"/>
+          <a:lstStyle/>
+          <a:p>
+            <a:pPr indent="0" marL="0">
+              <a:buNone/>
+            </a:pPr>
+            <a:r>
+              <a:rPr lang="en-US" sz="1250" i="1" dirty="0">
+                <a:solidFill>
+                  <a:srgbClr val="B9C4DB"/>
+                </a:solidFill>
+                <a:latin typeface="Calibri" pitchFamily="34" charset="0"/>
+                <a:ea typeface="Calibri" pitchFamily="34" charset="-122"/>
+                <a:cs typeface="Calibri" pitchFamily="34" charset="-120"/>
+              </a:rPr>
+              <a:t>英語読解の実務的なコツ(受験記事より)</a:t>
+            </a:r>
+            <a:endParaRPr lang="en-US" sz="1250" dirty="0"/>
           </a:p>
         </p:txBody>
       </p:sp>
@@ -4969,20 +5447,20 @@
         </p:nvSpPr>
         <p:spPr>
           <a:xfrm>
-            <a:off x="548640" y="2606040"/>
-            <a:ext cx="10881360" cy="502920"/>
+            <a:off x="548640" y="1920240"/>
+            <a:ext cx="5303520" cy="2926080"/>
           </a:xfrm>
           <a:prstGeom prst="roundRect">
             <a:avLst>
-              <a:gd name="adj" fmla="val 10909"/>
+              <a:gd name="adj" fmla="val 3125"/>
             </a:avLst>
           </a:prstGeom>
           <a:solidFill>
-            <a:srgbClr val="F7F7F9"/>
+            <a:srgbClr val="16331F"/>
           </a:solidFill>
           <a:ln w="12700">
             <a:solidFill>
-              <a:srgbClr val="E1E6F0"/>
+              <a:srgbClr val="2E6B3E"/>
             </a:solidFill>
             <a:prstDash val="solid"/>
           </a:ln>
@@ -4996,59 +5474,165 @@
         </p:nvSpPr>
         <p:spPr>
           <a:xfrm>
-            <a:off x="731520" y="2651760"/>
-            <a:ext cx="10332720" cy="411480"/>
-          </a:xfrm>
-          <a:prstGeom prst="rect">
-            <a:avLst/>
-          </a:prstGeom>
-          <a:noFill/>
-          <a:ln/>
-        </p:spPr>
-        <p:txBody>
-          <a:bodyPr wrap="square" lIns="0" tIns="0" rIns="0" bIns="0" rtlCol="0" anchor="ctr"/>
-          <a:lstStyle/>
-          <a:p>
-            <a:pPr indent="0" marL="0">
-              <a:buNone/>
-            </a:pPr>
-            <a:r>
-              <a:rPr lang="en-US" sz="1050" dirty="0">
-                <a:solidFill>
-                  <a:srgbClr val="16213E"/>
-                </a:solidFill>
-                <a:latin typeface="Calibri" pitchFamily="34" charset="0"/>
-                <a:ea typeface="Calibri" pitchFamily="34" charset="-122"/>
-                <a:cs typeface="Calibri" pitchFamily="34" charset="-120"/>
-              </a:rPr>
-              <a:t>A.  Claudeが高い確信を示しているので、そのまま送る。</a:t>
-            </a:r>
-            <a:endParaRPr lang="en-US" sz="1050" dirty="0"/>
-          </a:p>
-        </p:txBody>
-      </p:sp>
-      <p:sp>
-        <p:nvSpPr>
-          <p:cNvPr id="7" name="Shape 5"/>
+            <a:off x="777240" y="2103120"/>
+            <a:ext cx="4846320" cy="365760"/>
+          </a:xfrm>
+          <a:prstGeom prst="rect">
+            <a:avLst/>
+          </a:prstGeom>
+          <a:noFill/>
+          <a:ln/>
+        </p:spPr>
+        <p:txBody>
+          <a:bodyPr wrap="square" lIns="0" tIns="0" rIns="0" bIns="0" rtlCol="0" anchor="ctr"/>
+          <a:lstStyle/>
+          <a:p>
+            <a:pPr indent="0" marL="0">
+              <a:buNone/>
+            </a:pPr>
+            <a:r>
+              <a:rPr lang="en-US" sz="1400" b="1" dirty="0">
+                <a:solidFill>
+                  <a:srgbClr val="6FCF97"/>
+                </a:solidFill>
+                <a:latin typeface="Calibri" pitchFamily="34" charset="0"/>
+                <a:ea typeface="Calibri" pitchFamily="34" charset="-122"/>
+                <a:cs typeface="Calibri" pitchFamily="34" charset="-120"/>
+              </a:rPr>
+              <a:t>正解側に出やすい動詞</a:t>
+            </a:r>
+            <a:endParaRPr lang="en-US" sz="1400" dirty="0"/>
+          </a:p>
+        </p:txBody>
+      </p:sp>
+      <p:sp>
+        <p:nvSpPr>
+          <p:cNvPr id="7" name="Text 5"/>
+          <p:cNvSpPr txBox="1"/>
+          <p:nvPr/>
+        </p:nvSpPr>
+        <p:spPr>
+          <a:xfrm>
+            <a:off x="777240" y="2560320"/>
+            <a:ext cx="4846320" cy="2103120"/>
+          </a:xfrm>
+          <a:prstGeom prst="rect">
+            <a:avLst/>
+          </a:prstGeom>
+          <a:noFill/>
+          <a:ln/>
+        </p:spPr>
+        <p:txBody>
+          <a:bodyPr wrap="square" lIns="0" tIns="0" rIns="0" bIns="0" rtlCol="0" anchor="ctr"/>
+          <a:lstStyle/>
+          <a:p>
+            <a:pPr marL="342900" indent="-342900">
+              <a:spcAft>
+                <a:spcPts val="1000"/>
+              </a:spcAft>
+              <a:buSzPct val="100000"/>
+              <a:buChar char="•"/>
+            </a:pPr>
+            <a:r>
+              <a:rPr lang="en-US" sz="1300" dirty="0">
+                <a:solidFill>
+                  <a:srgbClr val="F2F4F8"/>
+                </a:solidFill>
+                <a:latin typeface="Calibri" pitchFamily="34" charset="0"/>
+                <a:ea typeface="Calibri" pitchFamily="34" charset="-122"/>
+                <a:cs typeface="Calibri" pitchFamily="34" charset="-120"/>
+              </a:rPr>
+              <a:t>verify(確認する)</a:t>
+            </a:r>
+            <a:endParaRPr lang="en-US" sz="1300" dirty="0"/>
+          </a:p>
+          <a:p>
+            <a:pPr marL="342900" indent="-342900">
+              <a:spcAft>
+                <a:spcPts val="1000"/>
+              </a:spcAft>
+              <a:buSzPct val="100000"/>
+              <a:buChar char="•"/>
+            </a:pPr>
+            <a:r>
+              <a:rPr lang="en-US" sz="1300" dirty="0">
+                <a:solidFill>
+                  <a:srgbClr val="F2F4F8"/>
+                </a:solidFill>
+                <a:latin typeface="Calibri" pitchFamily="34" charset="0"/>
+                <a:ea typeface="Calibri" pitchFamily="34" charset="-122"/>
+                <a:cs typeface="Calibri" pitchFamily="34" charset="-120"/>
+              </a:rPr>
+              <a:t>escalate(エスカレーションする)</a:t>
+            </a:r>
+            <a:endParaRPr lang="en-US" sz="1300" dirty="0"/>
+          </a:p>
+          <a:p>
+            <a:pPr marL="342900" indent="-342900">
+              <a:spcAft>
+                <a:spcPts val="1000"/>
+              </a:spcAft>
+              <a:buSzPct val="100000"/>
+              <a:buChar char="•"/>
+            </a:pPr>
+            <a:r>
+              <a:rPr lang="en-US" sz="1300" dirty="0">
+                <a:solidFill>
+                  <a:srgbClr val="F2F4F8"/>
+                </a:solidFill>
+                <a:latin typeface="Calibri" pitchFamily="34" charset="0"/>
+                <a:ea typeface="Calibri" pitchFamily="34" charset="-122"/>
+                <a:cs typeface="Calibri" pitchFamily="34" charset="-120"/>
+              </a:rPr>
+              <a:t>flag(注意喚起する)</a:t>
+            </a:r>
+            <a:endParaRPr lang="en-US" sz="1300" dirty="0"/>
+          </a:p>
+          <a:p>
+            <a:pPr marL="342900" indent="-342900">
+              <a:spcAft>
+                <a:spcPts val="1000"/>
+              </a:spcAft>
+              <a:buSzPct val="100000"/>
+              <a:buChar char="•"/>
+            </a:pPr>
+            <a:r>
+              <a:rPr lang="en-US" sz="1300" dirty="0">
+                <a:solidFill>
+                  <a:srgbClr val="F2F4F8"/>
+                </a:solidFill>
+                <a:latin typeface="Calibri" pitchFamily="34" charset="0"/>
+                <a:ea typeface="Calibri" pitchFamily="34" charset="-122"/>
+                <a:cs typeface="Calibri" pitchFamily="34" charset="-120"/>
+              </a:rPr>
+              <a:t>anonymize / redact(匿名化する)</a:t>
+            </a:r>
+            <a:endParaRPr lang="en-US" sz="1300" dirty="0"/>
+          </a:p>
+        </p:txBody>
+      </p:sp>
+      <p:sp>
+        <p:nvSpPr>
+          <p:cNvPr id="8" name="Shape 6"/>
           <p:cNvSpPr/>
           <p:nvPr/>
         </p:nvSpPr>
         <p:spPr>
           <a:xfrm>
-            <a:off x="548640" y="3172968"/>
-            <a:ext cx="10881360" cy="502920"/>
+            <a:off x="6126480" y="1920240"/>
+            <a:ext cx="5303520" cy="2926080"/>
           </a:xfrm>
           <a:prstGeom prst="roundRect">
             <a:avLst>
-              <a:gd name="adj" fmla="val 10909"/>
+              <a:gd name="adj" fmla="val 3125"/>
             </a:avLst>
           </a:prstGeom>
           <a:solidFill>
-            <a:srgbClr val="E8F5EC"/>
+            <a:srgbClr val="33181B"/>
           </a:solidFill>
           <a:ln w="12700">
             <a:solidFill>
-              <a:srgbClr val="6FCF97"/>
+              <a:srgbClr val="6B2E33"/>
             </a:solidFill>
             <a:prstDash val="solid"/>
           </a:ln>
@@ -5056,69 +5640,42 @@
       </p:sp>
       <p:sp>
         <p:nvSpPr>
-          <p:cNvPr id="8" name="Text 6"/>
-          <p:cNvSpPr txBox="1"/>
-          <p:nvPr/>
-        </p:nvSpPr>
-        <p:spPr>
-          <a:xfrm>
-            <a:off x="731520" y="3218688"/>
-            <a:ext cx="10332720" cy="411480"/>
-          </a:xfrm>
-          <a:prstGeom prst="rect">
-            <a:avLst/>
-          </a:prstGeom>
-          <a:noFill/>
-          <a:ln/>
-        </p:spPr>
-        <p:txBody>
-          <a:bodyPr wrap="square" lIns="0" tIns="0" rIns="0" bIns="0" rtlCol="0" anchor="ctr"/>
-          <a:lstStyle/>
-          <a:p>
-            <a:pPr indent="0" marL="0">
-              <a:buNone/>
-            </a:pPr>
-            <a:r>
-              <a:rPr lang="en-US" sz="1050" b="1" dirty="0">
-                <a:solidFill>
-                  <a:srgbClr val="1F7A3E"/>
-                </a:solidFill>
-                <a:latin typeface="Calibri" pitchFamily="34" charset="0"/>
-                <a:ea typeface="Calibri" pitchFamily="34" charset="-122"/>
-                <a:cs typeface="Calibri" pitchFamily="34" charset="-120"/>
-              </a:rPr>
-              <a:t>B.  共有する前に、引用された項を規制の公式な条文と照合して確認する。</a:t>
-            </a:r>
-            <a:endParaRPr lang="en-US" sz="1050" dirty="0"/>
-          </a:p>
-        </p:txBody>
-      </p:sp>
-      <p:sp>
-        <p:nvSpPr>
-          <p:cNvPr id="9" name="Shape 7"/>
-          <p:cNvSpPr/>
-          <p:nvPr/>
-        </p:nvSpPr>
-        <p:spPr>
-          <a:xfrm>
-            <a:off x="548640" y="3739896"/>
-            <a:ext cx="10881360" cy="502920"/>
-          </a:xfrm>
-          <a:prstGeom prst="roundRect">
-            <a:avLst>
-              <a:gd name="adj" fmla="val 10909"/>
-            </a:avLst>
-          </a:prstGeom>
-          <a:solidFill>
-            <a:srgbClr val="F7F7F9"/>
-          </a:solidFill>
-          <a:ln w="12700">
-            <a:solidFill>
-              <a:srgbClr val="E1E6F0"/>
-            </a:solidFill>
-            <a:prstDash val="solid"/>
-          </a:ln>
-        </p:spPr>
+          <p:cNvPr id="9" name="Text 7"/>
+          <p:cNvSpPr txBox="1"/>
+          <p:nvPr/>
+        </p:nvSpPr>
+        <p:spPr>
+          <a:xfrm>
+            <a:off x="6355080" y="2103120"/>
+            <a:ext cx="4846320" cy="365760"/>
+          </a:xfrm>
+          <a:prstGeom prst="rect">
+            <a:avLst/>
+          </a:prstGeom>
+          <a:noFill/>
+          <a:ln/>
+        </p:spPr>
+        <p:txBody>
+          <a:bodyPr wrap="square" lIns="0" tIns="0" rIns="0" bIns="0" rtlCol="0" anchor="ctr"/>
+          <a:lstStyle/>
+          <a:p>
+            <a:pPr indent="0" marL="0">
+              <a:buNone/>
+            </a:pPr>
+            <a:r>
+              <a:rPr lang="en-US" sz="1400" b="1" dirty="0">
+                <a:solidFill>
+                  <a:srgbClr val="EB8F8F"/>
+                </a:solidFill>
+                <a:latin typeface="Calibri" pitchFamily="34" charset="0"/>
+                <a:ea typeface="Calibri" pitchFamily="34" charset="-122"/>
+                <a:cs typeface="Calibri" pitchFamily="34" charset="-120"/>
+              </a:rPr>
+              <a:t>不正解側に出やすい動詞</a:t>
+            </a:r>
+            <a:endParaRPr lang="en-US" sz="1400" dirty="0"/>
+          </a:p>
+        </p:txBody>
       </p:sp>
       <p:sp>
         <p:nvSpPr>
@@ -5128,145 +5685,125 @@
         </p:nvSpPr>
         <p:spPr>
           <a:xfrm>
-            <a:off x="731520" y="3785616"/>
-            <a:ext cx="10332720" cy="411480"/>
-          </a:xfrm>
-          <a:prstGeom prst="rect">
-            <a:avLst/>
-          </a:prstGeom>
-          <a:noFill/>
-          <a:ln/>
-        </p:spPr>
-        <p:txBody>
-          <a:bodyPr wrap="square" lIns="0" tIns="0" rIns="0" bIns="0" rtlCol="0" anchor="ctr"/>
-          <a:lstStyle/>
-          <a:p>
-            <a:pPr indent="0" marL="0">
-              <a:buNone/>
-            </a:pPr>
-            <a:r>
-              <a:rPr lang="en-US" sz="1050" dirty="0">
-                <a:solidFill>
-                  <a:srgbClr val="16213E"/>
-                </a:solidFill>
-                <a:latin typeface="Calibri" pitchFamily="34" charset="0"/>
-                <a:ea typeface="Calibri" pitchFamily="34" charset="-122"/>
-                <a:cs typeface="Calibri" pitchFamily="34" charset="-120"/>
-              </a:rPr>
-              <a:t>C.  Claudeに自身の確信度を評価させ、評価が高ければ送る。</a:t>
-            </a:r>
-            <a:endParaRPr lang="en-US" sz="1050" dirty="0"/>
-          </a:p>
-        </p:txBody>
-      </p:sp>
-      <p:sp>
-        <p:nvSpPr>
-          <p:cNvPr id="11" name="Shape 9"/>
-          <p:cNvSpPr/>
-          <p:nvPr/>
-        </p:nvSpPr>
-        <p:spPr>
-          <a:xfrm>
-            <a:off x="548640" y="4306824"/>
-            <a:ext cx="10881360" cy="502920"/>
-          </a:xfrm>
-          <a:prstGeom prst="roundRect">
-            <a:avLst>
-              <a:gd name="adj" fmla="val 10909"/>
-            </a:avLst>
-          </a:prstGeom>
-          <a:solidFill>
-            <a:srgbClr val="F7F7F9"/>
-          </a:solidFill>
-          <a:ln w="12700">
-            <a:solidFill>
-              <a:srgbClr val="E1E6F0"/>
-            </a:solidFill>
-            <a:prstDash val="solid"/>
-          </a:ln>
-        </p:spPr>
+            <a:off x="6355080" y="2560320"/>
+            <a:ext cx="4846320" cy="2103120"/>
+          </a:xfrm>
+          <a:prstGeom prst="rect">
+            <a:avLst/>
+          </a:prstGeom>
+          <a:noFill/>
+          <a:ln/>
+        </p:spPr>
+        <p:txBody>
+          <a:bodyPr wrap="square" lIns="0" tIns="0" rIns="0" bIns="0" rtlCol="0" anchor="ctr"/>
+          <a:lstStyle/>
+          <a:p>
+            <a:pPr marL="342900" indent="-342900">
+              <a:spcAft>
+                <a:spcPts val="1000"/>
+              </a:spcAft>
+              <a:buSzPct val="100000"/>
+              <a:buChar char="•"/>
+            </a:pPr>
+            <a:r>
+              <a:rPr lang="en-US" sz="1300" dirty="0">
+                <a:solidFill>
+                  <a:srgbClr val="F2F4F8"/>
+                </a:solidFill>
+                <a:latin typeface="Calibri" pitchFamily="34" charset="0"/>
+                <a:ea typeface="Calibri" pitchFamily="34" charset="-122"/>
+                <a:cs typeface="Calibri" pitchFamily="34" charset="-120"/>
+              </a:rPr>
+              <a:t>send as-is(そのまま送る)</a:t>
+            </a:r>
+            <a:endParaRPr lang="en-US" sz="1300" dirty="0"/>
+          </a:p>
+          <a:p>
+            <a:pPr marL="342900" indent="-342900">
+              <a:spcAft>
+                <a:spcPts val="1000"/>
+              </a:spcAft>
+              <a:buSzPct val="100000"/>
+              <a:buChar char="•"/>
+            </a:pPr>
+            <a:r>
+              <a:rPr lang="en-US" sz="1300" dirty="0">
+                <a:solidFill>
+                  <a:srgbClr val="F2F4F8"/>
+                </a:solidFill>
+                <a:latin typeface="Calibri" pitchFamily="34" charset="0"/>
+                <a:ea typeface="Calibri" pitchFamily="34" charset="-122"/>
+                <a:cs typeface="Calibri" pitchFamily="34" charset="-120"/>
+              </a:rPr>
+              <a:t>assume(決めつける)</a:t>
+            </a:r>
+            <a:endParaRPr lang="en-US" sz="1300" dirty="0"/>
+          </a:p>
+          <a:p>
+            <a:pPr marL="342900" indent="-342900">
+              <a:spcAft>
+                <a:spcPts val="1000"/>
+              </a:spcAft>
+              <a:buSzPct val="100000"/>
+              <a:buChar char="•"/>
+            </a:pPr>
+            <a:r>
+              <a:rPr lang="en-US" sz="1300" dirty="0">
+                <a:solidFill>
+                  <a:srgbClr val="F2F4F8"/>
+                </a:solidFill>
+                <a:latin typeface="Calibri" pitchFamily="34" charset="0"/>
+                <a:ea typeface="Calibri" pitchFamily="34" charset="-122"/>
+                <a:cs typeface="Calibri" pitchFamily="34" charset="-120"/>
+              </a:rPr>
+              <a:t>skip(省略する)</a:t>
+            </a:r>
+            <a:endParaRPr lang="en-US" sz="1300" dirty="0"/>
+          </a:p>
+        </p:txBody>
+      </p:sp>
+      <p:sp>
+        <p:nvSpPr>
+          <p:cNvPr id="11" name="Text 9"/>
+          <p:cNvSpPr txBox="1"/>
+          <p:nvPr/>
+        </p:nvSpPr>
+        <p:spPr>
+          <a:xfrm>
+            <a:off x="548640" y="5120640"/>
+            <a:ext cx="10881360" cy="822960"/>
+          </a:xfrm>
+          <a:prstGeom prst="rect">
+            <a:avLst/>
+          </a:prstGeom>
+          <a:noFill/>
+          <a:ln/>
+        </p:spPr>
+        <p:txBody>
+          <a:bodyPr wrap="square" lIns="0" tIns="0" rIns="0" bIns="0" rtlCol="0" anchor="ctr"/>
+          <a:lstStyle/>
+          <a:p>
+            <a:pPr indent="0" marL="0">
+              <a:buNone/>
+            </a:pPr>
+            <a:r>
+              <a:rPr lang="en-US" sz="1200" i="1" dirty="0">
+                <a:solidFill>
+                  <a:srgbClr val="B9C4DB"/>
+                </a:solidFill>
+                <a:latin typeface="Calibri" pitchFamily="34" charset="0"/>
+                <a:ea typeface="Calibri" pitchFamily="34" charset="-122"/>
+                <a:cs typeface="Calibri" pitchFamily="34" charset="-120"/>
+              </a:rPr>
+              <a:t>公式サンプル問題3問すべての正解パターン(照合して確認する／適切なモデル選定／削除・匿名化する)とも一致。迷った際の有力な手がかりになる</a:t>
+            </a:r>
+            <a:endParaRPr lang="en-US" sz="1200" dirty="0"/>
+          </a:p>
+        </p:txBody>
       </p:sp>
       <p:sp>
         <p:nvSpPr>
           <p:cNvPr id="12" name="Text 10"/>
-          <p:cNvSpPr txBox="1"/>
-          <p:nvPr/>
-        </p:nvSpPr>
-        <p:spPr>
-          <a:xfrm>
-            <a:off x="731520" y="4352544"/>
-            <a:ext cx="10332720" cy="411480"/>
-          </a:xfrm>
-          <a:prstGeom prst="rect">
-            <a:avLst/>
-          </a:prstGeom>
-          <a:noFill/>
-          <a:ln/>
-        </p:spPr>
-        <p:txBody>
-          <a:bodyPr wrap="square" lIns="0" tIns="0" rIns="0" bIns="0" rtlCol="0" anchor="ctr"/>
-          <a:lstStyle/>
-          <a:p>
-            <a:pPr indent="0" marL="0">
-              <a:buNone/>
-            </a:pPr>
-            <a:r>
-              <a:rPr lang="en-US" sz="1050" dirty="0">
-                <a:solidFill>
-                  <a:srgbClr val="16213E"/>
-                </a:solidFill>
-                <a:latin typeface="Calibri" pitchFamily="34" charset="0"/>
-                <a:ea typeface="Calibri" pitchFamily="34" charset="-122"/>
-                <a:cs typeface="Calibri" pitchFamily="34" charset="-120"/>
-              </a:rPr>
-              <a:t>D.  よりフォーマルに聞こえるように要約を書き換えてから送る。</a:t>
-            </a:r>
-            <a:endParaRPr lang="en-US" sz="1050" dirty="0"/>
-          </a:p>
-        </p:txBody>
-      </p:sp>
-      <p:sp>
-        <p:nvSpPr>
-          <p:cNvPr id="13" name="Text 11"/>
-          <p:cNvSpPr txBox="1"/>
-          <p:nvPr/>
-        </p:nvSpPr>
-        <p:spPr>
-          <a:xfrm>
-            <a:off x="548640" y="4965192"/>
-            <a:ext cx="10881360" cy="1069848"/>
-          </a:xfrm>
-          <a:prstGeom prst="rect">
-            <a:avLst/>
-          </a:prstGeom>
-          <a:noFill/>
-          <a:ln/>
-        </p:spPr>
-        <p:txBody>
-          <a:bodyPr wrap="square" lIns="0" tIns="0" rIns="0" bIns="0" rtlCol="0" anchor="ctr"/>
-          <a:lstStyle/>
-          <a:p>
-            <a:pPr indent="0" marL="0">
-              <a:buNone/>
-            </a:pPr>
-            <a:r>
-              <a:rPr lang="en-US" sz="1000" i="1" dirty="0">
-                <a:solidFill>
-                  <a:srgbClr val="5B6B8C"/>
-                </a:solidFill>
-                <a:latin typeface="Calibri" pitchFamily="34" charset="0"/>
-                <a:ea typeface="Calibri" pitchFamily="34" charset="-122"/>
-                <a:cs typeface="Calibri" pitchFamily="34" charset="-120"/>
-              </a:rPr>
-              <a:t>解説: 言語モデルは引用番号のような具体的に見える詳細を捏造することがある(ハルシネーション)。自己申告の確信度(A・C)は正確性の信頼できる指標ではなく、体裁の変更(D)は正しさの問題に対処しない。</a:t>
-            </a:r>
-            <a:endParaRPr lang="en-US" sz="1000" dirty="0"/>
-          </a:p>
-        </p:txBody>
-      </p:sp>
-      <p:sp>
-        <p:nvSpPr>
-          <p:cNvPr id="14" name="Text 12"/>
           <p:cNvSpPr txBox="1"/>
           <p:nvPr/>
         </p:nvSpPr>
@@ -5291,13 +5828,13 @@
             <a:r>
               <a:rPr lang="en-US" sz="900" i="1" dirty="0">
                 <a:solidFill>
-                  <a:srgbClr val="5B6B8C"/>
-                </a:solidFill>
-                <a:latin typeface="Calibri" pitchFamily="34" charset="0"/>
-                <a:ea typeface="Calibri" pitchFamily="34" charset="-122"/>
-                <a:cs typeface="Calibri" pitchFamily="34" charset="-120"/>
-              </a:rPr>
-              <a:t>出典: Anthropic公式試験ガイド セクション8(原文訳)</a:t>
+                  <a:srgbClr val="B9C4DB"/>
+                </a:solidFill>
+                <a:latin typeface="Calibri" pitchFamily="34" charset="0"/>
+                <a:ea typeface="Calibri" pitchFamily="34" charset="-122"/>
+                <a:cs typeface="Calibri" pitchFamily="34" charset="-120"/>
+              </a:rPr>
+              <a:t>出典: ユーザー収集の受験記事(Qiita)より</a:t>
             </a:r>
             <a:endParaRPr lang="en-US" sz="900" dirty="0"/>
           </a:p>
@@ -5305,537 +5842,7 @@
       </p:sp>
       <p:sp>
         <p:nvSpPr>
-          <p:cNvPr id="15" name="Text 13"/>
-          <p:cNvSpPr txBox="1"/>
-          <p:nvPr/>
-        </p:nvSpPr>
-        <p:spPr>
-          <a:xfrm>
-            <a:off x="11521440" y="6492240"/>
-            <a:ext cx="457200" cy="274320"/>
-          </a:xfrm>
-          <a:prstGeom prst="rect">
-            <a:avLst/>
-          </a:prstGeom>
-          <a:noFill/>
-          <a:ln/>
-        </p:spPr>
-        <p:txBody>
-          <a:bodyPr wrap="square" lIns="0" tIns="0" rIns="0" bIns="0" rtlCol="0" anchor="ctr"/>
-          <a:lstStyle/>
-          <a:p>
-            <a:pPr algn="r" indent="0" marL="0">
-              <a:buNone/>
-            </a:pPr>
-            <a:r>
-              <a:rPr lang="en-US" sz="1000" dirty="0">
-                <a:solidFill>
-                  <a:srgbClr val="5B6B8C"/>
-                </a:solidFill>
-                <a:latin typeface="Calibri" pitchFamily="34" charset="0"/>
-                <a:ea typeface="Calibri" pitchFamily="34" charset="-122"/>
-                <a:cs typeface="Calibri" pitchFamily="34" charset="-120"/>
-              </a:rPr>
-              <a:t>14</a:t>
-            </a:r>
-            <a:endParaRPr lang="en-US" sz="1000" dirty="0"/>
-          </a:p>
-        </p:txBody>
-      </p:sp>
-    </p:spTree>
-  </p:cSld>
-  <p:clrMapOvr>
-    <a:masterClrMapping/>
-  </p:clrMapOvr>
-</p:sld>
-</file>
-
-<file path=ppt/slides/slide15.xml><?xml version="1.0" encoding="utf-8"?>
-<p:sld xmlns:a="http://schemas.openxmlformats.org/drawingml/2006/main" xmlns:r="http://schemas.openxmlformats.org/officeDocument/2006/relationships" xmlns:p="http://schemas.openxmlformats.org/presentationml/2006/main">
-  <p:cSld name="Slide 15">
-    <p:bg>
-      <p:bgPr>
-        <a:solidFill>
-          <a:srgbClr val="FFFFFF"/>
-        </a:solidFill>
-      </p:bgPr>
-    </p:bg>
-    <p:spTree>
-      <p:nvGrpSpPr>
-        <p:cNvPr id="1" name=""/>
-        <p:cNvGrpSpPr/>
-        <p:nvPr/>
-      </p:nvGrpSpPr>
-      <p:grpSpPr>
-        <a:xfrm>
-          <a:off x="0" y="0"/>
-          <a:ext cx="0" cy="0"/>
-          <a:chOff x="0" y="0"/>
-          <a:chExt cx="0" cy="0"/>
-        </a:xfrm>
-      </p:grpSpPr>
-      <p:sp>
-        <p:nvSpPr>
-          <p:cNvPr id="2" name="Text 0"/>
-          <p:cNvSpPr txBox="1"/>
-          <p:nvPr/>
-        </p:nvSpPr>
-        <p:spPr>
-          <a:xfrm>
-            <a:off x="548640" y="411480"/>
-            <a:ext cx="731520" cy="685800"/>
-          </a:xfrm>
-          <a:prstGeom prst="rect">
-            <a:avLst/>
-          </a:prstGeom>
-          <a:noFill/>
-          <a:ln/>
-        </p:spPr>
-        <p:txBody>
-          <a:bodyPr wrap="square" lIns="0" tIns="0" rIns="0" bIns="0" rtlCol="0" anchor="ctr"/>
-          <a:lstStyle/>
-          <a:p>
-            <a:pPr indent="0" marL="0">
-              <a:buNone/>
-            </a:pPr>
-            <a:r>
-              <a:rPr lang="en-US" sz="2400" b="1" dirty="0">
-                <a:solidFill>
-                  <a:srgbClr val="3E64FF"/>
-                </a:solidFill>
-                <a:latin typeface="Cambria" pitchFamily="34" charset="0"/>
-                <a:ea typeface="Cambria" pitchFamily="34" charset="-122"/>
-                <a:cs typeface="Cambria" pitchFamily="34" charset="-120"/>
-              </a:rPr>
-              <a:t>5</a:t>
-            </a:r>
-            <a:endParaRPr lang="en-US" sz="2400" dirty="0"/>
-          </a:p>
-        </p:txBody>
-      </p:sp>
-      <p:sp>
-        <p:nvSpPr>
-          <p:cNvPr id="3" name="Text 1"/>
-          <p:cNvSpPr txBox="1"/>
-          <p:nvPr/>
-        </p:nvSpPr>
-        <p:spPr>
-          <a:xfrm>
-            <a:off x="1234440" y="457200"/>
-            <a:ext cx="10332720" cy="594360"/>
-          </a:xfrm>
-          <a:prstGeom prst="rect">
-            <a:avLst/>
-          </a:prstGeom>
-          <a:noFill/>
-          <a:ln/>
-        </p:spPr>
-        <p:txBody>
-          <a:bodyPr wrap="square" lIns="0" tIns="0" rIns="0" bIns="0" rtlCol="0" anchor="ctr"/>
-          <a:lstStyle/>
-          <a:p>
-            <a:pPr indent="0" marL="0">
-              <a:buNone/>
-            </a:pPr>
-            <a:r>
-              <a:rPr lang="en-US" sz="2200" b="1" dirty="0">
-                <a:solidFill>
-                  <a:srgbClr val="16213E"/>
-                </a:solidFill>
-                <a:latin typeface="Cambria" pitchFamily="34" charset="0"/>
-                <a:ea typeface="Cambria" pitchFamily="34" charset="-122"/>
-                <a:cs typeface="Cambria" pitchFamily="34" charset="-120"/>
-              </a:rPr>
-              <a:t>公式サンプル問題 2 — 分野3</a:t>
-            </a:r>
-            <a:endParaRPr lang="en-US" sz="2200" dirty="0"/>
-          </a:p>
-        </p:txBody>
-      </p:sp>
-      <p:sp>
-        <p:nvSpPr>
-          <p:cNvPr id="4" name="Text 2"/>
-          <p:cNvSpPr txBox="1"/>
-          <p:nvPr/>
-        </p:nvSpPr>
-        <p:spPr>
-          <a:xfrm>
-            <a:off x="548640" y="1371600"/>
-            <a:ext cx="10881360" cy="1097280"/>
-          </a:xfrm>
-          <a:prstGeom prst="rect">
-            <a:avLst/>
-          </a:prstGeom>
-          <a:noFill/>
-          <a:ln/>
-        </p:spPr>
-        <p:txBody>
-          <a:bodyPr wrap="square" lIns="0" tIns="0" rIns="0" bIns="0" rtlCol="0" anchor="ctr"/>
-          <a:lstStyle/>
-          <a:p>
-            <a:pPr indent="0" marL="0">
-              <a:buNone/>
-            </a:pPr>
-            <a:r>
-              <a:rPr lang="en-US" sz="1200" dirty="0">
-                <a:solidFill>
-                  <a:srgbClr val="16213E"/>
-                </a:solidFill>
-                <a:latin typeface="Calibri" pitchFamily="34" charset="0"/>
-                <a:ea typeface="Calibri" pitchFamily="34" charset="-122"/>
-                <a:cs typeface="Calibri" pitchFamily="34" charset="-120"/>
-              </a:rPr>
-              <a:t>あるアソシエイトは、短い顧客返信の下書きを大量に生成する必要があり、深い推論よりも速度とコストが重要です。このタスクに最も適した選択肢はどれですか。</a:t>
-            </a:r>
-            <a:endParaRPr lang="en-US" sz="1200" dirty="0"/>
-          </a:p>
-        </p:txBody>
-      </p:sp>
-      <p:sp>
-        <p:nvSpPr>
-          <p:cNvPr id="5" name="Shape 3"/>
-          <p:cNvSpPr/>
-          <p:nvPr/>
-        </p:nvSpPr>
-        <p:spPr>
-          <a:xfrm>
-            <a:off x="548640" y="2606040"/>
-            <a:ext cx="10881360" cy="502920"/>
-          </a:xfrm>
-          <a:prstGeom prst="roundRect">
-            <a:avLst>
-              <a:gd name="adj" fmla="val 10909"/>
-            </a:avLst>
-          </a:prstGeom>
-          <a:solidFill>
-            <a:srgbClr val="F7F7F9"/>
-          </a:solidFill>
-          <a:ln w="12700">
-            <a:solidFill>
-              <a:srgbClr val="E1E6F0"/>
-            </a:solidFill>
-            <a:prstDash val="solid"/>
-          </a:ln>
-        </p:spPr>
-      </p:sp>
-      <p:sp>
-        <p:nvSpPr>
-          <p:cNvPr id="6" name="Text 4"/>
-          <p:cNvSpPr txBox="1"/>
-          <p:nvPr/>
-        </p:nvSpPr>
-        <p:spPr>
-          <a:xfrm>
-            <a:off x="731520" y="2651760"/>
-            <a:ext cx="10332720" cy="411480"/>
-          </a:xfrm>
-          <a:prstGeom prst="rect">
-            <a:avLst/>
-          </a:prstGeom>
-          <a:noFill/>
-          <a:ln/>
-        </p:spPr>
-        <p:txBody>
-          <a:bodyPr wrap="square" lIns="0" tIns="0" rIns="0" bIns="0" rtlCol="0" anchor="ctr"/>
-          <a:lstStyle/>
-          <a:p>
-            <a:pPr indent="0" marL="0">
-              <a:buNone/>
-            </a:pPr>
-            <a:r>
-              <a:rPr lang="en-US" sz="1050" dirty="0">
-                <a:solidFill>
-                  <a:srgbClr val="16213E"/>
-                </a:solidFill>
-                <a:latin typeface="Calibri" pitchFamily="34" charset="0"/>
-                <a:ea typeface="Calibri" pitchFamily="34" charset="-122"/>
-                <a:cs typeface="Calibri" pitchFamily="34" charset="-120"/>
-              </a:rPr>
-              <a:t>A.  品質を最大化するために、すべての返信に最も高性能で最もコストの高いモデルを使用する。</a:t>
-            </a:r>
-            <a:endParaRPr lang="en-US" sz="1050" dirty="0"/>
-          </a:p>
-        </p:txBody>
-      </p:sp>
-      <p:sp>
-        <p:nvSpPr>
-          <p:cNvPr id="7" name="Shape 5"/>
-          <p:cNvSpPr/>
-          <p:nvPr/>
-        </p:nvSpPr>
-        <p:spPr>
-          <a:xfrm>
-            <a:off x="548640" y="3172968"/>
-            <a:ext cx="10881360" cy="502920"/>
-          </a:xfrm>
-          <a:prstGeom prst="roundRect">
-            <a:avLst>
-              <a:gd name="adj" fmla="val 10909"/>
-            </a:avLst>
-          </a:prstGeom>
-          <a:solidFill>
-            <a:srgbClr val="E8F5EC"/>
-          </a:solidFill>
-          <a:ln w="12700">
-            <a:solidFill>
-              <a:srgbClr val="6FCF97"/>
-            </a:solidFill>
-            <a:prstDash val="solid"/>
-          </a:ln>
-        </p:spPr>
-      </p:sp>
-      <p:sp>
-        <p:nvSpPr>
-          <p:cNvPr id="8" name="Text 6"/>
-          <p:cNvSpPr txBox="1"/>
-          <p:nvPr/>
-        </p:nvSpPr>
-        <p:spPr>
-          <a:xfrm>
-            <a:off x="731520" y="3218688"/>
-            <a:ext cx="10332720" cy="411480"/>
-          </a:xfrm>
-          <a:prstGeom prst="rect">
-            <a:avLst/>
-          </a:prstGeom>
-          <a:noFill/>
-          <a:ln/>
-        </p:spPr>
-        <p:txBody>
-          <a:bodyPr wrap="square" lIns="0" tIns="0" rIns="0" bIns="0" rtlCol="0" anchor="ctr"/>
-          <a:lstStyle/>
-          <a:p>
-            <a:pPr indent="0" marL="0">
-              <a:buNone/>
-            </a:pPr>
-            <a:r>
-              <a:rPr lang="en-US" sz="1050" b="1" dirty="0">
-                <a:solidFill>
-                  <a:srgbClr val="1F7A3E"/>
-                </a:solidFill>
-                <a:latin typeface="Calibri" pitchFamily="34" charset="0"/>
-                <a:ea typeface="Calibri" pitchFamily="34" charset="-122"/>
-                <a:cs typeface="Calibri" pitchFamily="34" charset="-120"/>
-              </a:rPr>
-              <a:t>B.  単純で大量のタスクに適した、より高速で低コストのモデルを使用する。</a:t>
-            </a:r>
-            <a:endParaRPr lang="en-US" sz="1050" dirty="0"/>
-          </a:p>
-        </p:txBody>
-      </p:sp>
-      <p:sp>
-        <p:nvSpPr>
-          <p:cNvPr id="9" name="Shape 7"/>
-          <p:cNvSpPr/>
-          <p:nvPr/>
-        </p:nvSpPr>
-        <p:spPr>
-          <a:xfrm>
-            <a:off x="548640" y="3739896"/>
-            <a:ext cx="10881360" cy="502920"/>
-          </a:xfrm>
-          <a:prstGeom prst="roundRect">
-            <a:avLst>
-              <a:gd name="adj" fmla="val 10909"/>
-            </a:avLst>
-          </a:prstGeom>
-          <a:solidFill>
-            <a:srgbClr val="F7F7F9"/>
-          </a:solidFill>
-          <a:ln w="12700">
-            <a:solidFill>
-              <a:srgbClr val="E1E6F0"/>
-            </a:solidFill>
-            <a:prstDash val="solid"/>
-          </a:ln>
-        </p:spPr>
-      </p:sp>
-      <p:sp>
-        <p:nvSpPr>
-          <p:cNvPr id="10" name="Text 8"/>
-          <p:cNvSpPr txBox="1"/>
-          <p:nvPr/>
-        </p:nvSpPr>
-        <p:spPr>
-          <a:xfrm>
-            <a:off x="731520" y="3785616"/>
-            <a:ext cx="10332720" cy="411480"/>
-          </a:xfrm>
-          <a:prstGeom prst="rect">
-            <a:avLst/>
-          </a:prstGeom>
-          <a:noFill/>
-          <a:ln/>
-        </p:spPr>
-        <p:txBody>
-          <a:bodyPr wrap="square" lIns="0" tIns="0" rIns="0" bIns="0" rtlCol="0" anchor="ctr"/>
-          <a:lstStyle/>
-          <a:p>
-            <a:pPr indent="0" marL="0">
-              <a:buNone/>
-            </a:pPr>
-            <a:r>
-              <a:rPr lang="en-US" sz="1050" dirty="0">
-                <a:solidFill>
-                  <a:srgbClr val="16213E"/>
-                </a:solidFill>
-                <a:latin typeface="Calibri" pitchFamily="34" charset="0"/>
-                <a:ea typeface="Calibri" pitchFamily="34" charset="-122"/>
-                <a:cs typeface="Calibri" pitchFamily="34" charset="-120"/>
-              </a:rPr>
-              <a:t>C.  コストを削減するために、すべての製品機能を無効にする。</a:t>
-            </a:r>
-            <a:endParaRPr lang="en-US" sz="1050" dirty="0"/>
-          </a:p>
-        </p:txBody>
-      </p:sp>
-      <p:sp>
-        <p:nvSpPr>
-          <p:cNvPr id="11" name="Shape 9"/>
-          <p:cNvSpPr/>
-          <p:nvPr/>
-        </p:nvSpPr>
-        <p:spPr>
-          <a:xfrm>
-            <a:off x="548640" y="4306824"/>
-            <a:ext cx="10881360" cy="502920"/>
-          </a:xfrm>
-          <a:prstGeom prst="roundRect">
-            <a:avLst>
-              <a:gd name="adj" fmla="val 10909"/>
-            </a:avLst>
-          </a:prstGeom>
-          <a:solidFill>
-            <a:srgbClr val="F7F7F9"/>
-          </a:solidFill>
-          <a:ln w="12700">
-            <a:solidFill>
-              <a:srgbClr val="E1E6F0"/>
-            </a:solidFill>
-            <a:prstDash val="solid"/>
-          </a:ln>
-        </p:spPr>
-      </p:sp>
-      <p:sp>
-        <p:nvSpPr>
-          <p:cNvPr id="12" name="Text 10"/>
-          <p:cNvSpPr txBox="1"/>
-          <p:nvPr/>
-        </p:nvSpPr>
-        <p:spPr>
-          <a:xfrm>
-            <a:off x="731520" y="4352544"/>
-            <a:ext cx="10332720" cy="411480"/>
-          </a:xfrm>
-          <a:prstGeom prst="rect">
-            <a:avLst/>
-          </a:prstGeom>
-          <a:noFill/>
-          <a:ln/>
-        </p:spPr>
-        <p:txBody>
-          <a:bodyPr wrap="square" lIns="0" tIns="0" rIns="0" bIns="0" rtlCol="0" anchor="ctr"/>
-          <a:lstStyle/>
-          <a:p>
-            <a:pPr indent="0" marL="0">
-              <a:buNone/>
-            </a:pPr>
-            <a:r>
-              <a:rPr lang="en-US" sz="1050" dirty="0">
-                <a:solidFill>
-                  <a:srgbClr val="16213E"/>
-                </a:solidFill>
-                <a:latin typeface="Calibri" pitchFamily="34" charset="0"/>
-                <a:ea typeface="Calibri" pitchFamily="34" charset="-122"/>
-                <a:cs typeface="Calibri" pitchFamily="34" charset="-120"/>
-              </a:rPr>
-              <a:t>D.  別のAIプラットフォームに切り替える。</a:t>
-            </a:r>
-            <a:endParaRPr lang="en-US" sz="1050" dirty="0"/>
-          </a:p>
-        </p:txBody>
-      </p:sp>
-      <p:sp>
-        <p:nvSpPr>
           <p:cNvPr id="13" name="Text 11"/>
-          <p:cNvSpPr txBox="1"/>
-          <p:nvPr/>
-        </p:nvSpPr>
-        <p:spPr>
-          <a:xfrm>
-            <a:off x="548640" y="4965192"/>
-            <a:ext cx="10881360" cy="1069848"/>
-          </a:xfrm>
-          <a:prstGeom prst="rect">
-            <a:avLst/>
-          </a:prstGeom>
-          <a:noFill/>
-          <a:ln/>
-        </p:spPr>
-        <p:txBody>
-          <a:bodyPr wrap="square" lIns="0" tIns="0" rIns="0" bIns="0" rtlCol="0" anchor="ctr"/>
-          <a:lstStyle/>
-          <a:p>
-            <a:pPr indent="0" marL="0">
-              <a:buNone/>
-            </a:pPr>
-            <a:r>
-              <a:rPr lang="en-US" sz="1000" i="1" dirty="0">
-                <a:solidFill>
-                  <a:srgbClr val="5B6B8C"/>
-                </a:solidFill>
-                <a:latin typeface="Calibri" pitchFamily="34" charset="0"/>
-                <a:ea typeface="Calibri" pitchFamily="34" charset="-122"/>
-                <a:cs typeface="Calibri" pitchFamily="34" charset="-120"/>
-              </a:rPr>
-              <a:t>解説: モデル選択をタスク要件に合わせるとは、単純で大量の作業にはより高速・低コストなモデルを割り当て、最も高性能なモデルは複雑な推論のために取っておくことを意味する。常に最上位モデルを使用する(A)のはコスト・レイテンシの無駄。</a:t>
-            </a:r>
-            <a:endParaRPr lang="en-US" sz="1000" dirty="0"/>
-          </a:p>
-        </p:txBody>
-      </p:sp>
-      <p:sp>
-        <p:nvSpPr>
-          <p:cNvPr id="14" name="Text 12"/>
-          <p:cNvSpPr txBox="1"/>
-          <p:nvPr/>
-        </p:nvSpPr>
-        <p:spPr>
-          <a:xfrm>
-            <a:off x="548640" y="6400800"/>
-            <a:ext cx="11064240" cy="320040"/>
-          </a:xfrm>
-          <a:prstGeom prst="rect">
-            <a:avLst/>
-          </a:prstGeom>
-          <a:noFill/>
-          <a:ln/>
-        </p:spPr>
-        <p:txBody>
-          <a:bodyPr wrap="square" lIns="0" tIns="0" rIns="0" bIns="0" rtlCol="0" anchor="ctr"/>
-          <a:lstStyle/>
-          <a:p>
-            <a:pPr indent="0" marL="0">
-              <a:buNone/>
-            </a:pPr>
-            <a:r>
-              <a:rPr lang="en-US" sz="900" i="1" dirty="0">
-                <a:solidFill>
-                  <a:srgbClr val="5B6B8C"/>
-                </a:solidFill>
-                <a:latin typeface="Calibri" pitchFamily="34" charset="0"/>
-                <a:ea typeface="Calibri" pitchFamily="34" charset="-122"/>
-                <a:cs typeface="Calibri" pitchFamily="34" charset="-120"/>
-              </a:rPr>
-              <a:t>出典: Anthropic公式試験ガイド セクション8(原文訳)</a:t>
-            </a:r>
-            <a:endParaRPr lang="en-US" sz="900" dirty="0"/>
-          </a:p>
-        </p:txBody>
-      </p:sp>
-      <p:sp>
-        <p:nvSpPr>
-          <p:cNvPr id="15" name="Text 13"/>
           <p:cNvSpPr txBox="1"/>
           <p:nvPr/>
         </p:nvSpPr>
@@ -5976,7 +5983,7 @@
                 <a:ea typeface="Cambria" pitchFamily="34" charset="-122"/>
                 <a:cs typeface="Cambria" pitchFamily="34" charset="-120"/>
               </a:rPr>
-              <a:t>公式サンプル問題 3 — 分野6</a:t>
+              <a:t>公式サンプル問題 1 — 分野2</a:t>
             </a:r>
             <a:endParaRPr lang="en-US" sz="2200" dirty="0"/>
           </a:p>
@@ -6015,7 +6022,7 @@
                 <a:ea typeface="Calibri" pitchFamily="34" charset="-122"/>
                 <a:cs typeface="Calibri" pitchFamily="34" charset="-120"/>
               </a:rPr>
-              <a:t>あるプロジェクトマネージャーが、Claudeに傾向を分析させるために、顧客名と口座番号を含むスプレッドシートをアップロードしたいと考えています。組織のポリシーでは、規制対象の個人データの共有が制限されています。最も適切な行動はどれですか。</a:t>
+              <a:t>あるアソシエイトがClaudeに新しい規制の要約を依頼したところ、Claudeは特定の項番号を引用した、確信に満ちた要約を作成しました。この要約をコンプライアンスチームに送る前に取るべき最も適切な行動はどれですか。</a:t>
             </a:r>
             <a:endParaRPr lang="en-US" sz="1200" dirty="0"/>
           </a:p>
@@ -6081,7 +6088,7 @@
                 <a:ea typeface="Calibri" pitchFamily="34" charset="-122"/>
                 <a:cs typeface="Calibri" pitchFamily="34" charset="-120"/>
               </a:rPr>
-              <a:t>A.  分析は社内向けなので、ファイルをそのままアップロードする。</a:t>
+              <a:t>A.  Claudeが高い確信を示しているので、そのまま送る。</a:t>
             </a:r>
             <a:endParaRPr lang="en-US" sz="1050" dirty="0"/>
           </a:p>
@@ -6147,7 +6154,7 @@
                 <a:ea typeface="Calibri" pitchFamily="34" charset="-122"/>
                 <a:cs typeface="Calibri" pitchFamily="34" charset="-120"/>
               </a:rPr>
-              <a:t>B.  ポリシーに従い、アップロードする前に個人を識別する情報を削除または匿名化する。</a:t>
+              <a:t>B.  共有する前に、引用された項を規制の公式な条文と照合して確認する。</a:t>
             </a:r>
             <a:endParaRPr lang="en-US" sz="1050" dirty="0"/>
           </a:p>
@@ -6213,7 +6220,7 @@
                 <a:ea typeface="Calibri" pitchFamily="34" charset="-122"/>
                 <a:cs typeface="Calibri" pitchFamily="34" charset="-120"/>
               </a:rPr>
-              <a:t>C.  ファイルをアップロードするが、Claudeに保持しないよう指示する。</a:t>
+              <a:t>C.  Claudeに自身の確信度を評価させ、評価が高ければ送る。</a:t>
             </a:r>
             <a:endParaRPr lang="en-US" sz="1050" dirty="0"/>
           </a:p>
@@ -6279,7 +6286,7 @@
                 <a:ea typeface="Calibri" pitchFamily="34" charset="-122"/>
                 <a:cs typeface="Calibri" pitchFamily="34" charset="-120"/>
               </a:rPr>
-              <a:t>D.  分析そのものをやめる。</a:t>
+              <a:t>D.  よりフォーマルに聞こえるように要約を書き換えてから送る。</a:t>
             </a:r>
             <a:endParaRPr lang="en-US" sz="1050" dirty="0"/>
           </a:p>
@@ -6318,7 +6325,7 @@
                 <a:ea typeface="Calibri" pitchFamily="34" charset="-122"/>
                 <a:cs typeface="Calibri" pitchFamily="34" charset="-120"/>
               </a:rPr>
-              <a:t>解説: データ機密性・プライバシーの保護措置を適用するとは、規制対象の識別情報を使用前に削除・匿名化することを意味する。そのままアップロード(A)はポリシー違反、保持しないよう指示する(C)だけでは管理要件を満たさない。</a:t>
+              <a:t>解説: 言語モデルは引用番号のような具体的に見える詳細を捏造することがある(ハルシネーション)。自己申告の確信度(A・C)は正確性の信頼できる指標ではなく、体裁の変更(D)は正しさの問題に対処しない。</a:t>
             </a:r>
             <a:endParaRPr lang="en-US" sz="1000" dirty="0"/>
           </a:p>
@@ -6416,7 +6423,7 @@
     <p:bg>
       <p:bgPr>
         <a:solidFill>
-          <a:srgbClr val="16213E"/>
+          <a:srgbClr val="FFFFFF"/>
         </a:solidFill>
       </p:bgPr>
     </p:bg>
@@ -6467,7 +6474,7 @@
                 <a:ea typeface="Cambria" pitchFamily="34" charset="-122"/>
                 <a:cs typeface="Cambria" pitchFamily="34" charset="-120"/>
               </a:rPr>
-              <a:t>6</a:t>
+              <a:t>5</a:t>
             </a:r>
             <a:endParaRPr lang="en-US" sz="2400" dirty="0"/>
           </a:p>
@@ -6500,13 +6507,13 @@
             <a:r>
               <a:rPr lang="en-US" sz="2200" b="1" dirty="0">
                 <a:solidFill>
-                  <a:srgbClr val="F2F4F8"/>
+                  <a:srgbClr val="16213E"/>
                 </a:solidFill>
                 <a:latin typeface="Cambria" pitchFamily="34" charset="0"/>
                 <a:ea typeface="Cambria" pitchFamily="34" charset="-122"/>
                 <a:cs typeface="Cambria" pitchFamily="34" charset="-120"/>
               </a:rPr>
-              <a:t>試験ポリシー(1/2): 申込み・本人確認</a:t>
+              <a:t>公式サンプル問題 2 — 分野3</a:t>
             </a:r>
             <a:endParaRPr lang="en-US" sz="2200" dirty="0"/>
           </a:p>
@@ -6521,164 +6528,58 @@
         <p:spPr>
           <a:xfrm>
             <a:off x="548640" y="1371600"/>
-            <a:ext cx="10881360" cy="320040"/>
-          </a:xfrm>
-          <a:prstGeom prst="rect">
-            <a:avLst/>
-          </a:prstGeom>
-          <a:noFill/>
-          <a:ln/>
-        </p:spPr>
-        <p:txBody>
-          <a:bodyPr wrap="square" lIns="0" tIns="0" rIns="0" bIns="0" rtlCol="0" anchor="ctr"/>
-          <a:lstStyle/>
-          <a:p>
-            <a:pPr indent="0" marL="0">
-              <a:buNone/>
-            </a:pPr>
-            <a:r>
-              <a:rPr lang="en-US" sz="1350" b="1" dirty="0">
-                <a:solidFill>
-                  <a:srgbClr val="2CB1BC"/>
-                </a:solidFill>
-                <a:latin typeface="Calibri" pitchFamily="34" charset="0"/>
-                <a:ea typeface="Calibri" pitchFamily="34" charset="-122"/>
-                <a:cs typeface="Calibri" pitchFamily="34" charset="-120"/>
-              </a:rPr>
-              <a:t>申込み・予約の流れ</a:t>
-            </a:r>
-            <a:endParaRPr lang="en-US" sz="1350" dirty="0"/>
-          </a:p>
-        </p:txBody>
-      </p:sp>
-      <p:sp>
-        <p:nvSpPr>
-          <p:cNvPr id="5" name="Text 3"/>
-          <p:cNvSpPr txBox="1"/>
-          <p:nvPr/>
-        </p:nvSpPr>
-        <p:spPr>
-          <a:xfrm>
-            <a:off x="548640" y="1737360"/>
-            <a:ext cx="10881360" cy="1463040"/>
-          </a:xfrm>
-          <a:prstGeom prst="rect">
-            <a:avLst/>
-          </a:prstGeom>
-          <a:noFill/>
-          <a:ln/>
-        </p:spPr>
-        <p:txBody>
-          <a:bodyPr wrap="square" lIns="0" tIns="0" rIns="0" bIns="0" rtlCol="0" anchor="ctr"/>
-          <a:lstStyle/>
-          <a:p>
-            <a:pPr marL="342900" indent="-342900">
-              <a:spcAft>
-                <a:spcPts val="500"/>
-              </a:spcAft>
-              <a:buSzPct val="100000"/>
-              <a:buChar char="•"/>
-            </a:pPr>
-            <a:r>
-              <a:rPr lang="en-US" sz="1150" dirty="0">
-                <a:solidFill>
-                  <a:srgbClr val="F2F4F8"/>
-                </a:solidFill>
-                <a:latin typeface="Calibri" pitchFamily="34" charset="0"/>
-                <a:ea typeface="Calibri" pitchFamily="34" charset="-122"/>
-                <a:cs typeface="Calibri" pitchFamily="34" charset="-120"/>
-              </a:rPr>
-              <a:t>Anthropic Partner Academyで資格ページ・試験ガイドを確認する</a:t>
-            </a:r>
-            <a:endParaRPr lang="en-US" sz="1150" dirty="0"/>
-          </a:p>
-          <a:p>
-            <a:pPr marL="342900" indent="-342900">
-              <a:spcAft>
-                <a:spcPts val="500"/>
-              </a:spcAft>
-              <a:buSzPct val="100000"/>
-              <a:buChar char="•"/>
-            </a:pPr>
-            <a:r>
-              <a:rPr lang="en-US" sz="1150" dirty="0">
-                <a:solidFill>
-                  <a:srgbClr val="F2F4F8"/>
-                </a:solidFill>
-                <a:latin typeface="Calibri" pitchFamily="34" charset="0"/>
-                <a:ea typeface="Calibri" pitchFamily="34" charset="-122"/>
-                <a:cs typeface="Calibri" pitchFamily="34" charset="-120"/>
-              </a:rPr>
-              <a:t>申込み・支払い手続き(パートナー階層に応じた割引あり)</a:t>
-            </a:r>
-            <a:endParaRPr lang="en-US" sz="1150" dirty="0"/>
-          </a:p>
-          <a:p>
-            <a:pPr marL="342900" indent="-342900">
-              <a:spcAft>
-                <a:spcPts val="500"/>
-              </a:spcAft>
-              <a:buSzPct val="100000"/>
-              <a:buChar char="•"/>
-            </a:pPr>
-            <a:r>
-              <a:rPr lang="en-US" sz="1150" dirty="0">
-                <a:solidFill>
-                  <a:srgbClr val="F2F4F8"/>
-                </a:solidFill>
-                <a:latin typeface="Calibri" pitchFamily="34" charset="0"/>
-                <a:ea typeface="Calibri" pitchFamily="34" charset="-122"/>
-                <a:cs typeface="Calibri" pitchFamily="34" charset="-120"/>
-              </a:rPr>
-              <a:t>Pearson VUEアカウントを作成し試験セッションを予約する</a:t>
-            </a:r>
-            <a:endParaRPr lang="en-US" sz="1150" dirty="0"/>
-          </a:p>
-          <a:p>
-            <a:pPr marL="342900" indent="-342900">
-              <a:spcAft>
-                <a:spcPts val="500"/>
-              </a:spcAft>
-              <a:buSzPct val="100000"/>
-              <a:buChar char="•"/>
-            </a:pPr>
-            <a:r>
-              <a:rPr lang="en-US" sz="1150" dirty="0">
-                <a:solidFill>
-                  <a:srgbClr val="F2F4F8"/>
-                </a:solidFill>
-                <a:latin typeface="Calibri" pitchFamily="34" charset="0"/>
-                <a:ea typeface="Calibri" pitchFamily="34" charset="-122"/>
-                <a:cs typeface="Calibri" pitchFamily="34" charset="-120"/>
-              </a:rPr>
-              <a:t>オンライン監督またはPearsonテストセンターを選択する</a:t>
-            </a:r>
-            <a:endParaRPr lang="en-US" sz="1150" dirty="0"/>
-          </a:p>
-        </p:txBody>
-      </p:sp>
-      <p:sp>
-        <p:nvSpPr>
-          <p:cNvPr id="6" name="Shape 4"/>
+            <a:ext cx="10881360" cy="1097280"/>
+          </a:xfrm>
+          <a:prstGeom prst="rect">
+            <a:avLst/>
+          </a:prstGeom>
+          <a:noFill/>
+          <a:ln/>
+        </p:spPr>
+        <p:txBody>
+          <a:bodyPr wrap="square" lIns="0" tIns="0" rIns="0" bIns="0" rtlCol="0" anchor="ctr"/>
+          <a:lstStyle/>
+          <a:p>
+            <a:pPr indent="0" marL="0">
+              <a:buNone/>
+            </a:pPr>
+            <a:r>
+              <a:rPr lang="en-US" sz="1200" dirty="0">
+                <a:solidFill>
+                  <a:srgbClr val="16213E"/>
+                </a:solidFill>
+                <a:latin typeface="Calibri" pitchFamily="34" charset="0"/>
+                <a:ea typeface="Calibri" pitchFamily="34" charset="-122"/>
+                <a:cs typeface="Calibri" pitchFamily="34" charset="-120"/>
+              </a:rPr>
+              <a:t>あるアソシエイトは、短い顧客返信の下書きを大量に生成する必要があり、深い推論よりも速度とコストが重要です。このタスクに最も適した選択肢はどれですか。</a:t>
+            </a:r>
+            <a:endParaRPr lang="en-US" sz="1200" dirty="0"/>
+          </a:p>
+        </p:txBody>
+      </p:sp>
+      <p:sp>
+        <p:nvSpPr>
+          <p:cNvPr id="5" name="Shape 3"/>
           <p:cNvSpPr/>
           <p:nvPr/>
         </p:nvSpPr>
         <p:spPr>
           <a:xfrm>
-            <a:off x="548640" y="3291840"/>
-            <a:ext cx="10881360" cy="777240"/>
+            <a:off x="548640" y="2606040"/>
+            <a:ext cx="10881360" cy="502920"/>
           </a:xfrm>
           <a:prstGeom prst="roundRect">
             <a:avLst>
-              <a:gd name="adj" fmla="val 9412"/>
+              <a:gd name="adj" fmla="val 10909"/>
             </a:avLst>
           </a:prstGeom>
           <a:solidFill>
-            <a:srgbClr val="332616"/>
+            <a:srgbClr val="F7F7F9"/>
           </a:solidFill>
           <a:ln w="12700">
             <a:solidFill>
-              <a:srgbClr val="6B4E2E"/>
+              <a:srgbClr val="E1E6F0"/>
             </a:solidFill>
             <a:prstDash val="solid"/>
           </a:ln>
@@ -6686,14 +6587,14 @@
       </p:sp>
       <p:sp>
         <p:nvSpPr>
-          <p:cNvPr id="7" name="Text 5"/>
-          <p:cNvSpPr txBox="1"/>
-          <p:nvPr/>
-        </p:nvSpPr>
-        <p:spPr>
-          <a:xfrm>
-            <a:off x="731520" y="3401568"/>
-            <a:ext cx="10515600" cy="594360"/>
+          <p:cNvPr id="6" name="Text 4"/>
+          <p:cNvSpPr txBox="1"/>
+          <p:nvPr/>
+        </p:nvSpPr>
+        <p:spPr>
+          <a:xfrm>
+            <a:off x="731520" y="2651760"/>
+            <a:ext cx="10332720" cy="411480"/>
           </a:xfrm>
           <a:prstGeom prst="rect">
             <a:avLst/>
@@ -6711,13 +6612,13 @@
             <a:r>
               <a:rPr lang="en-US" sz="1050" dirty="0">
                 <a:solidFill>
-                  <a:srgbClr val="F2C879"/>
-                </a:solidFill>
-                <a:latin typeface="Calibri" pitchFamily="34" charset="0"/>
-                <a:ea typeface="Calibri" pitchFamily="34" charset="-122"/>
-                <a:cs typeface="Calibri" pitchFamily="34" charset="-120"/>
-              </a:rPr>
-              <a:t>⚠ 予約変更・キャンセル: 公式Exam Guideでは「24時間前まで無料」、Pearson VUE公式ページでは「48時間前まで」と記載に差異あり。余裕を持って48時間前までに済ませるのが安全</a:t>
+                  <a:srgbClr val="16213E"/>
+                </a:solidFill>
+                <a:latin typeface="Calibri" pitchFamily="34" charset="0"/>
+                <a:ea typeface="Calibri" pitchFamily="34" charset="-122"/>
+                <a:cs typeface="Calibri" pitchFamily="34" charset="-120"/>
+              </a:rPr>
+              <a:t>A.  品質を最大化するために、すべての返信に最も高性能で最もコストの高いモデルを使用する。</a:t>
             </a:r>
             <a:endParaRPr lang="en-US" sz="1050" dirty="0"/>
           </a:p>
@@ -6725,131 +6626,244 @@
       </p:sp>
       <p:sp>
         <p:nvSpPr>
+          <p:cNvPr id="7" name="Shape 5"/>
+          <p:cNvSpPr/>
+          <p:nvPr/>
+        </p:nvSpPr>
+        <p:spPr>
+          <a:xfrm>
+            <a:off x="548640" y="3172968"/>
+            <a:ext cx="10881360" cy="502920"/>
+          </a:xfrm>
+          <a:prstGeom prst="roundRect">
+            <a:avLst>
+              <a:gd name="adj" fmla="val 10909"/>
+            </a:avLst>
+          </a:prstGeom>
+          <a:solidFill>
+            <a:srgbClr val="E8F5EC"/>
+          </a:solidFill>
+          <a:ln w="12700">
+            <a:solidFill>
+              <a:srgbClr val="6FCF97"/>
+            </a:solidFill>
+            <a:prstDash val="solid"/>
+          </a:ln>
+        </p:spPr>
+      </p:sp>
+      <p:sp>
+        <p:nvSpPr>
           <p:cNvPr id="8" name="Text 6"/>
           <p:cNvSpPr txBox="1"/>
           <p:nvPr/>
         </p:nvSpPr>
         <p:spPr>
           <a:xfrm>
-            <a:off x="548640" y="4251960"/>
-            <a:ext cx="10881360" cy="320040"/>
-          </a:xfrm>
-          <a:prstGeom prst="rect">
-            <a:avLst/>
-          </a:prstGeom>
-          <a:noFill/>
-          <a:ln/>
-        </p:spPr>
-        <p:txBody>
-          <a:bodyPr wrap="square" lIns="0" tIns="0" rIns="0" bIns="0" rtlCol="0" anchor="ctr"/>
-          <a:lstStyle/>
-          <a:p>
-            <a:pPr indent="0" marL="0">
-              <a:buNone/>
-            </a:pPr>
-            <a:r>
-              <a:rPr lang="en-US" sz="1350" b="1" dirty="0">
-                <a:solidFill>
-                  <a:srgbClr val="2CB1BC"/>
-                </a:solidFill>
-                <a:latin typeface="Calibri" pitchFamily="34" charset="0"/>
-                <a:ea typeface="Calibri" pitchFamily="34" charset="-122"/>
-                <a:cs typeface="Calibri" pitchFamily="34" charset="-120"/>
-              </a:rPr>
-              <a:t>本人確認・受験資格</a:t>
-            </a:r>
-            <a:endParaRPr lang="en-US" sz="1350" dirty="0"/>
-          </a:p>
-        </p:txBody>
-      </p:sp>
-      <p:sp>
-        <p:nvSpPr>
-          <p:cNvPr id="9" name="Text 7"/>
-          <p:cNvSpPr txBox="1"/>
-          <p:nvPr/>
-        </p:nvSpPr>
-        <p:spPr>
-          <a:xfrm>
-            <a:off x="548640" y="4572000"/>
-            <a:ext cx="10881360" cy="1554480"/>
-          </a:xfrm>
-          <a:prstGeom prst="rect">
-            <a:avLst/>
-          </a:prstGeom>
-          <a:noFill/>
-          <a:ln/>
-        </p:spPr>
-        <p:txBody>
-          <a:bodyPr wrap="square" lIns="0" tIns="0" rIns="0" bIns="0" rtlCol="0" anchor="ctr"/>
-          <a:lstStyle/>
-          <a:p>
-            <a:pPr marL="342900" indent="-342900">
-              <a:spcAft>
-                <a:spcPts val="500"/>
-              </a:spcAft>
-              <a:buSzPct val="100000"/>
-              <a:buChar char="•"/>
-            </a:pPr>
-            <a:r>
-              <a:rPr lang="en-US" sz="1150" dirty="0">
-                <a:solidFill>
-                  <a:srgbClr val="F2F4F8"/>
-                </a:solidFill>
-                <a:latin typeface="Calibri" pitchFamily="34" charset="0"/>
-                <a:ea typeface="Calibri" pitchFamily="34" charset="-122"/>
-                <a:cs typeface="Calibri" pitchFamily="34" charset="-120"/>
-              </a:rPr>
-              <a:t>受験資格: Claude Partner Network(CPN)加盟企業に所属する者のみ(会社用メールアドレスでの登録が必要)</a:t>
-            </a:r>
-            <a:endParaRPr lang="en-US" sz="1150" dirty="0"/>
-          </a:p>
-          <a:p>
-            <a:pPr marL="342900" indent="-342900">
-              <a:spcAft>
-                <a:spcPts val="500"/>
-              </a:spcAft>
-              <a:buSzPct val="100000"/>
-              <a:buChar char="•"/>
-            </a:pPr>
-            <a:r>
-              <a:rPr lang="en-US" sz="1150" dirty="0">
-                <a:solidFill>
-                  <a:srgbClr val="F2F4F8"/>
-                </a:solidFill>
-                <a:latin typeface="Calibri" pitchFamily="34" charset="0"/>
-                <a:ea typeface="Calibri" pitchFamily="34" charset="-122"/>
-                <a:cs typeface="Calibri" pitchFamily="34" charset="-120"/>
-              </a:rPr>
-              <a:t>本人確認: 政府発行の有効な写真付き身分証が必要。登録名と完全一致している必要がある</a:t>
-            </a:r>
-            <a:endParaRPr lang="en-US" sz="1150" dirty="0"/>
-          </a:p>
-          <a:p>
-            <a:pPr marL="342900" indent="-342900">
-              <a:spcAft>
-                <a:spcPts val="500"/>
-              </a:spcAft>
-              <a:buSzPct val="100000"/>
-              <a:buChar char="•"/>
-            </a:pPr>
-            <a:r>
-              <a:rPr lang="en-US" sz="1150" dirty="0">
-                <a:solidFill>
-                  <a:srgbClr val="F2F4F8"/>
-                </a:solidFill>
-                <a:latin typeface="Calibri" pitchFamily="34" charset="0"/>
-                <a:ea typeface="Calibri" pitchFamily="34" charset="-122"/>
-                <a:cs typeface="Calibri" pitchFamily="34" charset="-120"/>
-              </a:rPr>
-              <a:t>試験開始前に機密保持・秘密保持契約(NDA)への同意が必須。同意しない場合、返金なしでセッション終了</a:t>
-            </a:r>
-            <a:endParaRPr lang="en-US" sz="1150" dirty="0"/>
-          </a:p>
-        </p:txBody>
+            <a:off x="731520" y="3218688"/>
+            <a:ext cx="10332720" cy="411480"/>
+          </a:xfrm>
+          <a:prstGeom prst="rect">
+            <a:avLst/>
+          </a:prstGeom>
+          <a:noFill/>
+          <a:ln/>
+        </p:spPr>
+        <p:txBody>
+          <a:bodyPr wrap="square" lIns="0" tIns="0" rIns="0" bIns="0" rtlCol="0" anchor="ctr"/>
+          <a:lstStyle/>
+          <a:p>
+            <a:pPr indent="0" marL="0">
+              <a:buNone/>
+            </a:pPr>
+            <a:r>
+              <a:rPr lang="en-US" sz="1050" b="1" dirty="0">
+                <a:solidFill>
+                  <a:srgbClr val="1F7A3E"/>
+                </a:solidFill>
+                <a:latin typeface="Calibri" pitchFamily="34" charset="0"/>
+                <a:ea typeface="Calibri" pitchFamily="34" charset="-122"/>
+                <a:cs typeface="Calibri" pitchFamily="34" charset="-120"/>
+              </a:rPr>
+              <a:t>B.  単純で大量のタスクに適した、より高速で低コストのモデルを使用する。</a:t>
+            </a:r>
+            <a:endParaRPr lang="en-US" sz="1050" dirty="0"/>
+          </a:p>
+        </p:txBody>
+      </p:sp>
+      <p:sp>
+        <p:nvSpPr>
+          <p:cNvPr id="9" name="Shape 7"/>
+          <p:cNvSpPr/>
+          <p:nvPr/>
+        </p:nvSpPr>
+        <p:spPr>
+          <a:xfrm>
+            <a:off x="548640" y="3739896"/>
+            <a:ext cx="10881360" cy="502920"/>
+          </a:xfrm>
+          <a:prstGeom prst="roundRect">
+            <a:avLst>
+              <a:gd name="adj" fmla="val 10909"/>
+            </a:avLst>
+          </a:prstGeom>
+          <a:solidFill>
+            <a:srgbClr val="F7F7F9"/>
+          </a:solidFill>
+          <a:ln w="12700">
+            <a:solidFill>
+              <a:srgbClr val="E1E6F0"/>
+            </a:solidFill>
+            <a:prstDash val="solid"/>
+          </a:ln>
+        </p:spPr>
       </p:sp>
       <p:sp>
         <p:nvSpPr>
           <p:cNvPr id="10" name="Text 8"/>
+          <p:cNvSpPr txBox="1"/>
+          <p:nvPr/>
+        </p:nvSpPr>
+        <p:spPr>
+          <a:xfrm>
+            <a:off x="731520" y="3785616"/>
+            <a:ext cx="10332720" cy="411480"/>
+          </a:xfrm>
+          <a:prstGeom prst="rect">
+            <a:avLst/>
+          </a:prstGeom>
+          <a:noFill/>
+          <a:ln/>
+        </p:spPr>
+        <p:txBody>
+          <a:bodyPr wrap="square" lIns="0" tIns="0" rIns="0" bIns="0" rtlCol="0" anchor="ctr"/>
+          <a:lstStyle/>
+          <a:p>
+            <a:pPr indent="0" marL="0">
+              <a:buNone/>
+            </a:pPr>
+            <a:r>
+              <a:rPr lang="en-US" sz="1050" dirty="0">
+                <a:solidFill>
+                  <a:srgbClr val="16213E"/>
+                </a:solidFill>
+                <a:latin typeface="Calibri" pitchFamily="34" charset="0"/>
+                <a:ea typeface="Calibri" pitchFamily="34" charset="-122"/>
+                <a:cs typeface="Calibri" pitchFamily="34" charset="-120"/>
+              </a:rPr>
+              <a:t>C.  コストを削減するために、すべての製品機能を無効にする。</a:t>
+            </a:r>
+            <a:endParaRPr lang="en-US" sz="1050" dirty="0"/>
+          </a:p>
+        </p:txBody>
+      </p:sp>
+      <p:sp>
+        <p:nvSpPr>
+          <p:cNvPr id="11" name="Shape 9"/>
+          <p:cNvSpPr/>
+          <p:nvPr/>
+        </p:nvSpPr>
+        <p:spPr>
+          <a:xfrm>
+            <a:off x="548640" y="4306824"/>
+            <a:ext cx="10881360" cy="502920"/>
+          </a:xfrm>
+          <a:prstGeom prst="roundRect">
+            <a:avLst>
+              <a:gd name="adj" fmla="val 10909"/>
+            </a:avLst>
+          </a:prstGeom>
+          <a:solidFill>
+            <a:srgbClr val="F7F7F9"/>
+          </a:solidFill>
+          <a:ln w="12700">
+            <a:solidFill>
+              <a:srgbClr val="E1E6F0"/>
+            </a:solidFill>
+            <a:prstDash val="solid"/>
+          </a:ln>
+        </p:spPr>
+      </p:sp>
+      <p:sp>
+        <p:nvSpPr>
+          <p:cNvPr id="12" name="Text 10"/>
+          <p:cNvSpPr txBox="1"/>
+          <p:nvPr/>
+        </p:nvSpPr>
+        <p:spPr>
+          <a:xfrm>
+            <a:off x="731520" y="4352544"/>
+            <a:ext cx="10332720" cy="411480"/>
+          </a:xfrm>
+          <a:prstGeom prst="rect">
+            <a:avLst/>
+          </a:prstGeom>
+          <a:noFill/>
+          <a:ln/>
+        </p:spPr>
+        <p:txBody>
+          <a:bodyPr wrap="square" lIns="0" tIns="0" rIns="0" bIns="0" rtlCol="0" anchor="ctr"/>
+          <a:lstStyle/>
+          <a:p>
+            <a:pPr indent="0" marL="0">
+              <a:buNone/>
+            </a:pPr>
+            <a:r>
+              <a:rPr lang="en-US" sz="1050" dirty="0">
+                <a:solidFill>
+                  <a:srgbClr val="16213E"/>
+                </a:solidFill>
+                <a:latin typeface="Calibri" pitchFamily="34" charset="0"/>
+                <a:ea typeface="Calibri" pitchFamily="34" charset="-122"/>
+                <a:cs typeface="Calibri" pitchFamily="34" charset="-120"/>
+              </a:rPr>
+              <a:t>D.  別のAIプラットフォームに切り替える。</a:t>
+            </a:r>
+            <a:endParaRPr lang="en-US" sz="1050" dirty="0"/>
+          </a:p>
+        </p:txBody>
+      </p:sp>
+      <p:sp>
+        <p:nvSpPr>
+          <p:cNvPr id="13" name="Text 11"/>
+          <p:cNvSpPr txBox="1"/>
+          <p:nvPr/>
+        </p:nvSpPr>
+        <p:spPr>
+          <a:xfrm>
+            <a:off x="548640" y="4965192"/>
+            <a:ext cx="10881360" cy="1069848"/>
+          </a:xfrm>
+          <a:prstGeom prst="rect">
+            <a:avLst/>
+          </a:prstGeom>
+          <a:noFill/>
+          <a:ln/>
+        </p:spPr>
+        <p:txBody>
+          <a:bodyPr wrap="square" lIns="0" tIns="0" rIns="0" bIns="0" rtlCol="0" anchor="ctr"/>
+          <a:lstStyle/>
+          <a:p>
+            <a:pPr indent="0" marL="0">
+              <a:buNone/>
+            </a:pPr>
+            <a:r>
+              <a:rPr lang="en-US" sz="1000" i="1" dirty="0">
+                <a:solidFill>
+                  <a:srgbClr val="5B6B8C"/>
+                </a:solidFill>
+                <a:latin typeface="Calibri" pitchFamily="34" charset="0"/>
+                <a:ea typeface="Calibri" pitchFamily="34" charset="-122"/>
+                <a:cs typeface="Calibri" pitchFamily="34" charset="-120"/>
+              </a:rPr>
+              <a:t>解説: モデル選択をタスク要件に合わせるとは、単純で大量の作業にはより高速・低コストなモデルを割り当て、最も高性能なモデルは複雑な推論のために取っておくことを意味する。常に最上位モデルを使用する(A)のはコスト・レイテンシの無駄。</a:t>
+            </a:r>
+            <a:endParaRPr lang="en-US" sz="1000" dirty="0"/>
+          </a:p>
+        </p:txBody>
+      </p:sp>
+      <p:sp>
+        <p:nvSpPr>
+          <p:cNvPr id="14" name="Text 12"/>
           <p:cNvSpPr txBox="1"/>
           <p:nvPr/>
         </p:nvSpPr>
@@ -6874,13 +6888,13 @@
             <a:r>
               <a:rPr lang="en-US" sz="900" i="1" dirty="0">
                 <a:solidFill>
-                  <a:srgbClr val="B9C4DB"/>
-                </a:solidFill>
-                <a:latin typeface="Calibri" pitchFamily="34" charset="0"/>
-                <a:ea typeface="Calibri" pitchFamily="34" charset="-122"/>
-                <a:cs typeface="Calibri" pitchFamily="34" charset="-120"/>
-              </a:rPr>
-              <a:t>出典: Anthropic公式試験ガイド セクション10・11・13 + Pearson VUE公式ページ</a:t>
+                  <a:srgbClr val="5B6B8C"/>
+                </a:solidFill>
+                <a:latin typeface="Calibri" pitchFamily="34" charset="0"/>
+                <a:ea typeface="Calibri" pitchFamily="34" charset="-122"/>
+                <a:cs typeface="Calibri" pitchFamily="34" charset="-120"/>
+              </a:rPr>
+              <a:t>出典: Anthropic公式試験ガイド セクション8(原文訳)</a:t>
             </a:r>
             <a:endParaRPr lang="en-US" sz="900" dirty="0"/>
           </a:p>
@@ -6888,7 +6902,7 @@
       </p:sp>
       <p:sp>
         <p:nvSpPr>
-          <p:cNvPr id="11" name="Text 9"/>
+          <p:cNvPr id="15" name="Text 13"/>
           <p:cNvSpPr txBox="1"/>
           <p:nvPr/>
         </p:nvSpPr>
@@ -6990,7 +7004,7 @@
                 <a:ea typeface="Cambria" pitchFamily="34" charset="-122"/>
                 <a:cs typeface="Cambria" pitchFamily="34" charset="-120"/>
               </a:rPr>
-              <a:t>6</a:t>
+              <a:t>5</a:t>
             </a:r>
             <a:endParaRPr lang="en-US" sz="2400" dirty="0"/>
           </a:p>
@@ -7029,7 +7043,7 @@
                 <a:ea typeface="Cambria" pitchFamily="34" charset="-122"/>
                 <a:cs typeface="Cambria" pitchFamily="34" charset="-120"/>
               </a:rPr>
-              <a:t>試験ポリシー(2/2): 再受験・資格維持</a:t>
+              <a:t>公式サンプル問題 3 — 分野6</a:t>
             </a:r>
             <a:endParaRPr lang="en-US" sz="2200" dirty="0"/>
           </a:p>
@@ -7044,33 +7058,33 @@
         <p:spPr>
           <a:xfrm>
             <a:off x="548640" y="1371600"/>
-            <a:ext cx="5303520" cy="320040"/>
-          </a:xfrm>
-          <a:prstGeom prst="rect">
-            <a:avLst/>
-          </a:prstGeom>
-          <a:noFill/>
-          <a:ln/>
-        </p:spPr>
-        <p:txBody>
-          <a:bodyPr wrap="square" lIns="0" tIns="0" rIns="0" bIns="0" rtlCol="0" anchor="ctr"/>
-          <a:lstStyle/>
-          <a:p>
-            <a:pPr indent="0" marL="0">
-              <a:buNone/>
-            </a:pPr>
-            <a:r>
-              <a:rPr lang="en-US" sz="1350" b="1" dirty="0">
-                <a:solidFill>
-                  <a:srgbClr val="3E64FF"/>
-                </a:solidFill>
-                <a:latin typeface="Calibri" pitchFamily="34" charset="0"/>
-                <a:ea typeface="Calibri" pitchFamily="34" charset="-122"/>
-                <a:cs typeface="Calibri" pitchFamily="34" charset="-120"/>
-              </a:rPr>
-              <a:t>再受験ポリシー</a:t>
-            </a:r>
-            <a:endParaRPr lang="en-US" sz="1350" dirty="0"/>
+            <a:ext cx="10881360" cy="1097280"/>
+          </a:xfrm>
+          <a:prstGeom prst="rect">
+            <a:avLst/>
+          </a:prstGeom>
+          <a:noFill/>
+          <a:ln/>
+        </p:spPr>
+        <p:txBody>
+          <a:bodyPr wrap="square" lIns="0" tIns="0" rIns="0" bIns="0" rtlCol="0" anchor="ctr"/>
+          <a:lstStyle/>
+          <a:p>
+            <a:pPr indent="0" marL="0">
+              <a:buNone/>
+            </a:pPr>
+            <a:r>
+              <a:rPr lang="en-US" sz="1200" dirty="0">
+                <a:solidFill>
+                  <a:srgbClr val="16213E"/>
+                </a:solidFill>
+                <a:latin typeface="Calibri" pitchFamily="34" charset="0"/>
+                <a:ea typeface="Calibri" pitchFamily="34" charset="-122"/>
+                <a:cs typeface="Calibri" pitchFamily="34" charset="-120"/>
+              </a:rPr>
+              <a:t>あるプロジェクトマネージャーが、Claudeに傾向を分析させるために、顧客名と口座番号を含むスプレッドシートをアップロードしたいと考えています。組織のポリシーでは、規制対象の個人データの共有が制限されています。最も適切な行動はどれですか。</a:t>
+            </a:r>
+            <a:endParaRPr lang="en-US" sz="1200" dirty="0"/>
           </a:p>
         </p:txBody>
       </p:sp>
@@ -7082,16 +7096,16 @@
         </p:nvSpPr>
         <p:spPr>
           <a:xfrm>
-            <a:off x="548640" y="1737360"/>
-            <a:ext cx="1691640" cy="960120"/>
+            <a:off x="548640" y="2606040"/>
+            <a:ext cx="10881360" cy="502920"/>
           </a:xfrm>
           <a:prstGeom prst="roundRect">
             <a:avLst>
-              <a:gd name="adj" fmla="val 7619"/>
+              <a:gd name="adj" fmla="val 10909"/>
             </a:avLst>
           </a:prstGeom>
           <a:solidFill>
-            <a:srgbClr val="FFFFFF"/>
+            <a:srgbClr val="F7F7F9"/>
           </a:solidFill>
           <a:ln w="12700">
             <a:solidFill>
@@ -7099,13 +7113,6 @@
             </a:solidFill>
             <a:prstDash val="solid"/>
           </a:ln>
-          <a:effectLst>
-            <a:outerShdw sx="100000" sy="100000" kx="0" ky="0" algn="bl" rotWithShape="0" blurRad="63500" dist="25400" dir="5400000">
-              <a:srgbClr val="000000">
-                <a:alpha val="8000"/>
-              </a:srgbClr>
-            </a:outerShdw>
-          </a:effectLst>
         </p:spPr>
       </p:sp>
       <p:sp>
@@ -7116,94 +7123,121 @@
         </p:nvSpPr>
         <p:spPr>
           <a:xfrm>
-            <a:off x="548640" y="1828800"/>
-            <a:ext cx="1691640" cy="457200"/>
-          </a:xfrm>
-          <a:prstGeom prst="rect">
-            <a:avLst/>
-          </a:prstGeom>
-          <a:noFill/>
-          <a:ln/>
-        </p:spPr>
-        <p:txBody>
-          <a:bodyPr wrap="square" lIns="0" tIns="0" rIns="0" bIns="0" rtlCol="0" anchor="ctr"/>
-          <a:lstStyle/>
-          <a:p>
-            <a:pPr algn="ctr" indent="0" marL="0">
-              <a:buNone/>
-            </a:pPr>
-            <a:r>
-              <a:rPr lang="en-US" sz="1700" b="1" dirty="0">
-                <a:solidFill>
-                  <a:srgbClr val="3E64FF"/>
-                </a:solidFill>
-                <a:latin typeface="Calibri" pitchFamily="34" charset="0"/>
-                <a:ea typeface="Calibri" pitchFamily="34" charset="-122"/>
-                <a:cs typeface="Calibri" pitchFamily="34" charset="-120"/>
-              </a:rPr>
-              <a:t>14日</a:t>
-            </a:r>
-            <a:endParaRPr lang="en-US" sz="1700" dirty="0"/>
-          </a:p>
-        </p:txBody>
-      </p:sp>
-      <p:sp>
-        <p:nvSpPr>
-          <p:cNvPr id="7" name="Text 5"/>
-          <p:cNvSpPr txBox="1"/>
-          <p:nvPr/>
-        </p:nvSpPr>
-        <p:spPr>
-          <a:xfrm>
-            <a:off x="548640" y="2286000"/>
-            <a:ext cx="1691640" cy="365760"/>
-          </a:xfrm>
-          <a:prstGeom prst="rect">
-            <a:avLst/>
-          </a:prstGeom>
-          <a:noFill/>
-          <a:ln/>
-        </p:spPr>
-        <p:txBody>
-          <a:bodyPr wrap="square" lIns="0" tIns="0" rIns="0" bIns="0" rtlCol="0" anchor="ctr"/>
-          <a:lstStyle/>
-          <a:p>
-            <a:pPr algn="ctr" indent="0" marL="0">
-              <a:buNone/>
-            </a:pPr>
-            <a:r>
-              <a:rPr lang="en-US" sz="900" dirty="0">
-                <a:solidFill>
-                  <a:srgbClr val="5B6B8C"/>
-                </a:solidFill>
-                <a:latin typeface="Calibri" pitchFamily="34" charset="0"/>
-                <a:ea typeface="Calibri" pitchFamily="34" charset="-122"/>
-                <a:cs typeface="Calibri" pitchFamily="34" charset="-120"/>
-              </a:rPr>
-              <a:t>1回目不合格後</a:t>
-            </a:r>
-            <a:endParaRPr lang="en-US" sz="900" dirty="0"/>
-          </a:p>
-        </p:txBody>
-      </p:sp>
-      <p:sp>
-        <p:nvSpPr>
-          <p:cNvPr id="8" name="Shape 6"/>
+            <a:off x="731520" y="2651760"/>
+            <a:ext cx="10332720" cy="411480"/>
+          </a:xfrm>
+          <a:prstGeom prst="rect">
+            <a:avLst/>
+          </a:prstGeom>
+          <a:noFill/>
+          <a:ln/>
+        </p:spPr>
+        <p:txBody>
+          <a:bodyPr wrap="square" lIns="0" tIns="0" rIns="0" bIns="0" rtlCol="0" anchor="ctr"/>
+          <a:lstStyle/>
+          <a:p>
+            <a:pPr indent="0" marL="0">
+              <a:buNone/>
+            </a:pPr>
+            <a:r>
+              <a:rPr lang="en-US" sz="1050" dirty="0">
+                <a:solidFill>
+                  <a:srgbClr val="16213E"/>
+                </a:solidFill>
+                <a:latin typeface="Calibri" pitchFamily="34" charset="0"/>
+                <a:ea typeface="Calibri" pitchFamily="34" charset="-122"/>
+                <a:cs typeface="Calibri" pitchFamily="34" charset="-120"/>
+              </a:rPr>
+              <a:t>A.  分析は社内向けなので、ファイルをそのままアップロードする。</a:t>
+            </a:r>
+            <a:endParaRPr lang="en-US" sz="1050" dirty="0"/>
+          </a:p>
+        </p:txBody>
+      </p:sp>
+      <p:sp>
+        <p:nvSpPr>
+          <p:cNvPr id="7" name="Shape 5"/>
           <p:cNvSpPr/>
           <p:nvPr/>
         </p:nvSpPr>
         <p:spPr>
           <a:xfrm>
-            <a:off x="2377440" y="1737360"/>
-            <a:ext cx="1691640" cy="960120"/>
+            <a:off x="548640" y="3172968"/>
+            <a:ext cx="10881360" cy="502920"/>
           </a:xfrm>
           <a:prstGeom prst="roundRect">
             <a:avLst>
-              <a:gd name="adj" fmla="val 7619"/>
+              <a:gd name="adj" fmla="val 10909"/>
             </a:avLst>
           </a:prstGeom>
           <a:solidFill>
-            <a:srgbClr val="FFFFFF"/>
+            <a:srgbClr val="E8F5EC"/>
+          </a:solidFill>
+          <a:ln w="12700">
+            <a:solidFill>
+              <a:srgbClr val="6FCF97"/>
+            </a:solidFill>
+            <a:prstDash val="solid"/>
+          </a:ln>
+        </p:spPr>
+      </p:sp>
+      <p:sp>
+        <p:nvSpPr>
+          <p:cNvPr id="8" name="Text 6"/>
+          <p:cNvSpPr txBox="1"/>
+          <p:nvPr/>
+        </p:nvSpPr>
+        <p:spPr>
+          <a:xfrm>
+            <a:off x="731520" y="3218688"/>
+            <a:ext cx="10332720" cy="411480"/>
+          </a:xfrm>
+          <a:prstGeom prst="rect">
+            <a:avLst/>
+          </a:prstGeom>
+          <a:noFill/>
+          <a:ln/>
+        </p:spPr>
+        <p:txBody>
+          <a:bodyPr wrap="square" lIns="0" tIns="0" rIns="0" bIns="0" rtlCol="0" anchor="ctr"/>
+          <a:lstStyle/>
+          <a:p>
+            <a:pPr indent="0" marL="0">
+              <a:buNone/>
+            </a:pPr>
+            <a:r>
+              <a:rPr lang="en-US" sz="1050" b="1" dirty="0">
+                <a:solidFill>
+                  <a:srgbClr val="1F7A3E"/>
+                </a:solidFill>
+                <a:latin typeface="Calibri" pitchFamily="34" charset="0"/>
+                <a:ea typeface="Calibri" pitchFamily="34" charset="-122"/>
+                <a:cs typeface="Calibri" pitchFamily="34" charset="-120"/>
+              </a:rPr>
+              <a:t>B.  ポリシーに従い、アップロードする前に個人を識別する情報を削除または匿名化する。</a:t>
+            </a:r>
+            <a:endParaRPr lang="en-US" sz="1050" dirty="0"/>
+          </a:p>
+        </p:txBody>
+      </p:sp>
+      <p:sp>
+        <p:nvSpPr>
+          <p:cNvPr id="9" name="Shape 7"/>
+          <p:cNvSpPr/>
+          <p:nvPr/>
+        </p:nvSpPr>
+        <p:spPr>
+          <a:xfrm>
+            <a:off x="548640" y="3739896"/>
+            <a:ext cx="10881360" cy="502920"/>
+          </a:xfrm>
+          <a:prstGeom prst="roundRect">
+            <a:avLst>
+              <a:gd name="adj" fmla="val 10909"/>
+            </a:avLst>
+          </a:prstGeom>
+          <a:solidFill>
+            <a:srgbClr val="F7F7F9"/>
           </a:solidFill>
           <a:ln w="12700">
             <a:solidFill>
@@ -7211,53 +7245,7 @@
             </a:solidFill>
             <a:prstDash val="solid"/>
           </a:ln>
-          <a:effectLst>
-            <a:outerShdw sx="100000" sy="100000" kx="0" ky="0" algn="bl" rotWithShape="0" blurRad="63500" dist="25400" dir="5400000">
-              <a:srgbClr val="000000">
-                <a:alpha val="8000"/>
-              </a:srgbClr>
-            </a:outerShdw>
-          </a:effectLst>
-        </p:spPr>
-      </p:sp>
-      <p:sp>
-        <p:nvSpPr>
-          <p:cNvPr id="9" name="Text 7"/>
-          <p:cNvSpPr txBox="1"/>
-          <p:nvPr/>
-        </p:nvSpPr>
-        <p:spPr>
-          <a:xfrm>
-            <a:off x="2377440" y="1828800"/>
-            <a:ext cx="1691640" cy="457200"/>
-          </a:xfrm>
-          <a:prstGeom prst="rect">
-            <a:avLst/>
-          </a:prstGeom>
-          <a:noFill/>
-          <a:ln/>
-        </p:spPr>
-        <p:txBody>
-          <a:bodyPr wrap="square" lIns="0" tIns="0" rIns="0" bIns="0" rtlCol="0" anchor="ctr"/>
-          <a:lstStyle/>
-          <a:p>
-            <a:pPr algn="ctr" indent="0" marL="0">
-              <a:buNone/>
-            </a:pPr>
-            <a:r>
-              <a:rPr lang="en-US" sz="1700" b="1" dirty="0">
-                <a:solidFill>
-                  <a:srgbClr val="3E64FF"/>
-                </a:solidFill>
-                <a:latin typeface="Calibri" pitchFamily="34" charset="0"/>
-                <a:ea typeface="Calibri" pitchFamily="34" charset="-122"/>
-                <a:cs typeface="Calibri" pitchFamily="34" charset="-120"/>
-              </a:rPr>
-              <a:t>30日</a:t>
-            </a:r>
-            <a:endParaRPr lang="en-US" sz="1700" dirty="0"/>
-          </a:p>
-        </p:txBody>
+        </p:spPr>
       </p:sp>
       <p:sp>
         <p:nvSpPr>
@@ -7267,34 +7255,34 @@
         </p:nvSpPr>
         <p:spPr>
           <a:xfrm>
-            <a:off x="2377440" y="2286000"/>
-            <a:ext cx="1691640" cy="365760"/>
-          </a:xfrm>
-          <a:prstGeom prst="rect">
-            <a:avLst/>
-          </a:prstGeom>
-          <a:noFill/>
-          <a:ln/>
-        </p:spPr>
-        <p:txBody>
-          <a:bodyPr wrap="square" lIns="0" tIns="0" rIns="0" bIns="0" rtlCol="0" anchor="ctr"/>
-          <a:lstStyle/>
-          <a:p>
-            <a:pPr algn="ctr" indent="0" marL="0">
-              <a:buNone/>
-            </a:pPr>
-            <a:r>
-              <a:rPr lang="en-US" sz="900" dirty="0">
-                <a:solidFill>
-                  <a:srgbClr val="5B6B8C"/>
-                </a:solidFill>
-                <a:latin typeface="Calibri" pitchFamily="34" charset="0"/>
-                <a:ea typeface="Calibri" pitchFamily="34" charset="-122"/>
-                <a:cs typeface="Calibri" pitchFamily="34" charset="-120"/>
-              </a:rPr>
-              <a:t>2回目不合格後</a:t>
-            </a:r>
-            <a:endParaRPr lang="en-US" sz="900" dirty="0"/>
+            <a:off x="731520" y="3785616"/>
+            <a:ext cx="10332720" cy="411480"/>
+          </a:xfrm>
+          <a:prstGeom prst="rect">
+            <a:avLst/>
+          </a:prstGeom>
+          <a:noFill/>
+          <a:ln/>
+        </p:spPr>
+        <p:txBody>
+          <a:bodyPr wrap="square" lIns="0" tIns="0" rIns="0" bIns="0" rtlCol="0" anchor="ctr"/>
+          <a:lstStyle/>
+          <a:p>
+            <a:pPr indent="0" marL="0">
+              <a:buNone/>
+            </a:pPr>
+            <a:r>
+              <a:rPr lang="en-US" sz="1050" dirty="0">
+                <a:solidFill>
+                  <a:srgbClr val="16213E"/>
+                </a:solidFill>
+                <a:latin typeface="Calibri" pitchFamily="34" charset="0"/>
+                <a:ea typeface="Calibri" pitchFamily="34" charset="-122"/>
+                <a:cs typeface="Calibri" pitchFamily="34" charset="-120"/>
+              </a:rPr>
+              <a:t>C.  ファイルをアップロードするが、Claudeに保持しないよう指示する。</a:t>
+            </a:r>
+            <a:endParaRPr lang="en-US" sz="1050" dirty="0"/>
           </a:p>
         </p:txBody>
       </p:sp>
@@ -7306,16 +7294,16 @@
         </p:nvSpPr>
         <p:spPr>
           <a:xfrm>
-            <a:off x="4206240" y="1737360"/>
-            <a:ext cx="1691640" cy="960120"/>
+            <a:off x="548640" y="4306824"/>
+            <a:ext cx="10881360" cy="502920"/>
           </a:xfrm>
           <a:prstGeom prst="roundRect">
             <a:avLst>
-              <a:gd name="adj" fmla="val 7619"/>
+              <a:gd name="adj" fmla="val 10909"/>
             </a:avLst>
           </a:prstGeom>
           <a:solidFill>
-            <a:srgbClr val="FFFFFF"/>
+            <a:srgbClr val="F7F7F9"/>
           </a:solidFill>
           <a:ln w="12700">
             <a:solidFill>
@@ -7323,13 +7311,6 @@
             </a:solidFill>
             <a:prstDash val="solid"/>
           </a:ln>
-          <a:effectLst>
-            <a:outerShdw sx="100000" sy="100000" kx="0" ky="0" algn="bl" rotWithShape="0" blurRad="63500" dist="25400" dir="5400000">
-              <a:srgbClr val="000000">
-                <a:alpha val="8000"/>
-              </a:srgbClr>
-            </a:outerShdw>
-          </a:effectLst>
         </p:spPr>
       </p:sp>
       <p:sp>
@@ -7340,34 +7321,34 @@
         </p:nvSpPr>
         <p:spPr>
           <a:xfrm>
-            <a:off x="4206240" y="1828800"/>
-            <a:ext cx="1691640" cy="457200"/>
-          </a:xfrm>
-          <a:prstGeom prst="rect">
-            <a:avLst/>
-          </a:prstGeom>
-          <a:noFill/>
-          <a:ln/>
-        </p:spPr>
-        <p:txBody>
-          <a:bodyPr wrap="square" lIns="0" tIns="0" rIns="0" bIns="0" rtlCol="0" anchor="ctr"/>
-          <a:lstStyle/>
-          <a:p>
-            <a:pPr algn="ctr" indent="0" marL="0">
-              <a:buNone/>
-            </a:pPr>
-            <a:r>
-              <a:rPr lang="en-US" sz="1700" b="1" dirty="0">
-                <a:solidFill>
-                  <a:srgbClr val="3E64FF"/>
-                </a:solidFill>
-                <a:latin typeface="Calibri" pitchFamily="34" charset="0"/>
-                <a:ea typeface="Calibri" pitchFamily="34" charset="-122"/>
-                <a:cs typeface="Calibri" pitchFamily="34" charset="-120"/>
-              </a:rPr>
-              <a:t>90日</a:t>
-            </a:r>
-            <a:endParaRPr lang="en-US" sz="1700" dirty="0"/>
+            <a:off x="731520" y="4352544"/>
+            <a:ext cx="10332720" cy="411480"/>
+          </a:xfrm>
+          <a:prstGeom prst="rect">
+            <a:avLst/>
+          </a:prstGeom>
+          <a:noFill/>
+          <a:ln/>
+        </p:spPr>
+        <p:txBody>
+          <a:bodyPr wrap="square" lIns="0" tIns="0" rIns="0" bIns="0" rtlCol="0" anchor="ctr"/>
+          <a:lstStyle/>
+          <a:p>
+            <a:pPr indent="0" marL="0">
+              <a:buNone/>
+            </a:pPr>
+            <a:r>
+              <a:rPr lang="en-US" sz="1050" dirty="0">
+                <a:solidFill>
+                  <a:srgbClr val="16213E"/>
+                </a:solidFill>
+                <a:latin typeface="Calibri" pitchFamily="34" charset="0"/>
+                <a:ea typeface="Calibri" pitchFamily="34" charset="-122"/>
+                <a:cs typeface="Calibri" pitchFamily="34" charset="-120"/>
+              </a:rPr>
+              <a:t>D.  分析そのものをやめる。</a:t>
+            </a:r>
+            <a:endParaRPr lang="en-US" sz="1050" dirty="0"/>
           </a:p>
         </p:txBody>
       </p:sp>
@@ -7379,24 +7360,24 @@
         </p:nvSpPr>
         <p:spPr>
           <a:xfrm>
-            <a:off x="4206240" y="2286000"/>
-            <a:ext cx="1691640" cy="365760"/>
-          </a:xfrm>
-          <a:prstGeom prst="rect">
-            <a:avLst/>
-          </a:prstGeom>
-          <a:noFill/>
-          <a:ln/>
-        </p:spPr>
-        <p:txBody>
-          <a:bodyPr wrap="square" lIns="0" tIns="0" rIns="0" bIns="0" rtlCol="0" anchor="ctr"/>
-          <a:lstStyle/>
-          <a:p>
-            <a:pPr algn="ctr" indent="0" marL="0">
-              <a:buNone/>
-            </a:pPr>
-            <a:r>
-              <a:rPr lang="en-US" sz="900" dirty="0">
+            <a:off x="548640" y="4965192"/>
+            <a:ext cx="10881360" cy="1069848"/>
+          </a:xfrm>
+          <a:prstGeom prst="rect">
+            <a:avLst/>
+          </a:prstGeom>
+          <a:noFill/>
+          <a:ln/>
+        </p:spPr>
+        <p:txBody>
+          <a:bodyPr wrap="square" lIns="0" tIns="0" rIns="0" bIns="0" rtlCol="0" anchor="ctr"/>
+          <a:lstStyle/>
+          <a:p>
+            <a:pPr indent="0" marL="0">
+              <a:buNone/>
+            </a:pPr>
+            <a:r>
+              <a:rPr lang="en-US" sz="1000" i="1" dirty="0">
                 <a:solidFill>
                   <a:srgbClr val="5B6B8C"/>
                 </a:solidFill>
@@ -7404,350 +7385,15 @@
                 <a:ea typeface="Calibri" pitchFamily="34" charset="-122"/>
                 <a:cs typeface="Calibri" pitchFamily="34" charset="-120"/>
               </a:rPr>
-              <a:t>3回目不合格後</a:t>
-            </a:r>
-            <a:endParaRPr lang="en-US" sz="900" dirty="0"/>
+              <a:t>解説: データ機密性・プライバシーの保護措置を適用するとは、規制対象の識別情報を使用前に削除・匿名化することを意味する。そのままアップロード(A)はポリシー違反、保持しないよう指示する(C)だけでは管理要件を満たさない。</a:t>
+            </a:r>
+            <a:endParaRPr lang="en-US" sz="1000" dirty="0"/>
           </a:p>
         </p:txBody>
       </p:sp>
       <p:sp>
         <p:nvSpPr>
           <p:cNvPr id="14" name="Text 12"/>
-          <p:cNvSpPr txBox="1"/>
-          <p:nvPr/>
-        </p:nvSpPr>
-        <p:spPr>
-          <a:xfrm>
-            <a:off x="548640" y="2880360"/>
-            <a:ext cx="5303520" cy="731520"/>
-          </a:xfrm>
-          <a:prstGeom prst="rect">
-            <a:avLst/>
-          </a:prstGeom>
-          <a:noFill/>
-          <a:ln/>
-        </p:spPr>
-        <p:txBody>
-          <a:bodyPr wrap="square" lIns="0" tIns="0" rIns="0" bIns="0" rtlCol="0" anchor="ctr"/>
-          <a:lstStyle/>
-          <a:p>
-            <a:pPr indent="0" marL="0">
-              <a:buNone/>
-            </a:pPr>
-            <a:r>
-              <a:rPr lang="en-US" sz="1050" dirty="0">
-                <a:solidFill>
-                  <a:srgbClr val="16213E"/>
-                </a:solidFill>
-                <a:latin typeface="Calibri" pitchFamily="34" charset="0"/>
-                <a:ea typeface="Calibri" pitchFamily="34" charset="-122"/>
-                <a:cs typeface="Calibri" pitchFamily="34" charset="-120"/>
-              </a:rPr>
-              <a:t>任意の連続する12ヶ月以内に最大4回まで受験可能(上限は試験ごとに適用)。受験料は毎回必要</a:t>
-            </a:r>
-            <a:endParaRPr lang="en-US" sz="1050" dirty="0"/>
-          </a:p>
-        </p:txBody>
-      </p:sp>
-      <p:sp>
-        <p:nvSpPr>
-          <p:cNvPr id="15" name="Text 13"/>
-          <p:cNvSpPr txBox="1"/>
-          <p:nvPr/>
-        </p:nvSpPr>
-        <p:spPr>
-          <a:xfrm>
-            <a:off x="6126480" y="1371600"/>
-            <a:ext cx="5303520" cy="320040"/>
-          </a:xfrm>
-          <a:prstGeom prst="rect">
-            <a:avLst/>
-          </a:prstGeom>
-          <a:noFill/>
-          <a:ln/>
-        </p:spPr>
-        <p:txBody>
-          <a:bodyPr wrap="square" lIns="0" tIns="0" rIns="0" bIns="0" rtlCol="0" anchor="ctr"/>
-          <a:lstStyle/>
-          <a:p>
-            <a:pPr indent="0" marL="0">
-              <a:buNone/>
-            </a:pPr>
-            <a:r>
-              <a:rPr lang="en-US" sz="1350" b="1" dirty="0">
-                <a:solidFill>
-                  <a:srgbClr val="3E64FF"/>
-                </a:solidFill>
-                <a:latin typeface="Calibri" pitchFamily="34" charset="0"/>
-                <a:ea typeface="Calibri" pitchFamily="34" charset="-122"/>
-                <a:cs typeface="Calibri" pitchFamily="34" charset="-120"/>
-              </a:rPr>
-              <a:t>資格の維持と再認定</a:t>
-            </a:r>
-            <a:endParaRPr lang="en-US" sz="1350" dirty="0"/>
-          </a:p>
-        </p:txBody>
-      </p:sp>
-      <p:sp>
-        <p:nvSpPr>
-          <p:cNvPr id="16" name="Shape 14"/>
-          <p:cNvSpPr/>
-          <p:nvPr/>
-        </p:nvSpPr>
-        <p:spPr>
-          <a:xfrm>
-            <a:off x="6126480" y="1737360"/>
-            <a:ext cx="5303520" cy="1874520"/>
-          </a:xfrm>
-          <a:prstGeom prst="roundRect">
-            <a:avLst>
-              <a:gd name="adj" fmla="val 3902"/>
-            </a:avLst>
-          </a:prstGeom>
-          <a:solidFill>
-            <a:srgbClr val="F5F7FB"/>
-          </a:solidFill>
-          <a:ln w="12700">
-            <a:solidFill>
-              <a:srgbClr val="E1E6F0"/>
-            </a:solidFill>
-            <a:prstDash val="solid"/>
-          </a:ln>
-        </p:spPr>
-      </p:sp>
-      <p:sp>
-        <p:nvSpPr>
-          <p:cNvPr id="17" name="Text 15"/>
-          <p:cNvSpPr txBox="1"/>
-          <p:nvPr/>
-        </p:nvSpPr>
-        <p:spPr>
-          <a:xfrm>
-            <a:off x="6309360" y="1874520"/>
-            <a:ext cx="4937760" cy="1645920"/>
-          </a:xfrm>
-          <a:prstGeom prst="rect">
-            <a:avLst/>
-          </a:prstGeom>
-          <a:noFill/>
-          <a:ln/>
-        </p:spPr>
-        <p:txBody>
-          <a:bodyPr wrap="square" lIns="0" tIns="0" rIns="0" bIns="0" rtlCol="0" anchor="ctr"/>
-          <a:lstStyle/>
-          <a:p>
-            <a:pPr marL="342900" indent="-342900">
-              <a:spcAft>
-                <a:spcPts val="400"/>
-              </a:spcAft>
-              <a:buSzPct val="100000"/>
-              <a:buChar char="•"/>
-            </a:pPr>
-            <a:r>
-              <a:rPr lang="en-US" sz="1000" dirty="0">
-                <a:solidFill>
-                  <a:srgbClr val="16213E"/>
-                </a:solidFill>
-                <a:latin typeface="Calibri" pitchFamily="34" charset="0"/>
-                <a:ea typeface="Calibri" pitchFamily="34" charset="-122"/>
-                <a:cs typeface="Calibri" pitchFamily="34" charset="-120"/>
-              </a:rPr>
-              <a:t>有効期間: 認定日から12ヶ月</a:t>
-            </a:r>
-            <a:endParaRPr lang="en-US" sz="1000" dirty="0"/>
-          </a:p>
-          <a:p>
-            <a:pPr marL="342900" indent="-342900">
-              <a:spcAft>
-                <a:spcPts val="400"/>
-              </a:spcAft>
-              <a:buSzPct val="100000"/>
-              <a:buChar char="•"/>
-            </a:pPr>
-            <a:r>
-              <a:rPr lang="en-US" sz="1000" dirty="0">
-                <a:solidFill>
-                  <a:srgbClr val="16213E"/>
-                </a:solidFill>
-                <a:latin typeface="Calibri" pitchFamily="34" charset="0"/>
-                <a:ea typeface="Calibri" pitchFamily="34" charset="-122"/>
-                <a:cs typeface="Calibri" pitchFamily="34" charset="-120"/>
-              </a:rPr>
-              <a:t>期限内更新: Partner Academyでの無料・監督なしアセスメントで完了(費用なし)</a:t>
-            </a:r>
-            <a:endParaRPr lang="en-US" sz="1000" dirty="0"/>
-          </a:p>
-          <a:p>
-            <a:pPr marL="342900" indent="-342900">
-              <a:spcAft>
-                <a:spcPts val="400"/>
-              </a:spcAft>
-              <a:buSzPct val="100000"/>
-              <a:buChar char="•"/>
-            </a:pPr>
-            <a:r>
-              <a:rPr lang="en-US" sz="1000" dirty="0">
-                <a:solidFill>
-                  <a:srgbClr val="16213E"/>
-                </a:solidFill>
-                <a:latin typeface="Calibri" pitchFamily="34" charset="0"/>
-                <a:ea typeface="Calibri" pitchFamily="34" charset="-122"/>
-                <a:cs typeface="Calibri" pitchFamily="34" charset="-120"/>
-              </a:rPr>
-              <a:t>失効した場合: 正規の受験料でフル試験を再受験</a:t>
-            </a:r>
-            <a:endParaRPr lang="en-US" sz="1000" dirty="0"/>
-          </a:p>
-          <a:p>
-            <a:pPr marL="342900" indent="-342900">
-              <a:spcAft>
-                <a:spcPts val="400"/>
-              </a:spcAft>
-              <a:buSzPct val="100000"/>
-              <a:buChar char="•"/>
-            </a:pPr>
-            <a:r>
-              <a:rPr lang="en-US" sz="1000" dirty="0">
-                <a:solidFill>
-                  <a:srgbClr val="16213E"/>
-                </a:solidFill>
-                <a:latin typeface="Calibri" pitchFamily="34" charset="0"/>
-                <a:ea typeface="Calibri" pitchFamily="34" charset="-122"/>
-                <a:cs typeface="Calibri" pitchFamily="34" charset="-120"/>
-              </a:rPr>
-              <a:t>試験内容が大幅変更された場合、フル試験の再受験を求められることがある</a:t>
-            </a:r>
-            <a:endParaRPr lang="en-US" sz="1000" dirty="0"/>
-          </a:p>
-        </p:txBody>
-      </p:sp>
-      <p:sp>
-        <p:nvSpPr>
-          <p:cNvPr id="18" name="Text 16"/>
-          <p:cNvSpPr txBox="1"/>
-          <p:nvPr/>
-        </p:nvSpPr>
-        <p:spPr>
-          <a:xfrm>
-            <a:off x="548640" y="3840480"/>
-            <a:ext cx="10881360" cy="320040"/>
-          </a:xfrm>
-          <a:prstGeom prst="rect">
-            <a:avLst/>
-          </a:prstGeom>
-          <a:noFill/>
-          <a:ln/>
-        </p:spPr>
-        <p:txBody>
-          <a:bodyPr wrap="square" lIns="0" tIns="0" rIns="0" bIns="0" rtlCol="0" anchor="ctr"/>
-          <a:lstStyle/>
-          <a:p>
-            <a:pPr indent="0" marL="0">
-              <a:buNone/>
-            </a:pPr>
-            <a:r>
-              <a:rPr lang="en-US" sz="1350" b="1" dirty="0">
-                <a:solidFill>
-                  <a:srgbClr val="3E64FF"/>
-                </a:solidFill>
-                <a:latin typeface="Calibri" pitchFamily="34" charset="0"/>
-                <a:ea typeface="Calibri" pitchFamily="34" charset="-122"/>
-                <a:cs typeface="Calibri" pitchFamily="34" charset="-120"/>
-              </a:rPr>
-              <a:t>試験当日のルール(抜粋)</a:t>
-            </a:r>
-            <a:endParaRPr lang="en-US" sz="1350" dirty="0"/>
-          </a:p>
-        </p:txBody>
-      </p:sp>
-      <p:sp>
-        <p:nvSpPr>
-          <p:cNvPr id="19" name="Text 17"/>
-          <p:cNvSpPr txBox="1"/>
-          <p:nvPr/>
-        </p:nvSpPr>
-        <p:spPr>
-          <a:xfrm>
-            <a:off x="548640" y="4160520"/>
-            <a:ext cx="10881360" cy="1188720"/>
-          </a:xfrm>
-          <a:prstGeom prst="rect">
-            <a:avLst/>
-          </a:prstGeom>
-          <a:noFill/>
-          <a:ln/>
-        </p:spPr>
-        <p:txBody>
-          <a:bodyPr wrap="square" lIns="0" tIns="0" rIns="0" bIns="0" rtlCol="0" anchor="ctr"/>
-          <a:lstStyle/>
-          <a:p>
-            <a:pPr marL="342900" indent="-342900">
-              <a:spcAft>
-                <a:spcPts val="400"/>
-              </a:spcAft>
-              <a:buSzPct val="100000"/>
-              <a:buChar char="•"/>
-            </a:pPr>
-            <a:r>
-              <a:rPr lang="en-US" sz="1100" dirty="0">
-                <a:solidFill>
-                  <a:srgbClr val="16213E"/>
-                </a:solidFill>
-                <a:latin typeface="Calibri" pitchFamily="34" charset="0"/>
-                <a:ea typeface="Calibri" pitchFamily="34" charset="-122"/>
-                <a:cs typeface="Calibri" pitchFamily="34" charset="-120"/>
-              </a:rPr>
-              <a:t>オンライン受験: セッション中は常に試験監督者・ウェブカメラの視界内にとどまる</a:t>
-            </a:r>
-            <a:endParaRPr lang="en-US" sz="1100" dirty="0"/>
-          </a:p>
-          <a:p>
-            <a:pPr marL="342900" indent="-342900">
-              <a:spcAft>
-                <a:spcPts val="400"/>
-              </a:spcAft>
-              <a:buSzPct val="100000"/>
-              <a:buChar char="•"/>
-            </a:pPr>
-            <a:r>
-              <a:rPr lang="en-US" sz="1100" dirty="0">
-                <a:solidFill>
-                  <a:srgbClr val="16213E"/>
-                </a:solidFill>
-                <a:latin typeface="Calibri" pitchFamily="34" charset="0"/>
-                <a:ea typeface="Calibri" pitchFamily="34" charset="-122"/>
-                <a:cs typeface="Calibri" pitchFamily="34" charset="-120"/>
-              </a:rPr>
-              <a:t>持ち込み禁止: 携帯電話・スマートウォッチ・ヘッドホン・学習教材・録音録画機器</a:t>
-            </a:r>
-            <a:endParaRPr lang="en-US" sz="1100" dirty="0"/>
-          </a:p>
-          <a:p>
-            <a:pPr marL="342900" indent="-342900">
-              <a:spcAft>
-                <a:spcPts val="400"/>
-              </a:spcAft>
-              <a:buSzPct val="100000"/>
-              <a:buChar char="•"/>
-            </a:pPr>
-            <a:r>
-              <a:rPr lang="en-US" sz="1100" dirty="0">
-                <a:solidFill>
-                  <a:srgbClr val="16213E"/>
-                </a:solidFill>
-                <a:latin typeface="Calibri" pitchFamily="34" charset="0"/>
-                <a:ea typeface="Calibri" pitchFamily="34" charset="-122"/>
-                <a:cs typeface="Calibri" pitchFamily="34" charset="-120"/>
-              </a:rPr>
-              <a:t>不正行為(カンニング・内容の開示等)は、結果無効化・資格取消・今後の受験禁止につながる</a:t>
-            </a:r>
-            <a:endParaRPr lang="en-US" sz="1100" dirty="0"/>
-          </a:p>
-        </p:txBody>
-      </p:sp>
-      <p:sp>
-        <p:nvSpPr>
-          <p:cNvPr id="20" name="Text 18"/>
           <p:cNvSpPr txBox="1"/>
           <p:nvPr/>
         </p:nvSpPr>
@@ -7778,7 +7424,7 @@
                 <a:ea typeface="Calibri" pitchFamily="34" charset="-122"/>
                 <a:cs typeface="Calibri" pitchFamily="34" charset="-120"/>
               </a:rPr>
-              <a:t>出典: Anthropic公式試験ガイド セクション11・12・14</a:t>
+              <a:t>出典: Anthropic公式試験ガイド セクション8(原文訳)</a:t>
             </a:r>
             <a:endParaRPr lang="en-US" sz="900" dirty="0"/>
           </a:p>
@@ -7786,7 +7432,7 @@
       </p:sp>
       <p:sp>
         <p:nvSpPr>
-          <p:cNvPr id="21" name="Text 19"/>
+          <p:cNvPr id="15" name="Text 13"/>
           <p:cNvSpPr txBox="1"/>
           <p:nvPr/>
         </p:nvSpPr>
@@ -7888,7 +7534,7 @@
                 <a:ea typeface="Cambria" pitchFamily="34" charset="-122"/>
                 <a:cs typeface="Cambria" pitchFamily="34" charset="-120"/>
               </a:rPr>
-              <a:t>7</a:t>
+              <a:t>6</a:t>
             </a:r>
             <a:endParaRPr lang="en-US" sz="2400" dirty="0"/>
           </a:p>
@@ -7927,6 +7573,2672 @@
                 <a:ea typeface="Cambria" pitchFamily="34" charset="-122"/>
                 <a:cs typeface="Cambria" pitchFamily="34" charset="-120"/>
               </a:rPr>
+              <a:t>試験ポリシー(1/2): 申込み・本人確認</a:t>
+            </a:r>
+            <a:endParaRPr lang="en-US" sz="2200" dirty="0"/>
+          </a:p>
+        </p:txBody>
+      </p:sp>
+      <p:sp>
+        <p:nvSpPr>
+          <p:cNvPr id="4" name="Text 2"/>
+          <p:cNvSpPr txBox="1"/>
+          <p:nvPr/>
+        </p:nvSpPr>
+        <p:spPr>
+          <a:xfrm>
+            <a:off x="548640" y="1371600"/>
+            <a:ext cx="10881360" cy="320040"/>
+          </a:xfrm>
+          <a:prstGeom prst="rect">
+            <a:avLst/>
+          </a:prstGeom>
+          <a:noFill/>
+          <a:ln/>
+        </p:spPr>
+        <p:txBody>
+          <a:bodyPr wrap="square" lIns="0" tIns="0" rIns="0" bIns="0" rtlCol="0" anchor="ctr"/>
+          <a:lstStyle/>
+          <a:p>
+            <a:pPr indent="0" marL="0">
+              <a:buNone/>
+            </a:pPr>
+            <a:r>
+              <a:rPr lang="en-US" sz="1350" b="1" dirty="0">
+                <a:solidFill>
+                  <a:srgbClr val="2CB1BC"/>
+                </a:solidFill>
+                <a:latin typeface="Calibri" pitchFamily="34" charset="0"/>
+                <a:ea typeface="Calibri" pitchFamily="34" charset="-122"/>
+                <a:cs typeface="Calibri" pitchFamily="34" charset="-120"/>
+              </a:rPr>
+              <a:t>申込み・予約の流れ</a:t>
+            </a:r>
+            <a:endParaRPr lang="en-US" sz="1350" dirty="0"/>
+          </a:p>
+        </p:txBody>
+      </p:sp>
+      <p:sp>
+        <p:nvSpPr>
+          <p:cNvPr id="5" name="Text 3"/>
+          <p:cNvSpPr txBox="1"/>
+          <p:nvPr/>
+        </p:nvSpPr>
+        <p:spPr>
+          <a:xfrm>
+            <a:off x="548640" y="1737360"/>
+            <a:ext cx="10881360" cy="1463040"/>
+          </a:xfrm>
+          <a:prstGeom prst="rect">
+            <a:avLst/>
+          </a:prstGeom>
+          <a:noFill/>
+          <a:ln/>
+        </p:spPr>
+        <p:txBody>
+          <a:bodyPr wrap="square" lIns="0" tIns="0" rIns="0" bIns="0" rtlCol="0" anchor="ctr"/>
+          <a:lstStyle/>
+          <a:p>
+            <a:pPr marL="342900" indent="-342900">
+              <a:spcAft>
+                <a:spcPts val="500"/>
+              </a:spcAft>
+              <a:buSzPct val="100000"/>
+              <a:buChar char="•"/>
+            </a:pPr>
+            <a:r>
+              <a:rPr lang="en-US" sz="1150" dirty="0">
+                <a:solidFill>
+                  <a:srgbClr val="F2F4F8"/>
+                </a:solidFill>
+                <a:latin typeface="Calibri" pitchFamily="34" charset="0"/>
+                <a:ea typeface="Calibri" pitchFamily="34" charset="-122"/>
+                <a:cs typeface="Calibri" pitchFamily="34" charset="-120"/>
+              </a:rPr>
+              <a:t>Anthropic Partner Academyで資格ページ・試験ガイドを確認する</a:t>
+            </a:r>
+            <a:endParaRPr lang="en-US" sz="1150" dirty="0"/>
+          </a:p>
+          <a:p>
+            <a:pPr marL="342900" indent="-342900">
+              <a:spcAft>
+                <a:spcPts val="500"/>
+              </a:spcAft>
+              <a:buSzPct val="100000"/>
+              <a:buChar char="•"/>
+            </a:pPr>
+            <a:r>
+              <a:rPr lang="en-US" sz="1150" dirty="0">
+                <a:solidFill>
+                  <a:srgbClr val="F2F4F8"/>
+                </a:solidFill>
+                <a:latin typeface="Calibri" pitchFamily="34" charset="0"/>
+                <a:ea typeface="Calibri" pitchFamily="34" charset="-122"/>
+                <a:cs typeface="Calibri" pitchFamily="34" charset="-120"/>
+              </a:rPr>
+              <a:t>申込み・支払い手続き(パートナー階層に応じた割引あり)</a:t>
+            </a:r>
+            <a:endParaRPr lang="en-US" sz="1150" dirty="0"/>
+          </a:p>
+          <a:p>
+            <a:pPr marL="342900" indent="-342900">
+              <a:spcAft>
+                <a:spcPts val="500"/>
+              </a:spcAft>
+              <a:buSzPct val="100000"/>
+              <a:buChar char="•"/>
+            </a:pPr>
+            <a:r>
+              <a:rPr lang="en-US" sz="1150" dirty="0">
+                <a:solidFill>
+                  <a:srgbClr val="F2F4F8"/>
+                </a:solidFill>
+                <a:latin typeface="Calibri" pitchFamily="34" charset="0"/>
+                <a:ea typeface="Calibri" pitchFamily="34" charset="-122"/>
+                <a:cs typeface="Calibri" pitchFamily="34" charset="-120"/>
+              </a:rPr>
+              <a:t>Pearson VUEアカウントを作成し試験セッションを予約する</a:t>
+            </a:r>
+            <a:endParaRPr lang="en-US" sz="1150" dirty="0"/>
+          </a:p>
+          <a:p>
+            <a:pPr marL="342900" indent="-342900">
+              <a:spcAft>
+                <a:spcPts val="500"/>
+              </a:spcAft>
+              <a:buSzPct val="100000"/>
+              <a:buChar char="•"/>
+            </a:pPr>
+            <a:r>
+              <a:rPr lang="en-US" sz="1150" dirty="0">
+                <a:solidFill>
+                  <a:srgbClr val="F2F4F8"/>
+                </a:solidFill>
+                <a:latin typeface="Calibri" pitchFamily="34" charset="0"/>
+                <a:ea typeface="Calibri" pitchFamily="34" charset="-122"/>
+                <a:cs typeface="Calibri" pitchFamily="34" charset="-120"/>
+              </a:rPr>
+              <a:t>オンライン監督またはPearsonテストセンターを選択する</a:t>
+            </a:r>
+            <a:endParaRPr lang="en-US" sz="1150" dirty="0"/>
+          </a:p>
+        </p:txBody>
+      </p:sp>
+      <p:sp>
+        <p:nvSpPr>
+          <p:cNvPr id="6" name="Shape 4"/>
+          <p:cNvSpPr/>
+          <p:nvPr/>
+        </p:nvSpPr>
+        <p:spPr>
+          <a:xfrm>
+            <a:off x="548640" y="3291840"/>
+            <a:ext cx="10881360" cy="777240"/>
+          </a:xfrm>
+          <a:prstGeom prst="roundRect">
+            <a:avLst>
+              <a:gd name="adj" fmla="val 9412"/>
+            </a:avLst>
+          </a:prstGeom>
+          <a:solidFill>
+            <a:srgbClr val="332616"/>
+          </a:solidFill>
+          <a:ln w="12700">
+            <a:solidFill>
+              <a:srgbClr val="6B4E2E"/>
+            </a:solidFill>
+            <a:prstDash val="solid"/>
+          </a:ln>
+        </p:spPr>
+      </p:sp>
+      <p:sp>
+        <p:nvSpPr>
+          <p:cNvPr id="7" name="Text 5"/>
+          <p:cNvSpPr txBox="1"/>
+          <p:nvPr/>
+        </p:nvSpPr>
+        <p:spPr>
+          <a:xfrm>
+            <a:off x="731520" y="3401568"/>
+            <a:ext cx="10515600" cy="594360"/>
+          </a:xfrm>
+          <a:prstGeom prst="rect">
+            <a:avLst/>
+          </a:prstGeom>
+          <a:noFill/>
+          <a:ln/>
+        </p:spPr>
+        <p:txBody>
+          <a:bodyPr wrap="square" lIns="0" tIns="0" rIns="0" bIns="0" rtlCol="0" anchor="ctr"/>
+          <a:lstStyle/>
+          <a:p>
+            <a:pPr indent="0" marL="0">
+              <a:buNone/>
+            </a:pPr>
+            <a:r>
+              <a:rPr lang="en-US" sz="1050" dirty="0">
+                <a:solidFill>
+                  <a:srgbClr val="F2C879"/>
+                </a:solidFill>
+                <a:latin typeface="Calibri" pitchFamily="34" charset="0"/>
+                <a:ea typeface="Calibri" pitchFamily="34" charset="-122"/>
+                <a:cs typeface="Calibri" pitchFamily="34" charset="-120"/>
+              </a:rPr>
+              <a:t>⚠ 予約変更・キャンセル: 公式Exam Guideでは「24時間前まで無料」、Pearson VUE公式ページでは「48時間前まで」と記載に差異あり。余裕を持って48時間前までに済ませるのが安全</a:t>
+            </a:r>
+            <a:endParaRPr lang="en-US" sz="1050" dirty="0"/>
+          </a:p>
+        </p:txBody>
+      </p:sp>
+      <p:sp>
+        <p:nvSpPr>
+          <p:cNvPr id="8" name="Text 6"/>
+          <p:cNvSpPr txBox="1"/>
+          <p:nvPr/>
+        </p:nvSpPr>
+        <p:spPr>
+          <a:xfrm>
+            <a:off x="548640" y="4251960"/>
+            <a:ext cx="10881360" cy="320040"/>
+          </a:xfrm>
+          <a:prstGeom prst="rect">
+            <a:avLst/>
+          </a:prstGeom>
+          <a:noFill/>
+          <a:ln/>
+        </p:spPr>
+        <p:txBody>
+          <a:bodyPr wrap="square" lIns="0" tIns="0" rIns="0" bIns="0" rtlCol="0" anchor="ctr"/>
+          <a:lstStyle/>
+          <a:p>
+            <a:pPr indent="0" marL="0">
+              <a:buNone/>
+            </a:pPr>
+            <a:r>
+              <a:rPr lang="en-US" sz="1350" b="1" dirty="0">
+                <a:solidFill>
+                  <a:srgbClr val="2CB1BC"/>
+                </a:solidFill>
+                <a:latin typeface="Calibri" pitchFamily="34" charset="0"/>
+                <a:ea typeface="Calibri" pitchFamily="34" charset="-122"/>
+                <a:cs typeface="Calibri" pitchFamily="34" charset="-120"/>
+              </a:rPr>
+              <a:t>本人確認・受験資格</a:t>
+            </a:r>
+            <a:endParaRPr lang="en-US" sz="1350" dirty="0"/>
+          </a:p>
+        </p:txBody>
+      </p:sp>
+      <p:sp>
+        <p:nvSpPr>
+          <p:cNvPr id="9" name="Text 7"/>
+          <p:cNvSpPr txBox="1"/>
+          <p:nvPr/>
+        </p:nvSpPr>
+        <p:spPr>
+          <a:xfrm>
+            <a:off x="548640" y="4572000"/>
+            <a:ext cx="10881360" cy="1554480"/>
+          </a:xfrm>
+          <a:prstGeom prst="rect">
+            <a:avLst/>
+          </a:prstGeom>
+          <a:noFill/>
+          <a:ln/>
+        </p:spPr>
+        <p:txBody>
+          <a:bodyPr wrap="square" lIns="0" tIns="0" rIns="0" bIns="0" rtlCol="0" anchor="ctr"/>
+          <a:lstStyle/>
+          <a:p>
+            <a:pPr marL="342900" indent="-342900">
+              <a:spcAft>
+                <a:spcPts val="500"/>
+              </a:spcAft>
+              <a:buSzPct val="100000"/>
+              <a:buChar char="•"/>
+            </a:pPr>
+            <a:r>
+              <a:rPr lang="en-US" sz="1150" dirty="0">
+                <a:solidFill>
+                  <a:srgbClr val="F2F4F8"/>
+                </a:solidFill>
+                <a:latin typeface="Calibri" pitchFamily="34" charset="0"/>
+                <a:ea typeface="Calibri" pitchFamily="34" charset="-122"/>
+                <a:cs typeface="Calibri" pitchFamily="34" charset="-120"/>
+              </a:rPr>
+              <a:t>受験資格: Claude Partner Network(CPN)加盟企業に所属する者のみ(会社用メールアドレスでの登録が必要)</a:t>
+            </a:r>
+            <a:endParaRPr lang="en-US" sz="1150" dirty="0"/>
+          </a:p>
+          <a:p>
+            <a:pPr marL="342900" indent="-342900">
+              <a:spcAft>
+                <a:spcPts val="500"/>
+              </a:spcAft>
+              <a:buSzPct val="100000"/>
+              <a:buChar char="•"/>
+            </a:pPr>
+            <a:r>
+              <a:rPr lang="en-US" sz="1150" dirty="0">
+                <a:solidFill>
+                  <a:srgbClr val="F2F4F8"/>
+                </a:solidFill>
+                <a:latin typeface="Calibri" pitchFamily="34" charset="0"/>
+                <a:ea typeface="Calibri" pitchFamily="34" charset="-122"/>
+                <a:cs typeface="Calibri" pitchFamily="34" charset="-120"/>
+              </a:rPr>
+              <a:t>本人確認: 政府発行の有効な写真付き身分証が必要。登録名と完全一致している必要がある</a:t>
+            </a:r>
+            <a:endParaRPr lang="en-US" sz="1150" dirty="0"/>
+          </a:p>
+          <a:p>
+            <a:pPr marL="342900" indent="-342900">
+              <a:spcAft>
+                <a:spcPts val="500"/>
+              </a:spcAft>
+              <a:buSzPct val="100000"/>
+              <a:buChar char="•"/>
+            </a:pPr>
+            <a:r>
+              <a:rPr lang="en-US" sz="1150" dirty="0">
+                <a:solidFill>
+                  <a:srgbClr val="F2F4F8"/>
+                </a:solidFill>
+                <a:latin typeface="Calibri" pitchFamily="34" charset="0"/>
+                <a:ea typeface="Calibri" pitchFamily="34" charset="-122"/>
+                <a:cs typeface="Calibri" pitchFamily="34" charset="-120"/>
+              </a:rPr>
+              <a:t>試験開始前に機密保持・秘密保持契約(NDA)への同意が必須。同意しない場合、返金なしでセッション終了</a:t>
+            </a:r>
+            <a:endParaRPr lang="en-US" sz="1150" dirty="0"/>
+          </a:p>
+        </p:txBody>
+      </p:sp>
+      <p:sp>
+        <p:nvSpPr>
+          <p:cNvPr id="10" name="Text 8"/>
+          <p:cNvSpPr txBox="1"/>
+          <p:nvPr/>
+        </p:nvSpPr>
+        <p:spPr>
+          <a:xfrm>
+            <a:off x="548640" y="6400800"/>
+            <a:ext cx="11064240" cy="320040"/>
+          </a:xfrm>
+          <a:prstGeom prst="rect">
+            <a:avLst/>
+          </a:prstGeom>
+          <a:noFill/>
+          <a:ln/>
+        </p:spPr>
+        <p:txBody>
+          <a:bodyPr wrap="square" lIns="0" tIns="0" rIns="0" bIns="0" rtlCol="0" anchor="ctr"/>
+          <a:lstStyle/>
+          <a:p>
+            <a:pPr indent="0" marL="0">
+              <a:buNone/>
+            </a:pPr>
+            <a:r>
+              <a:rPr lang="en-US" sz="900" i="1" dirty="0">
+                <a:solidFill>
+                  <a:srgbClr val="B9C4DB"/>
+                </a:solidFill>
+                <a:latin typeface="Calibri" pitchFamily="34" charset="0"/>
+                <a:ea typeface="Calibri" pitchFamily="34" charset="-122"/>
+                <a:cs typeface="Calibri" pitchFamily="34" charset="-120"/>
+              </a:rPr>
+              <a:t>出典: Anthropic公式試験ガイド セクション10・11・13 + Pearson VUE公式ページ</a:t>
+            </a:r>
+            <a:endParaRPr lang="en-US" sz="900" dirty="0"/>
+          </a:p>
+        </p:txBody>
+      </p:sp>
+      <p:sp>
+        <p:nvSpPr>
+          <p:cNvPr id="11" name="Text 9"/>
+          <p:cNvSpPr txBox="1"/>
+          <p:nvPr/>
+        </p:nvSpPr>
+        <p:spPr>
+          <a:xfrm>
+            <a:off x="11521440" y="6492240"/>
+            <a:ext cx="457200" cy="274320"/>
+          </a:xfrm>
+          <a:prstGeom prst="rect">
+            <a:avLst/>
+          </a:prstGeom>
+          <a:noFill/>
+          <a:ln/>
+        </p:spPr>
+        <p:txBody>
+          <a:bodyPr wrap="square" lIns="0" tIns="0" rIns="0" bIns="0" rtlCol="0" anchor="ctr"/>
+          <a:lstStyle/>
+          <a:p>
+            <a:pPr algn="r" indent="0" marL="0">
+              <a:buNone/>
+            </a:pPr>
+            <a:r>
+              <a:rPr lang="en-US" sz="1000" dirty="0">
+                <a:solidFill>
+                  <a:srgbClr val="5B6B8C"/>
+                </a:solidFill>
+                <a:latin typeface="Calibri" pitchFamily="34" charset="0"/>
+                <a:ea typeface="Calibri" pitchFamily="34" charset="-122"/>
+                <a:cs typeface="Calibri" pitchFamily="34" charset="-120"/>
+              </a:rPr>
+              <a:t>19</a:t>
+            </a:r>
+            <a:endParaRPr lang="en-US" sz="1000" dirty="0"/>
+          </a:p>
+        </p:txBody>
+      </p:sp>
+    </p:spTree>
+  </p:cSld>
+  <p:clrMapOvr>
+    <a:masterClrMapping/>
+  </p:clrMapOvr>
+</p:sld>
+</file>
+
+<file path=ppt/slides/slide2.xml><?xml version="1.0" encoding="utf-8"?>
+<p:sld xmlns:a="http://schemas.openxmlformats.org/drawingml/2006/main" xmlns:r="http://schemas.openxmlformats.org/officeDocument/2006/relationships" xmlns:p="http://schemas.openxmlformats.org/presentationml/2006/main">
+  <p:cSld name="Slide 2">
+    <p:bg>
+      <p:bgPr>
+        <a:solidFill>
+          <a:srgbClr val="FFFFFF"/>
+        </a:solidFill>
+      </p:bgPr>
+    </p:bg>
+    <p:spTree>
+      <p:nvGrpSpPr>
+        <p:cNvPr id="1" name=""/>
+        <p:cNvGrpSpPr/>
+        <p:nvPr/>
+      </p:nvGrpSpPr>
+      <p:grpSpPr>
+        <a:xfrm>
+          <a:off x="0" y="0"/>
+          <a:ext cx="0" cy="0"/>
+          <a:chOff x="0" y="0"/>
+          <a:chExt cx="0" cy="0"/>
+        </a:xfrm>
+      </p:grpSpPr>
+      <p:sp>
+        <p:nvSpPr>
+          <p:cNvPr id="2" name="Text 0"/>
+          <p:cNvSpPr txBox="1"/>
+          <p:nvPr/>
+        </p:nvSpPr>
+        <p:spPr>
+          <a:xfrm>
+            <a:off x="548640" y="365760"/>
+            <a:ext cx="5486400" cy="640080"/>
+          </a:xfrm>
+          <a:prstGeom prst="rect">
+            <a:avLst/>
+          </a:prstGeom>
+          <a:noFill/>
+          <a:ln/>
+        </p:spPr>
+        <p:txBody>
+          <a:bodyPr wrap="square" lIns="0" tIns="0" rIns="0" bIns="0" rtlCol="0" anchor="ctr"/>
+          <a:lstStyle/>
+          <a:p>
+            <a:pPr indent="0" marL="0">
+              <a:buNone/>
+            </a:pPr>
+            <a:r>
+              <a:rPr lang="en-US" sz="3000" b="1" dirty="0">
+                <a:solidFill>
+                  <a:srgbClr val="16213E"/>
+                </a:solidFill>
+                <a:latin typeface="Cambria" pitchFamily="34" charset="0"/>
+                <a:ea typeface="Cambria" pitchFamily="34" charset="-122"/>
+                <a:cs typeface="Cambria" pitchFamily="34" charset="-120"/>
+              </a:rPr>
+              <a:t>目次</a:t>
+            </a:r>
+            <a:endParaRPr lang="en-US" sz="3000" dirty="0"/>
+          </a:p>
+        </p:txBody>
+      </p:sp>
+      <p:sp>
+        <p:nvSpPr>
+          <p:cNvPr id="3" name="Shape 1"/>
+          <p:cNvSpPr/>
+          <p:nvPr/>
+        </p:nvSpPr>
+        <p:spPr>
+          <a:xfrm>
+            <a:off x="640080" y="1051560"/>
+            <a:ext cx="402336" cy="402336"/>
+          </a:xfrm>
+          <a:prstGeom prst="ellipse">
+            <a:avLst/>
+          </a:prstGeom>
+          <a:solidFill>
+            <a:srgbClr val="3E64FF"/>
+          </a:solidFill>
+          <a:ln/>
+        </p:spPr>
+      </p:sp>
+      <p:sp>
+        <p:nvSpPr>
+          <p:cNvPr id="4" name="Text 2"/>
+          <p:cNvSpPr txBox="1"/>
+          <p:nvPr/>
+        </p:nvSpPr>
+        <p:spPr>
+          <a:xfrm>
+            <a:off x="640080" y="1051560"/>
+            <a:ext cx="402336" cy="402336"/>
+          </a:xfrm>
+          <a:prstGeom prst="rect">
+            <a:avLst/>
+          </a:prstGeom>
+          <a:noFill/>
+          <a:ln/>
+        </p:spPr>
+        <p:txBody>
+          <a:bodyPr wrap="square" lIns="0" tIns="0" rIns="0" bIns="0" rtlCol="0" anchor="ctr"/>
+          <a:lstStyle/>
+          <a:p>
+            <a:pPr algn="ctr" indent="0" marL="0">
+              <a:buNone/>
+            </a:pPr>
+            <a:r>
+              <a:rPr lang="en-US" sz="1300" b="1" dirty="0">
+                <a:solidFill>
+                  <a:srgbClr val="FFFFFF"/>
+                </a:solidFill>
+                <a:latin typeface="Calibri" pitchFamily="34" charset="0"/>
+                <a:ea typeface="Calibri" pitchFamily="34" charset="-122"/>
+                <a:cs typeface="Calibri" pitchFamily="34" charset="-120"/>
+              </a:rPr>
+              <a:t>1</a:t>
+            </a:r>
+            <a:endParaRPr lang="en-US" sz="1300" dirty="0"/>
+          </a:p>
+        </p:txBody>
+      </p:sp>
+      <p:sp>
+        <p:nvSpPr>
+          <p:cNvPr id="5" name="Text 3"/>
+          <p:cNvSpPr txBox="1"/>
+          <p:nvPr/>
+        </p:nvSpPr>
+        <p:spPr>
+          <a:xfrm>
+            <a:off x="1261872" y="1024128"/>
+            <a:ext cx="9966960" cy="292608"/>
+          </a:xfrm>
+          <a:prstGeom prst="rect">
+            <a:avLst/>
+          </a:prstGeom>
+          <a:noFill/>
+          <a:ln/>
+        </p:spPr>
+        <p:txBody>
+          <a:bodyPr wrap="square" lIns="0" tIns="0" rIns="0" bIns="0" rtlCol="0" anchor="ctr"/>
+          <a:lstStyle/>
+          <a:p>
+            <a:pPr indent="0" marL="0">
+              <a:buNone/>
+            </a:pPr>
+            <a:r>
+              <a:rPr lang="en-US" sz="1400" b="1" dirty="0">
+                <a:solidFill>
+                  <a:srgbClr val="16213E"/>
+                </a:solidFill>
+                <a:latin typeface="Calibri" pitchFamily="34" charset="0"/>
+                <a:ea typeface="Calibri" pitchFamily="34" charset="-122"/>
+                <a:cs typeface="Calibri" pitchFamily="34" charset="-120"/>
+              </a:rPr>
+              <a:t>この資格について / 対象者 / MQC像</a:t>
+            </a:r>
+            <a:endParaRPr lang="en-US" sz="1400" dirty="0"/>
+          </a:p>
+        </p:txBody>
+      </p:sp>
+      <p:sp>
+        <p:nvSpPr>
+          <p:cNvPr id="6" name="Text 4"/>
+          <p:cNvSpPr txBox="1"/>
+          <p:nvPr/>
+        </p:nvSpPr>
+        <p:spPr>
+          <a:xfrm>
+            <a:off x="1261872" y="1298448"/>
+            <a:ext cx="9966960" cy="292608"/>
+          </a:xfrm>
+          <a:prstGeom prst="rect">
+            <a:avLst/>
+          </a:prstGeom>
+          <a:noFill/>
+          <a:ln/>
+        </p:spPr>
+        <p:txBody>
+          <a:bodyPr wrap="square" lIns="0" tIns="0" rIns="0" bIns="0" rtlCol="0" anchor="ctr"/>
+          <a:lstStyle/>
+          <a:p>
+            <a:pPr indent="0" marL="0">
+              <a:buNone/>
+            </a:pPr>
+            <a:r>
+              <a:rPr lang="en-US" sz="1050" dirty="0">
+                <a:solidFill>
+                  <a:srgbClr val="5B6B8C"/>
+                </a:solidFill>
+                <a:latin typeface="Calibri" pitchFamily="34" charset="0"/>
+                <a:ea typeface="Calibri" pitchFamily="34" charset="-122"/>
+                <a:cs typeface="Calibri" pitchFamily="34" charset="-120"/>
+              </a:rPr>
+              <a:t>誰のための資格か、何を証明するか</a:t>
+            </a:r>
+            <a:endParaRPr lang="en-US" sz="1050" dirty="0"/>
+          </a:p>
+        </p:txBody>
+      </p:sp>
+      <p:sp>
+        <p:nvSpPr>
+          <p:cNvPr id="7" name="Shape 5"/>
+          <p:cNvSpPr/>
+          <p:nvPr/>
+        </p:nvSpPr>
+        <p:spPr>
+          <a:xfrm>
+            <a:off x="640080" y="1719072"/>
+            <a:ext cx="402336" cy="402336"/>
+          </a:xfrm>
+          <a:prstGeom prst="ellipse">
+            <a:avLst/>
+          </a:prstGeom>
+          <a:solidFill>
+            <a:srgbClr val="3E64FF"/>
+          </a:solidFill>
+          <a:ln/>
+        </p:spPr>
+      </p:sp>
+      <p:sp>
+        <p:nvSpPr>
+          <p:cNvPr id="8" name="Text 6"/>
+          <p:cNvSpPr txBox="1"/>
+          <p:nvPr/>
+        </p:nvSpPr>
+        <p:spPr>
+          <a:xfrm>
+            <a:off x="640080" y="1719072"/>
+            <a:ext cx="402336" cy="402336"/>
+          </a:xfrm>
+          <a:prstGeom prst="rect">
+            <a:avLst/>
+          </a:prstGeom>
+          <a:noFill/>
+          <a:ln/>
+        </p:spPr>
+        <p:txBody>
+          <a:bodyPr wrap="square" lIns="0" tIns="0" rIns="0" bIns="0" rtlCol="0" anchor="ctr"/>
+          <a:lstStyle/>
+          <a:p>
+            <a:pPr algn="ctr" indent="0" marL="0">
+              <a:buNone/>
+            </a:pPr>
+            <a:r>
+              <a:rPr lang="en-US" sz="1300" b="1" dirty="0">
+                <a:solidFill>
+                  <a:srgbClr val="FFFFFF"/>
+                </a:solidFill>
+                <a:latin typeface="Calibri" pitchFamily="34" charset="0"/>
+                <a:ea typeface="Calibri" pitchFamily="34" charset="-122"/>
+                <a:cs typeface="Calibri" pitchFamily="34" charset="-120"/>
+              </a:rPr>
+              <a:t>2</a:t>
+            </a:r>
+            <a:endParaRPr lang="en-US" sz="1300" dirty="0"/>
+          </a:p>
+        </p:txBody>
+      </p:sp>
+      <p:sp>
+        <p:nvSpPr>
+          <p:cNvPr id="9" name="Text 7"/>
+          <p:cNvSpPr txBox="1"/>
+          <p:nvPr/>
+        </p:nvSpPr>
+        <p:spPr>
+          <a:xfrm>
+            <a:off x="1261872" y="1691640"/>
+            <a:ext cx="9966960" cy="292608"/>
+          </a:xfrm>
+          <a:prstGeom prst="rect">
+            <a:avLst/>
+          </a:prstGeom>
+          <a:noFill/>
+          <a:ln/>
+        </p:spPr>
+        <p:txBody>
+          <a:bodyPr wrap="square" lIns="0" tIns="0" rIns="0" bIns="0" rtlCol="0" anchor="ctr"/>
+          <a:lstStyle/>
+          <a:p>
+            <a:pPr indent="0" marL="0">
+              <a:buNone/>
+            </a:pPr>
+            <a:r>
+              <a:rPr lang="en-US" sz="1400" b="1" dirty="0">
+                <a:solidFill>
+                  <a:srgbClr val="16213E"/>
+                </a:solidFill>
+                <a:latin typeface="Calibri" pitchFamily="34" charset="0"/>
+                <a:ea typeface="Calibri" pitchFamily="34" charset="-122"/>
+                <a:cs typeface="Calibri" pitchFamily="34" charset="-120"/>
+              </a:rPr>
+              <a:t>試験の概要と出題7分野</a:t>
+            </a:r>
+            <a:endParaRPr lang="en-US" sz="1400" dirty="0"/>
+          </a:p>
+        </p:txBody>
+      </p:sp>
+      <p:sp>
+        <p:nvSpPr>
+          <p:cNvPr id="10" name="Text 8"/>
+          <p:cNvSpPr txBox="1"/>
+          <p:nvPr/>
+        </p:nvSpPr>
+        <p:spPr>
+          <a:xfrm>
+            <a:off x="1261872" y="1965960"/>
+            <a:ext cx="9966960" cy="292608"/>
+          </a:xfrm>
+          <a:prstGeom prst="rect">
+            <a:avLst/>
+          </a:prstGeom>
+          <a:noFill/>
+          <a:ln/>
+        </p:spPr>
+        <p:txBody>
+          <a:bodyPr wrap="square" lIns="0" tIns="0" rIns="0" bIns="0" rtlCol="0" anchor="ctr"/>
+          <a:lstStyle/>
+          <a:p>
+            <a:pPr indent="0" marL="0">
+              <a:buNone/>
+            </a:pPr>
+            <a:r>
+              <a:rPr lang="en-US" sz="1050" dirty="0">
+                <a:solidFill>
+                  <a:srgbClr val="5B6B8C"/>
+                </a:solidFill>
+                <a:latin typeface="Calibri" pitchFamily="34" charset="0"/>
+                <a:ea typeface="Calibri" pitchFamily="34" charset="-122"/>
+                <a:cs typeface="Calibri" pitchFamily="34" charset="-120"/>
+              </a:rPr>
+              <a:t>問題数・時間・合格点、配点比率</a:t>
+            </a:r>
+            <a:endParaRPr lang="en-US" sz="1050" dirty="0"/>
+          </a:p>
+        </p:txBody>
+      </p:sp>
+      <p:sp>
+        <p:nvSpPr>
+          <p:cNvPr id="11" name="Shape 9"/>
+          <p:cNvSpPr/>
+          <p:nvPr/>
+        </p:nvSpPr>
+        <p:spPr>
+          <a:xfrm>
+            <a:off x="640080" y="2386584"/>
+            <a:ext cx="402336" cy="402336"/>
+          </a:xfrm>
+          <a:prstGeom prst="ellipse">
+            <a:avLst/>
+          </a:prstGeom>
+          <a:solidFill>
+            <a:srgbClr val="3E64FF"/>
+          </a:solidFill>
+          <a:ln/>
+        </p:spPr>
+      </p:sp>
+      <p:sp>
+        <p:nvSpPr>
+          <p:cNvPr id="12" name="Text 10"/>
+          <p:cNvSpPr txBox="1"/>
+          <p:nvPr/>
+        </p:nvSpPr>
+        <p:spPr>
+          <a:xfrm>
+            <a:off x="640080" y="2386584"/>
+            <a:ext cx="402336" cy="402336"/>
+          </a:xfrm>
+          <a:prstGeom prst="rect">
+            <a:avLst/>
+          </a:prstGeom>
+          <a:noFill/>
+          <a:ln/>
+        </p:spPr>
+        <p:txBody>
+          <a:bodyPr wrap="square" lIns="0" tIns="0" rIns="0" bIns="0" rtlCol="0" anchor="ctr"/>
+          <a:lstStyle/>
+          <a:p>
+            <a:pPr algn="ctr" indent="0" marL="0">
+              <a:buNone/>
+            </a:pPr>
+            <a:r>
+              <a:rPr lang="en-US" sz="1300" b="1" dirty="0">
+                <a:solidFill>
+                  <a:srgbClr val="FFFFFF"/>
+                </a:solidFill>
+                <a:latin typeface="Calibri" pitchFamily="34" charset="0"/>
+                <a:ea typeface="Calibri" pitchFamily="34" charset="-122"/>
+                <a:cs typeface="Calibri" pitchFamily="34" charset="-120"/>
+              </a:rPr>
+              <a:t>3</a:t>
+            </a:r>
+            <a:endParaRPr lang="en-US" sz="1300" dirty="0"/>
+          </a:p>
+        </p:txBody>
+      </p:sp>
+      <p:sp>
+        <p:nvSpPr>
+          <p:cNvPr id="13" name="Text 11"/>
+          <p:cNvSpPr txBox="1"/>
+          <p:nvPr/>
+        </p:nvSpPr>
+        <p:spPr>
+          <a:xfrm>
+            <a:off x="1261872" y="2359152"/>
+            <a:ext cx="9966960" cy="292608"/>
+          </a:xfrm>
+          <a:prstGeom prst="rect">
+            <a:avLst/>
+          </a:prstGeom>
+          <a:noFill/>
+          <a:ln/>
+        </p:spPr>
+        <p:txBody>
+          <a:bodyPr wrap="square" lIns="0" tIns="0" rIns="0" bIns="0" rtlCol="0" anchor="ctr"/>
+          <a:lstStyle/>
+          <a:p>
+            <a:pPr indent="0" marL="0">
+              <a:buNone/>
+            </a:pPr>
+            <a:r>
+              <a:rPr lang="en-US" sz="1400" b="1" dirty="0">
+                <a:solidFill>
+                  <a:srgbClr val="16213E"/>
+                </a:solidFill>
+                <a:latin typeface="Calibri" pitchFamily="34" charset="0"/>
+                <a:ea typeface="Calibri" pitchFamily="34" charset="-122"/>
+                <a:cs typeface="Calibri" pitchFamily="34" charset="-120"/>
+              </a:rPr>
+              <a:t>分野1〜7の詳細解説 + 追加の着眼点</a:t>
+            </a:r>
+            <a:endParaRPr lang="en-US" sz="1400" dirty="0"/>
+          </a:p>
+        </p:txBody>
+      </p:sp>
+      <p:sp>
+        <p:nvSpPr>
+          <p:cNvPr id="14" name="Text 12"/>
+          <p:cNvSpPr txBox="1"/>
+          <p:nvPr/>
+        </p:nvSpPr>
+        <p:spPr>
+          <a:xfrm>
+            <a:off x="1261872" y="2633472"/>
+            <a:ext cx="9966960" cy="292608"/>
+          </a:xfrm>
+          <a:prstGeom prst="rect">
+            <a:avLst/>
+          </a:prstGeom>
+          <a:noFill/>
+          <a:ln/>
+        </p:spPr>
+        <p:txBody>
+          <a:bodyPr wrap="square" lIns="0" tIns="0" rIns="0" bIns="0" rtlCol="0" anchor="ctr"/>
+          <a:lstStyle/>
+          <a:p>
+            <a:pPr indent="0" marL="0">
+              <a:buNone/>
+            </a:pPr>
+            <a:r>
+              <a:rPr lang="en-US" sz="1050" dirty="0">
+                <a:solidFill>
+                  <a:srgbClr val="5B6B8C"/>
+                </a:solidFill>
+                <a:latin typeface="Calibri" pitchFamily="34" charset="0"/>
+                <a:ea typeface="Calibri" pitchFamily="34" charset="-122"/>
+                <a:cs typeface="Calibri" pitchFamily="34" charset="-120"/>
+              </a:rPr>
+              <a:t>公式の学習目標 + 実例つき解説(Udemy模擬試験の知見も反映)</a:t>
+            </a:r>
+            <a:endParaRPr lang="en-US" sz="1050" dirty="0"/>
+          </a:p>
+        </p:txBody>
+      </p:sp>
+      <p:sp>
+        <p:nvSpPr>
+          <p:cNvPr id="15" name="Shape 13"/>
+          <p:cNvSpPr/>
+          <p:nvPr/>
+        </p:nvSpPr>
+        <p:spPr>
+          <a:xfrm>
+            <a:off x="640080" y="3054096"/>
+            <a:ext cx="402336" cy="402336"/>
+          </a:xfrm>
+          <a:prstGeom prst="ellipse">
+            <a:avLst/>
+          </a:prstGeom>
+          <a:solidFill>
+            <a:srgbClr val="3E64FF"/>
+          </a:solidFill>
+          <a:ln/>
+        </p:spPr>
+      </p:sp>
+      <p:sp>
+        <p:nvSpPr>
+          <p:cNvPr id="16" name="Text 14"/>
+          <p:cNvSpPr txBox="1"/>
+          <p:nvPr/>
+        </p:nvSpPr>
+        <p:spPr>
+          <a:xfrm>
+            <a:off x="640080" y="3054096"/>
+            <a:ext cx="402336" cy="402336"/>
+          </a:xfrm>
+          <a:prstGeom prst="rect">
+            <a:avLst/>
+          </a:prstGeom>
+          <a:noFill/>
+          <a:ln/>
+        </p:spPr>
+        <p:txBody>
+          <a:bodyPr wrap="square" lIns="0" tIns="0" rIns="0" bIns="0" rtlCol="0" anchor="ctr"/>
+          <a:lstStyle/>
+          <a:p>
+            <a:pPr algn="ctr" indent="0" marL="0">
+              <a:buNone/>
+            </a:pPr>
+            <a:r>
+              <a:rPr lang="en-US" sz="1300" b="1" dirty="0">
+                <a:solidFill>
+                  <a:srgbClr val="FFFFFF"/>
+                </a:solidFill>
+                <a:latin typeface="Calibri" pitchFamily="34" charset="0"/>
+                <a:ea typeface="Calibri" pitchFamily="34" charset="-122"/>
+                <a:cs typeface="Calibri" pitchFamily="34" charset="-120"/>
+              </a:rPr>
+              <a:t>4</a:t>
+            </a:r>
+            <a:endParaRPr lang="en-US" sz="1300" dirty="0"/>
+          </a:p>
+        </p:txBody>
+      </p:sp>
+      <p:sp>
+        <p:nvSpPr>
+          <p:cNvPr id="17" name="Text 15"/>
+          <p:cNvSpPr txBox="1"/>
+          <p:nvPr/>
+        </p:nvSpPr>
+        <p:spPr>
+          <a:xfrm>
+            <a:off x="1261872" y="3026664"/>
+            <a:ext cx="9966960" cy="292608"/>
+          </a:xfrm>
+          <a:prstGeom prst="rect">
+            <a:avLst/>
+          </a:prstGeom>
+          <a:noFill/>
+          <a:ln/>
+        </p:spPr>
+        <p:txBody>
+          <a:bodyPr wrap="square" lIns="0" tIns="0" rIns="0" bIns="0" rtlCol="0" anchor="ctr"/>
+          <a:lstStyle/>
+          <a:p>
+            <a:pPr indent="0" marL="0">
+              <a:buNone/>
+            </a:pPr>
+            <a:r>
+              <a:rPr lang="en-US" sz="1400" b="1" dirty="0">
+                <a:solidFill>
+                  <a:srgbClr val="16213E"/>
+                </a:solidFill>
+                <a:latin typeface="Calibri" pitchFamily="34" charset="0"/>
+                <a:ea typeface="Calibri" pitchFamily="34" charset="-122"/>
+                <a:cs typeface="Calibri" pitchFamily="34" charset="-120"/>
+              </a:rPr>
+              <a:t>試験対策テクニック</a:t>
+            </a:r>
+            <a:endParaRPr lang="en-US" sz="1400" dirty="0"/>
+          </a:p>
+        </p:txBody>
+      </p:sp>
+      <p:sp>
+        <p:nvSpPr>
+          <p:cNvPr id="18" name="Text 16"/>
+          <p:cNvSpPr txBox="1"/>
+          <p:nvPr/>
+        </p:nvSpPr>
+        <p:spPr>
+          <a:xfrm>
+            <a:off x="1261872" y="3300984"/>
+            <a:ext cx="9966960" cy="292608"/>
+          </a:xfrm>
+          <a:prstGeom prst="rect">
+            <a:avLst/>
+          </a:prstGeom>
+          <a:noFill/>
+          <a:ln/>
+        </p:spPr>
+        <p:txBody>
+          <a:bodyPr wrap="square" lIns="0" tIns="0" rIns="0" bIns="0" rtlCol="0" anchor="ctr"/>
+          <a:lstStyle/>
+          <a:p>
+            <a:pPr indent="0" marL="0">
+              <a:buNone/>
+            </a:pPr>
+            <a:r>
+              <a:rPr lang="en-US" sz="1050" dirty="0">
+                <a:solidFill>
+                  <a:srgbClr val="5B6B8C"/>
+                </a:solidFill>
+                <a:latin typeface="Calibri" pitchFamily="34" charset="0"/>
+                <a:ea typeface="Calibri" pitchFamily="34" charset="-122"/>
+                <a:cs typeface="Calibri" pitchFamily="34" charset="-120"/>
+              </a:rPr>
+              <a:t>動詞パターンによる正誤の見極め方</a:t>
+            </a:r>
+            <a:endParaRPr lang="en-US" sz="1050" dirty="0"/>
+          </a:p>
+        </p:txBody>
+      </p:sp>
+      <p:sp>
+        <p:nvSpPr>
+          <p:cNvPr id="19" name="Shape 17"/>
+          <p:cNvSpPr/>
+          <p:nvPr/>
+        </p:nvSpPr>
+        <p:spPr>
+          <a:xfrm>
+            <a:off x="640080" y="3721608"/>
+            <a:ext cx="402336" cy="402336"/>
+          </a:xfrm>
+          <a:prstGeom prst="ellipse">
+            <a:avLst/>
+          </a:prstGeom>
+          <a:solidFill>
+            <a:srgbClr val="3E64FF"/>
+          </a:solidFill>
+          <a:ln/>
+        </p:spPr>
+      </p:sp>
+      <p:sp>
+        <p:nvSpPr>
+          <p:cNvPr id="20" name="Text 18"/>
+          <p:cNvSpPr txBox="1"/>
+          <p:nvPr/>
+        </p:nvSpPr>
+        <p:spPr>
+          <a:xfrm>
+            <a:off x="640080" y="3721608"/>
+            <a:ext cx="402336" cy="402336"/>
+          </a:xfrm>
+          <a:prstGeom prst="rect">
+            <a:avLst/>
+          </a:prstGeom>
+          <a:noFill/>
+          <a:ln/>
+        </p:spPr>
+        <p:txBody>
+          <a:bodyPr wrap="square" lIns="0" tIns="0" rIns="0" bIns="0" rtlCol="0" anchor="ctr"/>
+          <a:lstStyle/>
+          <a:p>
+            <a:pPr algn="ctr" indent="0" marL="0">
+              <a:buNone/>
+            </a:pPr>
+            <a:r>
+              <a:rPr lang="en-US" sz="1300" b="1" dirty="0">
+                <a:solidFill>
+                  <a:srgbClr val="FFFFFF"/>
+                </a:solidFill>
+                <a:latin typeface="Calibri" pitchFamily="34" charset="0"/>
+                <a:ea typeface="Calibri" pitchFamily="34" charset="-122"/>
+                <a:cs typeface="Calibri" pitchFamily="34" charset="-120"/>
+              </a:rPr>
+              <a:t>5</a:t>
+            </a:r>
+            <a:endParaRPr lang="en-US" sz="1300" dirty="0"/>
+          </a:p>
+        </p:txBody>
+      </p:sp>
+      <p:sp>
+        <p:nvSpPr>
+          <p:cNvPr id="21" name="Text 19"/>
+          <p:cNvSpPr txBox="1"/>
+          <p:nvPr/>
+        </p:nvSpPr>
+        <p:spPr>
+          <a:xfrm>
+            <a:off x="1261872" y="3694176"/>
+            <a:ext cx="9966960" cy="292608"/>
+          </a:xfrm>
+          <a:prstGeom prst="rect">
+            <a:avLst/>
+          </a:prstGeom>
+          <a:noFill/>
+          <a:ln/>
+        </p:spPr>
+        <p:txBody>
+          <a:bodyPr wrap="square" lIns="0" tIns="0" rIns="0" bIns="0" rtlCol="0" anchor="ctr"/>
+          <a:lstStyle/>
+          <a:p>
+            <a:pPr indent="0" marL="0">
+              <a:buNone/>
+            </a:pPr>
+            <a:r>
+              <a:rPr lang="en-US" sz="1400" b="1" dirty="0">
+                <a:solidFill>
+                  <a:srgbClr val="16213E"/>
+                </a:solidFill>
+                <a:latin typeface="Calibri" pitchFamily="34" charset="0"/>
+                <a:ea typeface="Calibri" pitchFamily="34" charset="-122"/>
+                <a:cs typeface="Calibri" pitchFamily="34" charset="-120"/>
+              </a:rPr>
+              <a:t>公式サンプル問題3問</a:t>
+            </a:r>
+            <a:endParaRPr lang="en-US" sz="1400" dirty="0"/>
+          </a:p>
+        </p:txBody>
+      </p:sp>
+      <p:sp>
+        <p:nvSpPr>
+          <p:cNvPr id="22" name="Text 20"/>
+          <p:cNvSpPr txBox="1"/>
+          <p:nvPr/>
+        </p:nvSpPr>
+        <p:spPr>
+          <a:xfrm>
+            <a:off x="1261872" y="3968496"/>
+            <a:ext cx="9966960" cy="292608"/>
+          </a:xfrm>
+          <a:prstGeom prst="rect">
+            <a:avLst/>
+          </a:prstGeom>
+          <a:noFill/>
+          <a:ln/>
+        </p:spPr>
+        <p:txBody>
+          <a:bodyPr wrap="square" lIns="0" tIns="0" rIns="0" bIns="0" rtlCol="0" anchor="ctr"/>
+          <a:lstStyle/>
+          <a:p>
+            <a:pPr indent="0" marL="0">
+              <a:buNone/>
+            </a:pPr>
+            <a:r>
+              <a:rPr lang="en-US" sz="1050" dirty="0">
+                <a:solidFill>
+                  <a:srgbClr val="5B6B8C"/>
+                </a:solidFill>
+                <a:latin typeface="Calibri" pitchFamily="34" charset="0"/>
+                <a:ea typeface="Calibri" pitchFamily="34" charset="-122"/>
+                <a:cs typeface="Calibri" pitchFamily="34" charset="-120"/>
+              </a:rPr>
+              <a:t>Exam Guide掲載の原文訳+解説(全30問の問題集はmd版に収録)</a:t>
+            </a:r>
+            <a:endParaRPr lang="en-US" sz="1050" dirty="0"/>
+          </a:p>
+        </p:txBody>
+      </p:sp>
+      <p:sp>
+        <p:nvSpPr>
+          <p:cNvPr id="23" name="Shape 21"/>
+          <p:cNvSpPr/>
+          <p:nvPr/>
+        </p:nvSpPr>
+        <p:spPr>
+          <a:xfrm>
+            <a:off x="640080" y="4389120"/>
+            <a:ext cx="402336" cy="402336"/>
+          </a:xfrm>
+          <a:prstGeom prst="ellipse">
+            <a:avLst/>
+          </a:prstGeom>
+          <a:solidFill>
+            <a:srgbClr val="3E64FF"/>
+          </a:solidFill>
+          <a:ln/>
+        </p:spPr>
+      </p:sp>
+      <p:sp>
+        <p:nvSpPr>
+          <p:cNvPr id="24" name="Text 22"/>
+          <p:cNvSpPr txBox="1"/>
+          <p:nvPr/>
+        </p:nvSpPr>
+        <p:spPr>
+          <a:xfrm>
+            <a:off x="640080" y="4389120"/>
+            <a:ext cx="402336" cy="402336"/>
+          </a:xfrm>
+          <a:prstGeom prst="rect">
+            <a:avLst/>
+          </a:prstGeom>
+          <a:noFill/>
+          <a:ln/>
+        </p:spPr>
+        <p:txBody>
+          <a:bodyPr wrap="square" lIns="0" tIns="0" rIns="0" bIns="0" rtlCol="0" anchor="ctr"/>
+          <a:lstStyle/>
+          <a:p>
+            <a:pPr algn="ctr" indent="0" marL="0">
+              <a:buNone/>
+            </a:pPr>
+            <a:r>
+              <a:rPr lang="en-US" sz="1300" b="1" dirty="0">
+                <a:solidFill>
+                  <a:srgbClr val="FFFFFF"/>
+                </a:solidFill>
+                <a:latin typeface="Calibri" pitchFamily="34" charset="0"/>
+                <a:ea typeface="Calibri" pitchFamily="34" charset="-122"/>
+                <a:cs typeface="Calibri" pitchFamily="34" charset="-120"/>
+              </a:rPr>
+              <a:t>6</a:t>
+            </a:r>
+            <a:endParaRPr lang="en-US" sz="1300" dirty="0"/>
+          </a:p>
+        </p:txBody>
+      </p:sp>
+      <p:sp>
+        <p:nvSpPr>
+          <p:cNvPr id="25" name="Text 23"/>
+          <p:cNvSpPr txBox="1"/>
+          <p:nvPr/>
+        </p:nvSpPr>
+        <p:spPr>
+          <a:xfrm>
+            <a:off x="1261872" y="4361688"/>
+            <a:ext cx="9966960" cy="292608"/>
+          </a:xfrm>
+          <a:prstGeom prst="rect">
+            <a:avLst/>
+          </a:prstGeom>
+          <a:noFill/>
+          <a:ln/>
+        </p:spPr>
+        <p:txBody>
+          <a:bodyPr wrap="square" lIns="0" tIns="0" rIns="0" bIns="0" rtlCol="0" anchor="ctr"/>
+          <a:lstStyle/>
+          <a:p>
+            <a:pPr indent="0" marL="0">
+              <a:buNone/>
+            </a:pPr>
+            <a:r>
+              <a:rPr lang="en-US" sz="1400" b="1" dirty="0">
+                <a:solidFill>
+                  <a:srgbClr val="16213E"/>
+                </a:solidFill>
+                <a:latin typeface="Calibri" pitchFamily="34" charset="0"/>
+                <a:ea typeface="Calibri" pitchFamily="34" charset="-122"/>
+                <a:cs typeface="Calibri" pitchFamily="34" charset="-120"/>
+              </a:rPr>
+              <a:t>試験ポリシー</a:t>
+            </a:r>
+            <a:endParaRPr lang="en-US" sz="1400" dirty="0"/>
+          </a:p>
+        </p:txBody>
+      </p:sp>
+      <p:sp>
+        <p:nvSpPr>
+          <p:cNvPr id="26" name="Text 24"/>
+          <p:cNvSpPr txBox="1"/>
+          <p:nvPr/>
+        </p:nvSpPr>
+        <p:spPr>
+          <a:xfrm>
+            <a:off x="1261872" y="4636008"/>
+            <a:ext cx="9966960" cy="292608"/>
+          </a:xfrm>
+          <a:prstGeom prst="rect">
+            <a:avLst/>
+          </a:prstGeom>
+          <a:noFill/>
+          <a:ln/>
+        </p:spPr>
+        <p:txBody>
+          <a:bodyPr wrap="square" lIns="0" tIns="0" rIns="0" bIns="0" rtlCol="0" anchor="ctr"/>
+          <a:lstStyle/>
+          <a:p>
+            <a:pPr indent="0" marL="0">
+              <a:buNone/>
+            </a:pPr>
+            <a:r>
+              <a:rPr lang="en-US" sz="1050" dirty="0">
+                <a:solidFill>
+                  <a:srgbClr val="5B6B8C"/>
+                </a:solidFill>
+                <a:latin typeface="Calibri" pitchFamily="34" charset="0"/>
+                <a:ea typeface="Calibri" pitchFamily="34" charset="-122"/>
+                <a:cs typeface="Calibri" pitchFamily="34" charset="-120"/>
+              </a:rPr>
+              <a:t>申込み・本人確認・再受験・資格更新</a:t>
+            </a:r>
+            <a:endParaRPr lang="en-US" sz="1050" dirty="0"/>
+          </a:p>
+        </p:txBody>
+      </p:sp>
+      <p:sp>
+        <p:nvSpPr>
+          <p:cNvPr id="27" name="Shape 25"/>
+          <p:cNvSpPr/>
+          <p:nvPr/>
+        </p:nvSpPr>
+        <p:spPr>
+          <a:xfrm>
+            <a:off x="640080" y="5056632"/>
+            <a:ext cx="402336" cy="402336"/>
+          </a:xfrm>
+          <a:prstGeom prst="ellipse">
+            <a:avLst/>
+          </a:prstGeom>
+          <a:solidFill>
+            <a:srgbClr val="3E64FF"/>
+          </a:solidFill>
+          <a:ln/>
+        </p:spPr>
+      </p:sp>
+      <p:sp>
+        <p:nvSpPr>
+          <p:cNvPr id="28" name="Text 26"/>
+          <p:cNvSpPr txBox="1"/>
+          <p:nvPr/>
+        </p:nvSpPr>
+        <p:spPr>
+          <a:xfrm>
+            <a:off x="640080" y="5056632"/>
+            <a:ext cx="402336" cy="402336"/>
+          </a:xfrm>
+          <a:prstGeom prst="rect">
+            <a:avLst/>
+          </a:prstGeom>
+          <a:noFill/>
+          <a:ln/>
+        </p:spPr>
+        <p:txBody>
+          <a:bodyPr wrap="square" lIns="0" tIns="0" rIns="0" bIns="0" rtlCol="0" anchor="ctr"/>
+          <a:lstStyle/>
+          <a:p>
+            <a:pPr algn="ctr" indent="0" marL="0">
+              <a:buNone/>
+            </a:pPr>
+            <a:r>
+              <a:rPr lang="en-US" sz="1300" b="1" dirty="0">
+                <a:solidFill>
+                  <a:srgbClr val="FFFFFF"/>
+                </a:solidFill>
+                <a:latin typeface="Calibri" pitchFamily="34" charset="0"/>
+                <a:ea typeface="Calibri" pitchFamily="34" charset="-122"/>
+                <a:cs typeface="Calibri" pitchFamily="34" charset="-120"/>
+              </a:rPr>
+              <a:t>7</a:t>
+            </a:r>
+            <a:endParaRPr lang="en-US" sz="1300" dirty="0"/>
+          </a:p>
+        </p:txBody>
+      </p:sp>
+      <p:sp>
+        <p:nvSpPr>
+          <p:cNvPr id="29" name="Text 27"/>
+          <p:cNvSpPr txBox="1"/>
+          <p:nvPr/>
+        </p:nvSpPr>
+        <p:spPr>
+          <a:xfrm>
+            <a:off x="1261872" y="5029200"/>
+            <a:ext cx="9966960" cy="292608"/>
+          </a:xfrm>
+          <a:prstGeom prst="rect">
+            <a:avLst/>
+          </a:prstGeom>
+          <a:noFill/>
+          <a:ln/>
+        </p:spPr>
+        <p:txBody>
+          <a:bodyPr wrap="square" lIns="0" tIns="0" rIns="0" bIns="0" rtlCol="0" anchor="ctr"/>
+          <a:lstStyle/>
+          <a:p>
+            <a:pPr indent="0" marL="0">
+              <a:buNone/>
+            </a:pPr>
+            <a:r>
+              <a:rPr lang="en-US" sz="1400" b="1" dirty="0">
+                <a:solidFill>
+                  <a:srgbClr val="16213E"/>
+                </a:solidFill>
+                <a:latin typeface="Calibri" pitchFamily="34" charset="0"/>
+                <a:ea typeface="Calibri" pitchFamily="34" charset="-122"/>
+                <a:cs typeface="Calibri" pitchFamily="34" charset="-120"/>
+              </a:rPr>
+              <a:t>他のClaude認定資格との違い</a:t>
+            </a:r>
+            <a:endParaRPr lang="en-US" sz="1400" dirty="0"/>
+          </a:p>
+        </p:txBody>
+      </p:sp>
+      <p:sp>
+        <p:nvSpPr>
+          <p:cNvPr id="30" name="Text 28"/>
+          <p:cNvSpPr txBox="1"/>
+          <p:nvPr/>
+        </p:nvSpPr>
+        <p:spPr>
+          <a:xfrm>
+            <a:off x="1261872" y="5303520"/>
+            <a:ext cx="9966960" cy="292608"/>
+          </a:xfrm>
+          <a:prstGeom prst="rect">
+            <a:avLst/>
+          </a:prstGeom>
+          <a:noFill/>
+          <a:ln/>
+        </p:spPr>
+        <p:txBody>
+          <a:bodyPr wrap="square" lIns="0" tIns="0" rIns="0" bIns="0" rtlCol="0" anchor="ctr"/>
+          <a:lstStyle/>
+          <a:p>
+            <a:pPr indent="0" marL="0">
+              <a:buNone/>
+            </a:pPr>
+            <a:r>
+              <a:rPr lang="en-US" sz="1050" dirty="0">
+                <a:solidFill>
+                  <a:srgbClr val="5B6B8C"/>
+                </a:solidFill>
+                <a:latin typeface="Calibri" pitchFamily="34" charset="0"/>
+                <a:ea typeface="Calibri" pitchFamily="34" charset="-122"/>
+                <a:cs typeface="Calibri" pitchFamily="34" charset="-120"/>
+              </a:rPr>
+              <a:t>CCAO-F/CCDV-F/CCAR-F/CCAR-Pの比較</a:t>
+            </a:r>
+            <a:endParaRPr lang="en-US" sz="1050" dirty="0"/>
+          </a:p>
+        </p:txBody>
+      </p:sp>
+      <p:sp>
+        <p:nvSpPr>
+          <p:cNvPr id="31" name="Shape 29"/>
+          <p:cNvSpPr/>
+          <p:nvPr/>
+        </p:nvSpPr>
+        <p:spPr>
+          <a:xfrm>
+            <a:off x="640080" y="5724144"/>
+            <a:ext cx="402336" cy="402336"/>
+          </a:xfrm>
+          <a:prstGeom prst="ellipse">
+            <a:avLst/>
+          </a:prstGeom>
+          <a:solidFill>
+            <a:srgbClr val="3E64FF"/>
+          </a:solidFill>
+          <a:ln/>
+        </p:spPr>
+      </p:sp>
+      <p:sp>
+        <p:nvSpPr>
+          <p:cNvPr id="32" name="Text 30"/>
+          <p:cNvSpPr txBox="1"/>
+          <p:nvPr/>
+        </p:nvSpPr>
+        <p:spPr>
+          <a:xfrm>
+            <a:off x="640080" y="5724144"/>
+            <a:ext cx="402336" cy="402336"/>
+          </a:xfrm>
+          <a:prstGeom prst="rect">
+            <a:avLst/>
+          </a:prstGeom>
+          <a:noFill/>
+          <a:ln/>
+        </p:spPr>
+        <p:txBody>
+          <a:bodyPr wrap="square" lIns="0" tIns="0" rIns="0" bIns="0" rtlCol="0" anchor="ctr"/>
+          <a:lstStyle/>
+          <a:p>
+            <a:pPr algn="ctr" indent="0" marL="0">
+              <a:buNone/>
+            </a:pPr>
+            <a:r>
+              <a:rPr lang="en-US" sz="1300" b="1" dirty="0">
+                <a:solidFill>
+                  <a:srgbClr val="FFFFFF"/>
+                </a:solidFill>
+                <a:latin typeface="Calibri" pitchFamily="34" charset="0"/>
+                <a:ea typeface="Calibri" pitchFamily="34" charset="-122"/>
+                <a:cs typeface="Calibri" pitchFamily="34" charset="-120"/>
+              </a:rPr>
+              <a:t>8</a:t>
+            </a:r>
+            <a:endParaRPr lang="en-US" sz="1300" dirty="0"/>
+          </a:p>
+        </p:txBody>
+      </p:sp>
+      <p:sp>
+        <p:nvSpPr>
+          <p:cNvPr id="33" name="Text 31"/>
+          <p:cNvSpPr txBox="1"/>
+          <p:nvPr/>
+        </p:nvSpPr>
+        <p:spPr>
+          <a:xfrm>
+            <a:off x="1261872" y="5696712"/>
+            <a:ext cx="9966960" cy="292608"/>
+          </a:xfrm>
+          <a:prstGeom prst="rect">
+            <a:avLst/>
+          </a:prstGeom>
+          <a:noFill/>
+          <a:ln/>
+        </p:spPr>
+        <p:txBody>
+          <a:bodyPr wrap="square" lIns="0" tIns="0" rIns="0" bIns="0" rtlCol="0" anchor="ctr"/>
+          <a:lstStyle/>
+          <a:p>
+            <a:pPr indent="0" marL="0">
+              <a:buNone/>
+            </a:pPr>
+            <a:r>
+              <a:rPr lang="en-US" sz="1400" b="1" dirty="0">
+                <a:solidFill>
+                  <a:srgbClr val="16213E"/>
+                </a:solidFill>
+                <a:latin typeface="Calibri" pitchFamily="34" charset="0"/>
+                <a:ea typeface="Calibri" pitchFamily="34" charset="-122"/>
+                <a:cs typeface="Calibri" pitchFamily="34" charset="-120"/>
+              </a:rPr>
+              <a:t>用語集・誤答パターン・まとめ</a:t>
+            </a:r>
+            <a:endParaRPr lang="en-US" sz="1400" dirty="0"/>
+          </a:p>
+        </p:txBody>
+      </p:sp>
+      <p:sp>
+        <p:nvSpPr>
+          <p:cNvPr id="34" name="Text 32"/>
+          <p:cNvSpPr txBox="1"/>
+          <p:nvPr/>
+        </p:nvSpPr>
+        <p:spPr>
+          <a:xfrm>
+            <a:off x="1261872" y="5971032"/>
+            <a:ext cx="9966960" cy="292608"/>
+          </a:xfrm>
+          <a:prstGeom prst="rect">
+            <a:avLst/>
+          </a:prstGeom>
+          <a:noFill/>
+          <a:ln/>
+        </p:spPr>
+        <p:txBody>
+          <a:bodyPr wrap="square" lIns="0" tIns="0" rIns="0" bIns="0" rtlCol="0" anchor="ctr"/>
+          <a:lstStyle/>
+          <a:p>
+            <a:pPr indent="0" marL="0">
+              <a:buNone/>
+            </a:pPr>
+            <a:r>
+              <a:rPr lang="en-US" sz="1050" dirty="0">
+                <a:solidFill>
+                  <a:srgbClr val="5B6B8C"/>
+                </a:solidFill>
+                <a:latin typeface="Calibri" pitchFamily="34" charset="0"/>
+                <a:ea typeface="Calibri" pitchFamily="34" charset="-122"/>
+                <a:cs typeface="Calibri" pitchFamily="34" charset="-120"/>
+              </a:rPr>
+              <a:t>頻出の引っかけ選択肢</a:t>
+            </a:r>
+            <a:endParaRPr lang="en-US" sz="1050" dirty="0"/>
+          </a:p>
+        </p:txBody>
+      </p:sp>
+      <p:sp>
+        <p:nvSpPr>
+          <p:cNvPr id="35" name="Text 33"/>
+          <p:cNvSpPr txBox="1"/>
+          <p:nvPr/>
+        </p:nvSpPr>
+        <p:spPr>
+          <a:xfrm>
+            <a:off x="548640" y="6355080"/>
+            <a:ext cx="11064240" cy="320040"/>
+          </a:xfrm>
+          <a:prstGeom prst="rect">
+            <a:avLst/>
+          </a:prstGeom>
+          <a:noFill/>
+          <a:ln/>
+        </p:spPr>
+        <p:txBody>
+          <a:bodyPr wrap="square" lIns="0" tIns="0" rIns="0" bIns="0" rtlCol="0" anchor="ctr"/>
+          <a:lstStyle/>
+          <a:p>
+            <a:pPr indent="0" marL="0">
+              <a:buNone/>
+            </a:pPr>
+            <a:r>
+              <a:rPr lang="en-US" sz="1000" i="1" dirty="0">
+                <a:solidFill>
+                  <a:srgbClr val="E0A526"/>
+                </a:solidFill>
+                <a:latin typeface="Calibri" pitchFamily="34" charset="0"/>
+                <a:ea typeface="Calibri" pitchFamily="34" charset="-122"/>
+                <a:cs typeface="Calibri" pitchFamily="34" charset="-120"/>
+              </a:rPr>
+              <a:t>⚠ 2026年12月7日より試験内容が更新予定(本資料はVersion 1.0/2026年7月発効に基づく)</a:t>
+            </a:r>
+            <a:endParaRPr lang="en-US" sz="1000" dirty="0"/>
+          </a:p>
+        </p:txBody>
+      </p:sp>
+      <p:sp>
+        <p:nvSpPr>
+          <p:cNvPr id="36" name="Text 34"/>
+          <p:cNvSpPr txBox="1"/>
+          <p:nvPr/>
+        </p:nvSpPr>
+        <p:spPr>
+          <a:xfrm>
+            <a:off x="11521440" y="6492240"/>
+            <a:ext cx="457200" cy="274320"/>
+          </a:xfrm>
+          <a:prstGeom prst="rect">
+            <a:avLst/>
+          </a:prstGeom>
+          <a:noFill/>
+          <a:ln/>
+        </p:spPr>
+        <p:txBody>
+          <a:bodyPr wrap="square" lIns="0" tIns="0" rIns="0" bIns="0" rtlCol="0" anchor="ctr"/>
+          <a:lstStyle/>
+          <a:p>
+            <a:pPr algn="r" indent="0" marL="0">
+              <a:buNone/>
+            </a:pPr>
+            <a:r>
+              <a:rPr lang="en-US" sz="1000" dirty="0">
+                <a:solidFill>
+                  <a:srgbClr val="5B6B8C"/>
+                </a:solidFill>
+                <a:latin typeface="Calibri" pitchFamily="34" charset="0"/>
+                <a:ea typeface="Calibri" pitchFamily="34" charset="-122"/>
+                <a:cs typeface="Calibri" pitchFamily="34" charset="-120"/>
+              </a:rPr>
+              <a:t>2</a:t>
+            </a:r>
+            <a:endParaRPr lang="en-US" sz="1000" dirty="0"/>
+          </a:p>
+        </p:txBody>
+      </p:sp>
+    </p:spTree>
+  </p:cSld>
+  <p:clrMapOvr>
+    <a:masterClrMapping/>
+  </p:clrMapOvr>
+</p:sld>
+</file>
+
+<file path=ppt/slides/slide20.xml><?xml version="1.0" encoding="utf-8"?>
+<p:sld xmlns:a="http://schemas.openxmlformats.org/drawingml/2006/main" xmlns:r="http://schemas.openxmlformats.org/officeDocument/2006/relationships" xmlns:p="http://schemas.openxmlformats.org/presentationml/2006/main">
+  <p:cSld name="Slide 20">
+    <p:bg>
+      <p:bgPr>
+        <a:solidFill>
+          <a:srgbClr val="FFFFFF"/>
+        </a:solidFill>
+      </p:bgPr>
+    </p:bg>
+    <p:spTree>
+      <p:nvGrpSpPr>
+        <p:cNvPr id="1" name=""/>
+        <p:cNvGrpSpPr/>
+        <p:nvPr/>
+      </p:nvGrpSpPr>
+      <p:grpSpPr>
+        <a:xfrm>
+          <a:off x="0" y="0"/>
+          <a:ext cx="0" cy="0"/>
+          <a:chOff x="0" y="0"/>
+          <a:chExt cx="0" cy="0"/>
+        </a:xfrm>
+      </p:grpSpPr>
+      <p:sp>
+        <p:nvSpPr>
+          <p:cNvPr id="2" name="Text 0"/>
+          <p:cNvSpPr txBox="1"/>
+          <p:nvPr/>
+        </p:nvSpPr>
+        <p:spPr>
+          <a:xfrm>
+            <a:off x="548640" y="411480"/>
+            <a:ext cx="731520" cy="685800"/>
+          </a:xfrm>
+          <a:prstGeom prst="rect">
+            <a:avLst/>
+          </a:prstGeom>
+          <a:noFill/>
+          <a:ln/>
+        </p:spPr>
+        <p:txBody>
+          <a:bodyPr wrap="square" lIns="0" tIns="0" rIns="0" bIns="0" rtlCol="0" anchor="ctr"/>
+          <a:lstStyle/>
+          <a:p>
+            <a:pPr indent="0" marL="0">
+              <a:buNone/>
+            </a:pPr>
+            <a:r>
+              <a:rPr lang="en-US" sz="2400" b="1" dirty="0">
+                <a:solidFill>
+                  <a:srgbClr val="3E64FF"/>
+                </a:solidFill>
+                <a:latin typeface="Cambria" pitchFamily="34" charset="0"/>
+                <a:ea typeface="Cambria" pitchFamily="34" charset="-122"/>
+                <a:cs typeface="Cambria" pitchFamily="34" charset="-120"/>
+              </a:rPr>
+              <a:t>6</a:t>
+            </a:r>
+            <a:endParaRPr lang="en-US" sz="2400" dirty="0"/>
+          </a:p>
+        </p:txBody>
+      </p:sp>
+      <p:sp>
+        <p:nvSpPr>
+          <p:cNvPr id="3" name="Text 1"/>
+          <p:cNvSpPr txBox="1"/>
+          <p:nvPr/>
+        </p:nvSpPr>
+        <p:spPr>
+          <a:xfrm>
+            <a:off x="1234440" y="457200"/>
+            <a:ext cx="10332720" cy="594360"/>
+          </a:xfrm>
+          <a:prstGeom prst="rect">
+            <a:avLst/>
+          </a:prstGeom>
+          <a:noFill/>
+          <a:ln/>
+        </p:spPr>
+        <p:txBody>
+          <a:bodyPr wrap="square" lIns="0" tIns="0" rIns="0" bIns="0" rtlCol="0" anchor="ctr"/>
+          <a:lstStyle/>
+          <a:p>
+            <a:pPr indent="0" marL="0">
+              <a:buNone/>
+            </a:pPr>
+            <a:r>
+              <a:rPr lang="en-US" sz="2200" b="1" dirty="0">
+                <a:solidFill>
+                  <a:srgbClr val="16213E"/>
+                </a:solidFill>
+                <a:latin typeface="Cambria" pitchFamily="34" charset="0"/>
+                <a:ea typeface="Cambria" pitchFamily="34" charset="-122"/>
+                <a:cs typeface="Cambria" pitchFamily="34" charset="-120"/>
+              </a:rPr>
+              <a:t>試験ポリシー(2/2): 再受験・資格維持</a:t>
+            </a:r>
+            <a:endParaRPr lang="en-US" sz="2200" dirty="0"/>
+          </a:p>
+        </p:txBody>
+      </p:sp>
+      <p:sp>
+        <p:nvSpPr>
+          <p:cNvPr id="4" name="Text 2"/>
+          <p:cNvSpPr txBox="1"/>
+          <p:nvPr/>
+        </p:nvSpPr>
+        <p:spPr>
+          <a:xfrm>
+            <a:off x="548640" y="1371600"/>
+            <a:ext cx="5303520" cy="320040"/>
+          </a:xfrm>
+          <a:prstGeom prst="rect">
+            <a:avLst/>
+          </a:prstGeom>
+          <a:noFill/>
+          <a:ln/>
+        </p:spPr>
+        <p:txBody>
+          <a:bodyPr wrap="square" lIns="0" tIns="0" rIns="0" bIns="0" rtlCol="0" anchor="ctr"/>
+          <a:lstStyle/>
+          <a:p>
+            <a:pPr indent="0" marL="0">
+              <a:buNone/>
+            </a:pPr>
+            <a:r>
+              <a:rPr lang="en-US" sz="1350" b="1" dirty="0">
+                <a:solidFill>
+                  <a:srgbClr val="3E64FF"/>
+                </a:solidFill>
+                <a:latin typeface="Calibri" pitchFamily="34" charset="0"/>
+                <a:ea typeface="Calibri" pitchFamily="34" charset="-122"/>
+                <a:cs typeface="Calibri" pitchFamily="34" charset="-120"/>
+              </a:rPr>
+              <a:t>再受験ポリシー</a:t>
+            </a:r>
+            <a:endParaRPr lang="en-US" sz="1350" dirty="0"/>
+          </a:p>
+        </p:txBody>
+      </p:sp>
+      <p:sp>
+        <p:nvSpPr>
+          <p:cNvPr id="5" name="Shape 3"/>
+          <p:cNvSpPr/>
+          <p:nvPr/>
+        </p:nvSpPr>
+        <p:spPr>
+          <a:xfrm>
+            <a:off x="548640" y="1737360"/>
+            <a:ext cx="1691640" cy="960120"/>
+          </a:xfrm>
+          <a:prstGeom prst="roundRect">
+            <a:avLst>
+              <a:gd name="adj" fmla="val 7619"/>
+            </a:avLst>
+          </a:prstGeom>
+          <a:solidFill>
+            <a:srgbClr val="FFFFFF"/>
+          </a:solidFill>
+          <a:ln w="12700">
+            <a:solidFill>
+              <a:srgbClr val="E1E6F0"/>
+            </a:solidFill>
+            <a:prstDash val="solid"/>
+          </a:ln>
+          <a:effectLst>
+            <a:outerShdw sx="100000" sy="100000" kx="0" ky="0" algn="bl" rotWithShape="0" blurRad="63500" dist="25400" dir="5400000">
+              <a:srgbClr val="000000">
+                <a:alpha val="8000"/>
+              </a:srgbClr>
+            </a:outerShdw>
+          </a:effectLst>
+        </p:spPr>
+      </p:sp>
+      <p:sp>
+        <p:nvSpPr>
+          <p:cNvPr id="6" name="Text 4"/>
+          <p:cNvSpPr txBox="1"/>
+          <p:nvPr/>
+        </p:nvSpPr>
+        <p:spPr>
+          <a:xfrm>
+            <a:off x="548640" y="1828800"/>
+            <a:ext cx="1691640" cy="457200"/>
+          </a:xfrm>
+          <a:prstGeom prst="rect">
+            <a:avLst/>
+          </a:prstGeom>
+          <a:noFill/>
+          <a:ln/>
+        </p:spPr>
+        <p:txBody>
+          <a:bodyPr wrap="square" lIns="0" tIns="0" rIns="0" bIns="0" rtlCol="0" anchor="ctr"/>
+          <a:lstStyle/>
+          <a:p>
+            <a:pPr algn="ctr" indent="0" marL="0">
+              <a:buNone/>
+            </a:pPr>
+            <a:r>
+              <a:rPr lang="en-US" sz="1700" b="1" dirty="0">
+                <a:solidFill>
+                  <a:srgbClr val="3E64FF"/>
+                </a:solidFill>
+                <a:latin typeface="Calibri" pitchFamily="34" charset="0"/>
+                <a:ea typeface="Calibri" pitchFamily="34" charset="-122"/>
+                <a:cs typeface="Calibri" pitchFamily="34" charset="-120"/>
+              </a:rPr>
+              <a:t>14日</a:t>
+            </a:r>
+            <a:endParaRPr lang="en-US" sz="1700" dirty="0"/>
+          </a:p>
+        </p:txBody>
+      </p:sp>
+      <p:sp>
+        <p:nvSpPr>
+          <p:cNvPr id="7" name="Text 5"/>
+          <p:cNvSpPr txBox="1"/>
+          <p:nvPr/>
+        </p:nvSpPr>
+        <p:spPr>
+          <a:xfrm>
+            <a:off x="548640" y="2286000"/>
+            <a:ext cx="1691640" cy="365760"/>
+          </a:xfrm>
+          <a:prstGeom prst="rect">
+            <a:avLst/>
+          </a:prstGeom>
+          <a:noFill/>
+          <a:ln/>
+        </p:spPr>
+        <p:txBody>
+          <a:bodyPr wrap="square" lIns="0" tIns="0" rIns="0" bIns="0" rtlCol="0" anchor="ctr"/>
+          <a:lstStyle/>
+          <a:p>
+            <a:pPr algn="ctr" indent="0" marL="0">
+              <a:buNone/>
+            </a:pPr>
+            <a:r>
+              <a:rPr lang="en-US" sz="900" dirty="0">
+                <a:solidFill>
+                  <a:srgbClr val="5B6B8C"/>
+                </a:solidFill>
+                <a:latin typeface="Calibri" pitchFamily="34" charset="0"/>
+                <a:ea typeface="Calibri" pitchFamily="34" charset="-122"/>
+                <a:cs typeface="Calibri" pitchFamily="34" charset="-120"/>
+              </a:rPr>
+              <a:t>1回目不合格後</a:t>
+            </a:r>
+            <a:endParaRPr lang="en-US" sz="900" dirty="0"/>
+          </a:p>
+        </p:txBody>
+      </p:sp>
+      <p:sp>
+        <p:nvSpPr>
+          <p:cNvPr id="8" name="Shape 6"/>
+          <p:cNvSpPr/>
+          <p:nvPr/>
+        </p:nvSpPr>
+        <p:spPr>
+          <a:xfrm>
+            <a:off x="2377440" y="1737360"/>
+            <a:ext cx="1691640" cy="960120"/>
+          </a:xfrm>
+          <a:prstGeom prst="roundRect">
+            <a:avLst>
+              <a:gd name="adj" fmla="val 7619"/>
+            </a:avLst>
+          </a:prstGeom>
+          <a:solidFill>
+            <a:srgbClr val="FFFFFF"/>
+          </a:solidFill>
+          <a:ln w="12700">
+            <a:solidFill>
+              <a:srgbClr val="E1E6F0"/>
+            </a:solidFill>
+            <a:prstDash val="solid"/>
+          </a:ln>
+          <a:effectLst>
+            <a:outerShdw sx="100000" sy="100000" kx="0" ky="0" algn="bl" rotWithShape="0" blurRad="63500" dist="25400" dir="5400000">
+              <a:srgbClr val="000000">
+                <a:alpha val="8000"/>
+              </a:srgbClr>
+            </a:outerShdw>
+          </a:effectLst>
+        </p:spPr>
+      </p:sp>
+      <p:sp>
+        <p:nvSpPr>
+          <p:cNvPr id="9" name="Text 7"/>
+          <p:cNvSpPr txBox="1"/>
+          <p:nvPr/>
+        </p:nvSpPr>
+        <p:spPr>
+          <a:xfrm>
+            <a:off x="2377440" y="1828800"/>
+            <a:ext cx="1691640" cy="457200"/>
+          </a:xfrm>
+          <a:prstGeom prst="rect">
+            <a:avLst/>
+          </a:prstGeom>
+          <a:noFill/>
+          <a:ln/>
+        </p:spPr>
+        <p:txBody>
+          <a:bodyPr wrap="square" lIns="0" tIns="0" rIns="0" bIns="0" rtlCol="0" anchor="ctr"/>
+          <a:lstStyle/>
+          <a:p>
+            <a:pPr algn="ctr" indent="0" marL="0">
+              <a:buNone/>
+            </a:pPr>
+            <a:r>
+              <a:rPr lang="en-US" sz="1700" b="1" dirty="0">
+                <a:solidFill>
+                  <a:srgbClr val="3E64FF"/>
+                </a:solidFill>
+                <a:latin typeface="Calibri" pitchFamily="34" charset="0"/>
+                <a:ea typeface="Calibri" pitchFamily="34" charset="-122"/>
+                <a:cs typeface="Calibri" pitchFamily="34" charset="-120"/>
+              </a:rPr>
+              <a:t>30日</a:t>
+            </a:r>
+            <a:endParaRPr lang="en-US" sz="1700" dirty="0"/>
+          </a:p>
+        </p:txBody>
+      </p:sp>
+      <p:sp>
+        <p:nvSpPr>
+          <p:cNvPr id="10" name="Text 8"/>
+          <p:cNvSpPr txBox="1"/>
+          <p:nvPr/>
+        </p:nvSpPr>
+        <p:spPr>
+          <a:xfrm>
+            <a:off x="2377440" y="2286000"/>
+            <a:ext cx="1691640" cy="365760"/>
+          </a:xfrm>
+          <a:prstGeom prst="rect">
+            <a:avLst/>
+          </a:prstGeom>
+          <a:noFill/>
+          <a:ln/>
+        </p:spPr>
+        <p:txBody>
+          <a:bodyPr wrap="square" lIns="0" tIns="0" rIns="0" bIns="0" rtlCol="0" anchor="ctr"/>
+          <a:lstStyle/>
+          <a:p>
+            <a:pPr algn="ctr" indent="0" marL="0">
+              <a:buNone/>
+            </a:pPr>
+            <a:r>
+              <a:rPr lang="en-US" sz="900" dirty="0">
+                <a:solidFill>
+                  <a:srgbClr val="5B6B8C"/>
+                </a:solidFill>
+                <a:latin typeface="Calibri" pitchFamily="34" charset="0"/>
+                <a:ea typeface="Calibri" pitchFamily="34" charset="-122"/>
+                <a:cs typeface="Calibri" pitchFamily="34" charset="-120"/>
+              </a:rPr>
+              <a:t>2回目不合格後</a:t>
+            </a:r>
+            <a:endParaRPr lang="en-US" sz="900" dirty="0"/>
+          </a:p>
+        </p:txBody>
+      </p:sp>
+      <p:sp>
+        <p:nvSpPr>
+          <p:cNvPr id="11" name="Shape 9"/>
+          <p:cNvSpPr/>
+          <p:nvPr/>
+        </p:nvSpPr>
+        <p:spPr>
+          <a:xfrm>
+            <a:off x="4206240" y="1737360"/>
+            <a:ext cx="1691640" cy="960120"/>
+          </a:xfrm>
+          <a:prstGeom prst="roundRect">
+            <a:avLst>
+              <a:gd name="adj" fmla="val 7619"/>
+            </a:avLst>
+          </a:prstGeom>
+          <a:solidFill>
+            <a:srgbClr val="FFFFFF"/>
+          </a:solidFill>
+          <a:ln w="12700">
+            <a:solidFill>
+              <a:srgbClr val="E1E6F0"/>
+            </a:solidFill>
+            <a:prstDash val="solid"/>
+          </a:ln>
+          <a:effectLst>
+            <a:outerShdw sx="100000" sy="100000" kx="0" ky="0" algn="bl" rotWithShape="0" blurRad="63500" dist="25400" dir="5400000">
+              <a:srgbClr val="000000">
+                <a:alpha val="8000"/>
+              </a:srgbClr>
+            </a:outerShdw>
+          </a:effectLst>
+        </p:spPr>
+      </p:sp>
+      <p:sp>
+        <p:nvSpPr>
+          <p:cNvPr id="12" name="Text 10"/>
+          <p:cNvSpPr txBox="1"/>
+          <p:nvPr/>
+        </p:nvSpPr>
+        <p:spPr>
+          <a:xfrm>
+            <a:off x="4206240" y="1828800"/>
+            <a:ext cx="1691640" cy="457200"/>
+          </a:xfrm>
+          <a:prstGeom prst="rect">
+            <a:avLst/>
+          </a:prstGeom>
+          <a:noFill/>
+          <a:ln/>
+        </p:spPr>
+        <p:txBody>
+          <a:bodyPr wrap="square" lIns="0" tIns="0" rIns="0" bIns="0" rtlCol="0" anchor="ctr"/>
+          <a:lstStyle/>
+          <a:p>
+            <a:pPr algn="ctr" indent="0" marL="0">
+              <a:buNone/>
+            </a:pPr>
+            <a:r>
+              <a:rPr lang="en-US" sz="1700" b="1" dirty="0">
+                <a:solidFill>
+                  <a:srgbClr val="3E64FF"/>
+                </a:solidFill>
+                <a:latin typeface="Calibri" pitchFamily="34" charset="0"/>
+                <a:ea typeface="Calibri" pitchFamily="34" charset="-122"/>
+                <a:cs typeface="Calibri" pitchFamily="34" charset="-120"/>
+              </a:rPr>
+              <a:t>90日</a:t>
+            </a:r>
+            <a:endParaRPr lang="en-US" sz="1700" dirty="0"/>
+          </a:p>
+        </p:txBody>
+      </p:sp>
+      <p:sp>
+        <p:nvSpPr>
+          <p:cNvPr id="13" name="Text 11"/>
+          <p:cNvSpPr txBox="1"/>
+          <p:nvPr/>
+        </p:nvSpPr>
+        <p:spPr>
+          <a:xfrm>
+            <a:off x="4206240" y="2286000"/>
+            <a:ext cx="1691640" cy="365760"/>
+          </a:xfrm>
+          <a:prstGeom prst="rect">
+            <a:avLst/>
+          </a:prstGeom>
+          <a:noFill/>
+          <a:ln/>
+        </p:spPr>
+        <p:txBody>
+          <a:bodyPr wrap="square" lIns="0" tIns="0" rIns="0" bIns="0" rtlCol="0" anchor="ctr"/>
+          <a:lstStyle/>
+          <a:p>
+            <a:pPr algn="ctr" indent="0" marL="0">
+              <a:buNone/>
+            </a:pPr>
+            <a:r>
+              <a:rPr lang="en-US" sz="900" dirty="0">
+                <a:solidFill>
+                  <a:srgbClr val="5B6B8C"/>
+                </a:solidFill>
+                <a:latin typeface="Calibri" pitchFamily="34" charset="0"/>
+                <a:ea typeface="Calibri" pitchFamily="34" charset="-122"/>
+                <a:cs typeface="Calibri" pitchFamily="34" charset="-120"/>
+              </a:rPr>
+              <a:t>3回目不合格後</a:t>
+            </a:r>
+            <a:endParaRPr lang="en-US" sz="900" dirty="0"/>
+          </a:p>
+        </p:txBody>
+      </p:sp>
+      <p:sp>
+        <p:nvSpPr>
+          <p:cNvPr id="14" name="Text 12"/>
+          <p:cNvSpPr txBox="1"/>
+          <p:nvPr/>
+        </p:nvSpPr>
+        <p:spPr>
+          <a:xfrm>
+            <a:off x="548640" y="2880360"/>
+            <a:ext cx="5303520" cy="731520"/>
+          </a:xfrm>
+          <a:prstGeom prst="rect">
+            <a:avLst/>
+          </a:prstGeom>
+          <a:noFill/>
+          <a:ln/>
+        </p:spPr>
+        <p:txBody>
+          <a:bodyPr wrap="square" lIns="0" tIns="0" rIns="0" bIns="0" rtlCol="0" anchor="ctr"/>
+          <a:lstStyle/>
+          <a:p>
+            <a:pPr indent="0" marL="0">
+              <a:buNone/>
+            </a:pPr>
+            <a:r>
+              <a:rPr lang="en-US" sz="1050" dirty="0">
+                <a:solidFill>
+                  <a:srgbClr val="16213E"/>
+                </a:solidFill>
+                <a:latin typeface="Calibri" pitchFamily="34" charset="0"/>
+                <a:ea typeface="Calibri" pitchFamily="34" charset="-122"/>
+                <a:cs typeface="Calibri" pitchFamily="34" charset="-120"/>
+              </a:rPr>
+              <a:t>任意の連続する12ヶ月以内に最大4回まで受験可能(上限は試験ごとに適用)。受験料は毎回必要</a:t>
+            </a:r>
+            <a:endParaRPr lang="en-US" sz="1050" dirty="0"/>
+          </a:p>
+        </p:txBody>
+      </p:sp>
+      <p:sp>
+        <p:nvSpPr>
+          <p:cNvPr id="15" name="Text 13"/>
+          <p:cNvSpPr txBox="1"/>
+          <p:nvPr/>
+        </p:nvSpPr>
+        <p:spPr>
+          <a:xfrm>
+            <a:off x="6126480" y="1371600"/>
+            <a:ext cx="5303520" cy="320040"/>
+          </a:xfrm>
+          <a:prstGeom prst="rect">
+            <a:avLst/>
+          </a:prstGeom>
+          <a:noFill/>
+          <a:ln/>
+        </p:spPr>
+        <p:txBody>
+          <a:bodyPr wrap="square" lIns="0" tIns="0" rIns="0" bIns="0" rtlCol="0" anchor="ctr"/>
+          <a:lstStyle/>
+          <a:p>
+            <a:pPr indent="0" marL="0">
+              <a:buNone/>
+            </a:pPr>
+            <a:r>
+              <a:rPr lang="en-US" sz="1350" b="1" dirty="0">
+                <a:solidFill>
+                  <a:srgbClr val="3E64FF"/>
+                </a:solidFill>
+                <a:latin typeface="Calibri" pitchFamily="34" charset="0"/>
+                <a:ea typeface="Calibri" pitchFamily="34" charset="-122"/>
+                <a:cs typeface="Calibri" pitchFamily="34" charset="-120"/>
+              </a:rPr>
+              <a:t>資格の維持と再認定</a:t>
+            </a:r>
+            <a:endParaRPr lang="en-US" sz="1350" dirty="0"/>
+          </a:p>
+        </p:txBody>
+      </p:sp>
+      <p:sp>
+        <p:nvSpPr>
+          <p:cNvPr id="16" name="Shape 14"/>
+          <p:cNvSpPr/>
+          <p:nvPr/>
+        </p:nvSpPr>
+        <p:spPr>
+          <a:xfrm>
+            <a:off x="6126480" y="1737360"/>
+            <a:ext cx="5303520" cy="1874520"/>
+          </a:xfrm>
+          <a:prstGeom prst="roundRect">
+            <a:avLst>
+              <a:gd name="adj" fmla="val 3902"/>
+            </a:avLst>
+          </a:prstGeom>
+          <a:solidFill>
+            <a:srgbClr val="F5F7FB"/>
+          </a:solidFill>
+          <a:ln w="12700">
+            <a:solidFill>
+              <a:srgbClr val="E1E6F0"/>
+            </a:solidFill>
+            <a:prstDash val="solid"/>
+          </a:ln>
+        </p:spPr>
+      </p:sp>
+      <p:sp>
+        <p:nvSpPr>
+          <p:cNvPr id="17" name="Text 15"/>
+          <p:cNvSpPr txBox="1"/>
+          <p:nvPr/>
+        </p:nvSpPr>
+        <p:spPr>
+          <a:xfrm>
+            <a:off x="6309360" y="1874520"/>
+            <a:ext cx="4937760" cy="1645920"/>
+          </a:xfrm>
+          <a:prstGeom prst="rect">
+            <a:avLst/>
+          </a:prstGeom>
+          <a:noFill/>
+          <a:ln/>
+        </p:spPr>
+        <p:txBody>
+          <a:bodyPr wrap="square" lIns="0" tIns="0" rIns="0" bIns="0" rtlCol="0" anchor="ctr"/>
+          <a:lstStyle/>
+          <a:p>
+            <a:pPr marL="342900" indent="-342900">
+              <a:spcAft>
+                <a:spcPts val="400"/>
+              </a:spcAft>
+              <a:buSzPct val="100000"/>
+              <a:buChar char="•"/>
+            </a:pPr>
+            <a:r>
+              <a:rPr lang="en-US" sz="1000" dirty="0">
+                <a:solidFill>
+                  <a:srgbClr val="16213E"/>
+                </a:solidFill>
+                <a:latin typeface="Calibri" pitchFamily="34" charset="0"/>
+                <a:ea typeface="Calibri" pitchFamily="34" charset="-122"/>
+                <a:cs typeface="Calibri" pitchFamily="34" charset="-120"/>
+              </a:rPr>
+              <a:t>有効期間: 認定日から12ヶ月</a:t>
+            </a:r>
+            <a:endParaRPr lang="en-US" sz="1000" dirty="0"/>
+          </a:p>
+          <a:p>
+            <a:pPr marL="342900" indent="-342900">
+              <a:spcAft>
+                <a:spcPts val="400"/>
+              </a:spcAft>
+              <a:buSzPct val="100000"/>
+              <a:buChar char="•"/>
+            </a:pPr>
+            <a:r>
+              <a:rPr lang="en-US" sz="1000" dirty="0">
+                <a:solidFill>
+                  <a:srgbClr val="16213E"/>
+                </a:solidFill>
+                <a:latin typeface="Calibri" pitchFamily="34" charset="0"/>
+                <a:ea typeface="Calibri" pitchFamily="34" charset="-122"/>
+                <a:cs typeface="Calibri" pitchFamily="34" charset="-120"/>
+              </a:rPr>
+              <a:t>期限内更新: Partner Academyでの無料・監督なしアセスメントで完了(費用なし)</a:t>
+            </a:r>
+            <a:endParaRPr lang="en-US" sz="1000" dirty="0"/>
+          </a:p>
+          <a:p>
+            <a:pPr marL="342900" indent="-342900">
+              <a:spcAft>
+                <a:spcPts val="400"/>
+              </a:spcAft>
+              <a:buSzPct val="100000"/>
+              <a:buChar char="•"/>
+            </a:pPr>
+            <a:r>
+              <a:rPr lang="en-US" sz="1000" dirty="0">
+                <a:solidFill>
+                  <a:srgbClr val="16213E"/>
+                </a:solidFill>
+                <a:latin typeface="Calibri" pitchFamily="34" charset="0"/>
+                <a:ea typeface="Calibri" pitchFamily="34" charset="-122"/>
+                <a:cs typeface="Calibri" pitchFamily="34" charset="-120"/>
+              </a:rPr>
+              <a:t>失効した場合: 正規の受験料でフル試験を再受験</a:t>
+            </a:r>
+            <a:endParaRPr lang="en-US" sz="1000" dirty="0"/>
+          </a:p>
+          <a:p>
+            <a:pPr marL="342900" indent="-342900">
+              <a:spcAft>
+                <a:spcPts val="400"/>
+              </a:spcAft>
+              <a:buSzPct val="100000"/>
+              <a:buChar char="•"/>
+            </a:pPr>
+            <a:r>
+              <a:rPr lang="en-US" sz="1000" dirty="0">
+                <a:solidFill>
+                  <a:srgbClr val="16213E"/>
+                </a:solidFill>
+                <a:latin typeface="Calibri" pitchFamily="34" charset="0"/>
+                <a:ea typeface="Calibri" pitchFamily="34" charset="-122"/>
+                <a:cs typeface="Calibri" pitchFamily="34" charset="-120"/>
+              </a:rPr>
+              <a:t>試験内容が大幅変更された場合、フル試験の再受験を求められることがある</a:t>
+            </a:r>
+            <a:endParaRPr lang="en-US" sz="1000" dirty="0"/>
+          </a:p>
+        </p:txBody>
+      </p:sp>
+      <p:sp>
+        <p:nvSpPr>
+          <p:cNvPr id="18" name="Text 16"/>
+          <p:cNvSpPr txBox="1"/>
+          <p:nvPr/>
+        </p:nvSpPr>
+        <p:spPr>
+          <a:xfrm>
+            <a:off x="548640" y="3840480"/>
+            <a:ext cx="10881360" cy="320040"/>
+          </a:xfrm>
+          <a:prstGeom prst="rect">
+            <a:avLst/>
+          </a:prstGeom>
+          <a:noFill/>
+          <a:ln/>
+        </p:spPr>
+        <p:txBody>
+          <a:bodyPr wrap="square" lIns="0" tIns="0" rIns="0" bIns="0" rtlCol="0" anchor="ctr"/>
+          <a:lstStyle/>
+          <a:p>
+            <a:pPr indent="0" marL="0">
+              <a:buNone/>
+            </a:pPr>
+            <a:r>
+              <a:rPr lang="en-US" sz="1350" b="1" dirty="0">
+                <a:solidFill>
+                  <a:srgbClr val="3E64FF"/>
+                </a:solidFill>
+                <a:latin typeface="Calibri" pitchFamily="34" charset="0"/>
+                <a:ea typeface="Calibri" pitchFamily="34" charset="-122"/>
+                <a:cs typeface="Calibri" pitchFamily="34" charset="-120"/>
+              </a:rPr>
+              <a:t>試験当日のルール(抜粋)</a:t>
+            </a:r>
+            <a:endParaRPr lang="en-US" sz="1350" dirty="0"/>
+          </a:p>
+        </p:txBody>
+      </p:sp>
+      <p:sp>
+        <p:nvSpPr>
+          <p:cNvPr id="19" name="Text 17"/>
+          <p:cNvSpPr txBox="1"/>
+          <p:nvPr/>
+        </p:nvSpPr>
+        <p:spPr>
+          <a:xfrm>
+            <a:off x="548640" y="4160520"/>
+            <a:ext cx="10881360" cy="1188720"/>
+          </a:xfrm>
+          <a:prstGeom prst="rect">
+            <a:avLst/>
+          </a:prstGeom>
+          <a:noFill/>
+          <a:ln/>
+        </p:spPr>
+        <p:txBody>
+          <a:bodyPr wrap="square" lIns="0" tIns="0" rIns="0" bIns="0" rtlCol="0" anchor="ctr"/>
+          <a:lstStyle/>
+          <a:p>
+            <a:pPr marL="342900" indent="-342900">
+              <a:spcAft>
+                <a:spcPts val="400"/>
+              </a:spcAft>
+              <a:buSzPct val="100000"/>
+              <a:buChar char="•"/>
+            </a:pPr>
+            <a:r>
+              <a:rPr lang="en-US" sz="1100" dirty="0">
+                <a:solidFill>
+                  <a:srgbClr val="16213E"/>
+                </a:solidFill>
+                <a:latin typeface="Calibri" pitchFamily="34" charset="0"/>
+                <a:ea typeface="Calibri" pitchFamily="34" charset="-122"/>
+                <a:cs typeface="Calibri" pitchFamily="34" charset="-120"/>
+              </a:rPr>
+              <a:t>オンライン受験: セッション中は常に試験監督者・ウェブカメラの視界内にとどまる</a:t>
+            </a:r>
+            <a:endParaRPr lang="en-US" sz="1100" dirty="0"/>
+          </a:p>
+          <a:p>
+            <a:pPr marL="342900" indent="-342900">
+              <a:spcAft>
+                <a:spcPts val="400"/>
+              </a:spcAft>
+              <a:buSzPct val="100000"/>
+              <a:buChar char="•"/>
+            </a:pPr>
+            <a:r>
+              <a:rPr lang="en-US" sz="1100" dirty="0">
+                <a:solidFill>
+                  <a:srgbClr val="16213E"/>
+                </a:solidFill>
+                <a:latin typeface="Calibri" pitchFamily="34" charset="0"/>
+                <a:ea typeface="Calibri" pitchFamily="34" charset="-122"/>
+                <a:cs typeface="Calibri" pitchFamily="34" charset="-120"/>
+              </a:rPr>
+              <a:t>持ち込み禁止: 携帯電話・スマートウォッチ・ヘッドホン・学習教材・録音録画機器</a:t>
+            </a:r>
+            <a:endParaRPr lang="en-US" sz="1100" dirty="0"/>
+          </a:p>
+          <a:p>
+            <a:pPr marL="342900" indent="-342900">
+              <a:spcAft>
+                <a:spcPts val="400"/>
+              </a:spcAft>
+              <a:buSzPct val="100000"/>
+              <a:buChar char="•"/>
+            </a:pPr>
+            <a:r>
+              <a:rPr lang="en-US" sz="1100" dirty="0">
+                <a:solidFill>
+                  <a:srgbClr val="16213E"/>
+                </a:solidFill>
+                <a:latin typeface="Calibri" pitchFamily="34" charset="0"/>
+                <a:ea typeface="Calibri" pitchFamily="34" charset="-122"/>
+                <a:cs typeface="Calibri" pitchFamily="34" charset="-120"/>
+              </a:rPr>
+              <a:t>不正行為(カンニング・内容の開示等)は、結果無効化・資格取消・今後の受験禁止につながる</a:t>
+            </a:r>
+            <a:endParaRPr lang="en-US" sz="1100" dirty="0"/>
+          </a:p>
+        </p:txBody>
+      </p:sp>
+      <p:sp>
+        <p:nvSpPr>
+          <p:cNvPr id="20" name="Text 18"/>
+          <p:cNvSpPr txBox="1"/>
+          <p:nvPr/>
+        </p:nvSpPr>
+        <p:spPr>
+          <a:xfrm>
+            <a:off x="548640" y="6400800"/>
+            <a:ext cx="11064240" cy="320040"/>
+          </a:xfrm>
+          <a:prstGeom prst="rect">
+            <a:avLst/>
+          </a:prstGeom>
+          <a:noFill/>
+          <a:ln/>
+        </p:spPr>
+        <p:txBody>
+          <a:bodyPr wrap="square" lIns="0" tIns="0" rIns="0" bIns="0" rtlCol="0" anchor="ctr"/>
+          <a:lstStyle/>
+          <a:p>
+            <a:pPr indent="0" marL="0">
+              <a:buNone/>
+            </a:pPr>
+            <a:r>
+              <a:rPr lang="en-US" sz="900" i="1" dirty="0">
+                <a:solidFill>
+                  <a:srgbClr val="5B6B8C"/>
+                </a:solidFill>
+                <a:latin typeface="Calibri" pitchFamily="34" charset="0"/>
+                <a:ea typeface="Calibri" pitchFamily="34" charset="-122"/>
+                <a:cs typeface="Calibri" pitchFamily="34" charset="-120"/>
+              </a:rPr>
+              <a:t>出典: Anthropic公式試験ガイド セクション11・12・14</a:t>
+            </a:r>
+            <a:endParaRPr lang="en-US" sz="900" dirty="0"/>
+          </a:p>
+        </p:txBody>
+      </p:sp>
+      <p:sp>
+        <p:nvSpPr>
+          <p:cNvPr id="21" name="Text 19"/>
+          <p:cNvSpPr txBox="1"/>
+          <p:nvPr/>
+        </p:nvSpPr>
+        <p:spPr>
+          <a:xfrm>
+            <a:off x="11521440" y="6492240"/>
+            <a:ext cx="457200" cy="274320"/>
+          </a:xfrm>
+          <a:prstGeom prst="rect">
+            <a:avLst/>
+          </a:prstGeom>
+          <a:noFill/>
+          <a:ln/>
+        </p:spPr>
+        <p:txBody>
+          <a:bodyPr wrap="square" lIns="0" tIns="0" rIns="0" bIns="0" rtlCol="0" anchor="ctr"/>
+          <a:lstStyle/>
+          <a:p>
+            <a:pPr algn="r" indent="0" marL="0">
+              <a:buNone/>
+            </a:pPr>
+            <a:r>
+              <a:rPr lang="en-US" sz="1000" dirty="0">
+                <a:solidFill>
+                  <a:srgbClr val="5B6B8C"/>
+                </a:solidFill>
+                <a:latin typeface="Calibri" pitchFamily="34" charset="0"/>
+                <a:ea typeface="Calibri" pitchFamily="34" charset="-122"/>
+                <a:cs typeface="Calibri" pitchFamily="34" charset="-120"/>
+              </a:rPr>
+              <a:t>20</a:t>
+            </a:r>
+            <a:endParaRPr lang="en-US" sz="1000" dirty="0"/>
+          </a:p>
+        </p:txBody>
+      </p:sp>
+    </p:spTree>
+  </p:cSld>
+  <p:clrMapOvr>
+    <a:masterClrMapping/>
+  </p:clrMapOvr>
+</p:sld>
+</file>
+
+<file path=ppt/slides/slide21.xml><?xml version="1.0" encoding="utf-8"?>
+<p:sld xmlns:a="http://schemas.openxmlformats.org/drawingml/2006/main" xmlns:r="http://schemas.openxmlformats.org/officeDocument/2006/relationships" xmlns:p="http://schemas.openxmlformats.org/presentationml/2006/main">
+  <p:cSld name="Slide 21">
+    <p:bg>
+      <p:bgPr>
+        <a:solidFill>
+          <a:srgbClr val="16213E"/>
+        </a:solidFill>
+      </p:bgPr>
+    </p:bg>
+    <p:spTree>
+      <p:nvGrpSpPr>
+        <p:cNvPr id="1" name=""/>
+        <p:cNvGrpSpPr/>
+        <p:nvPr/>
+      </p:nvGrpSpPr>
+      <p:grpSpPr>
+        <a:xfrm>
+          <a:off x="0" y="0"/>
+          <a:ext cx="0" cy="0"/>
+          <a:chOff x="0" y="0"/>
+          <a:chExt cx="0" cy="0"/>
+        </a:xfrm>
+      </p:grpSpPr>
+      <p:sp>
+        <p:nvSpPr>
+          <p:cNvPr id="2" name="Text 0"/>
+          <p:cNvSpPr txBox="1"/>
+          <p:nvPr/>
+        </p:nvSpPr>
+        <p:spPr>
+          <a:xfrm>
+            <a:off x="548640" y="411480"/>
+            <a:ext cx="731520" cy="685800"/>
+          </a:xfrm>
+          <a:prstGeom prst="rect">
+            <a:avLst/>
+          </a:prstGeom>
+          <a:noFill/>
+          <a:ln/>
+        </p:spPr>
+        <p:txBody>
+          <a:bodyPr wrap="square" lIns="0" tIns="0" rIns="0" bIns="0" rtlCol="0" anchor="ctr"/>
+          <a:lstStyle/>
+          <a:p>
+            <a:pPr indent="0" marL="0">
+              <a:buNone/>
+            </a:pPr>
+            <a:r>
+              <a:rPr lang="en-US" sz="2400" b="1" dirty="0">
+                <a:solidFill>
+                  <a:srgbClr val="3E64FF"/>
+                </a:solidFill>
+                <a:latin typeface="Cambria" pitchFamily="34" charset="0"/>
+                <a:ea typeface="Cambria" pitchFamily="34" charset="-122"/>
+                <a:cs typeface="Cambria" pitchFamily="34" charset="-120"/>
+              </a:rPr>
+              <a:t>7</a:t>
+            </a:r>
+            <a:endParaRPr lang="en-US" sz="2400" dirty="0"/>
+          </a:p>
+        </p:txBody>
+      </p:sp>
+      <p:sp>
+        <p:nvSpPr>
+          <p:cNvPr id="3" name="Text 1"/>
+          <p:cNvSpPr txBox="1"/>
+          <p:nvPr/>
+        </p:nvSpPr>
+        <p:spPr>
+          <a:xfrm>
+            <a:off x="1234440" y="457200"/>
+            <a:ext cx="10332720" cy="594360"/>
+          </a:xfrm>
+          <a:prstGeom prst="rect">
+            <a:avLst/>
+          </a:prstGeom>
+          <a:noFill/>
+          <a:ln/>
+        </p:spPr>
+        <p:txBody>
+          <a:bodyPr wrap="square" lIns="0" tIns="0" rIns="0" bIns="0" rtlCol="0" anchor="ctr"/>
+          <a:lstStyle/>
+          <a:p>
+            <a:pPr indent="0" marL="0">
+              <a:buNone/>
+            </a:pPr>
+            <a:r>
+              <a:rPr lang="en-US" sz="2200" b="1" dirty="0">
+                <a:solidFill>
+                  <a:srgbClr val="F2F4F8"/>
+                </a:solidFill>
+                <a:latin typeface="Cambria" pitchFamily="34" charset="0"/>
+                <a:ea typeface="Cambria" pitchFamily="34" charset="-122"/>
+                <a:cs typeface="Cambria" pitchFamily="34" charset="-120"/>
+              </a:rPr>
               <a:t>他のClaude認定資格との違い</a:t>
             </a:r>
             <a:endParaRPr lang="en-US" sz="2200" dirty="0"/>
@@ -7974,7 +10286,7 @@
       </p:sp>
       <p:graphicFrame>
         <p:nvGraphicFramePr>
-          <p:cNvPr id="20" name="Table 0"/>
+          <p:cNvPr id="22" name="Table 0"/>
           <p:cNvGraphicFramePr>
             <a:graphicFrameLocks noGrp="1"/>
           </p:cNvGraphicFramePr>
@@ -9826,7 +12138,7 @@
                 <a:ea typeface="Calibri" pitchFamily="34" charset="-122"/>
                 <a:cs typeface="Calibri" pitchFamily="34" charset="-120"/>
               </a:rPr>
-              <a:t>19</a:t>
+              <a:t>21</a:t>
             </a:r>
             <a:endParaRPr lang="en-US" sz="1000" dirty="0"/>
           </a:p>
@@ -9840,9 +12152,9 @@
 </p:sld>
 </file>
 
-<file path=ppt/slides/slide2.xml><?xml version="1.0" encoding="utf-8"?>
+<file path=ppt/slides/slide22.xml><?xml version="1.0" encoding="utf-8"?>
 <p:sld xmlns:a="http://schemas.openxmlformats.org/drawingml/2006/main" xmlns:r="http://schemas.openxmlformats.org/officeDocument/2006/relationships" xmlns:p="http://schemas.openxmlformats.org/presentationml/2006/main">
-  <p:cSld name="Slide 2">
+  <p:cSld name="Slide 22">
     <p:bg>
       <p:bgPr>
         <a:solidFill>
@@ -9872,1251 +12184,6 @@
         </p:nvSpPr>
         <p:spPr>
           <a:xfrm>
-            <a:off x="548640" y="365760"/>
-            <a:ext cx="5486400" cy="640080"/>
-          </a:xfrm>
-          <a:prstGeom prst="rect">
-            <a:avLst/>
-          </a:prstGeom>
-          <a:noFill/>
-          <a:ln/>
-        </p:spPr>
-        <p:txBody>
-          <a:bodyPr wrap="square" lIns="0" tIns="0" rIns="0" bIns="0" rtlCol="0" anchor="ctr"/>
-          <a:lstStyle/>
-          <a:p>
-            <a:pPr indent="0" marL="0">
-              <a:buNone/>
-            </a:pPr>
-            <a:r>
-              <a:rPr lang="en-US" sz="3000" b="1" dirty="0">
-                <a:solidFill>
-                  <a:srgbClr val="16213E"/>
-                </a:solidFill>
-                <a:latin typeface="Cambria" pitchFamily="34" charset="0"/>
-                <a:ea typeface="Cambria" pitchFamily="34" charset="-122"/>
-                <a:cs typeface="Cambria" pitchFamily="34" charset="-120"/>
-              </a:rPr>
-              <a:t>目次</a:t>
-            </a:r>
-            <a:endParaRPr lang="en-US" sz="3000" dirty="0"/>
-          </a:p>
-        </p:txBody>
-      </p:sp>
-      <p:sp>
-        <p:nvSpPr>
-          <p:cNvPr id="3" name="Shape 1"/>
-          <p:cNvSpPr/>
-          <p:nvPr/>
-        </p:nvSpPr>
-        <p:spPr>
-          <a:xfrm>
-            <a:off x="640080" y="1051560"/>
-            <a:ext cx="402336" cy="402336"/>
-          </a:xfrm>
-          <a:prstGeom prst="ellipse">
-            <a:avLst/>
-          </a:prstGeom>
-          <a:solidFill>
-            <a:srgbClr val="3E64FF"/>
-          </a:solidFill>
-          <a:ln/>
-        </p:spPr>
-      </p:sp>
-      <p:sp>
-        <p:nvSpPr>
-          <p:cNvPr id="4" name="Text 2"/>
-          <p:cNvSpPr txBox="1"/>
-          <p:nvPr/>
-        </p:nvSpPr>
-        <p:spPr>
-          <a:xfrm>
-            <a:off x="640080" y="1051560"/>
-            <a:ext cx="402336" cy="402336"/>
-          </a:xfrm>
-          <a:prstGeom prst="rect">
-            <a:avLst/>
-          </a:prstGeom>
-          <a:noFill/>
-          <a:ln/>
-        </p:spPr>
-        <p:txBody>
-          <a:bodyPr wrap="square" lIns="0" tIns="0" rIns="0" bIns="0" rtlCol="0" anchor="ctr"/>
-          <a:lstStyle/>
-          <a:p>
-            <a:pPr algn="ctr" indent="0" marL="0">
-              <a:buNone/>
-            </a:pPr>
-            <a:r>
-              <a:rPr lang="en-US" sz="1300" b="1" dirty="0">
-                <a:solidFill>
-                  <a:srgbClr val="FFFFFF"/>
-                </a:solidFill>
-                <a:latin typeface="Calibri" pitchFamily="34" charset="0"/>
-                <a:ea typeface="Calibri" pitchFamily="34" charset="-122"/>
-                <a:cs typeface="Calibri" pitchFamily="34" charset="-120"/>
-              </a:rPr>
-              <a:t>1</a:t>
-            </a:r>
-            <a:endParaRPr lang="en-US" sz="1300" dirty="0"/>
-          </a:p>
-        </p:txBody>
-      </p:sp>
-      <p:sp>
-        <p:nvSpPr>
-          <p:cNvPr id="5" name="Text 3"/>
-          <p:cNvSpPr txBox="1"/>
-          <p:nvPr/>
-        </p:nvSpPr>
-        <p:spPr>
-          <a:xfrm>
-            <a:off x="1261872" y="1024128"/>
-            <a:ext cx="9966960" cy="292608"/>
-          </a:xfrm>
-          <a:prstGeom prst="rect">
-            <a:avLst/>
-          </a:prstGeom>
-          <a:noFill/>
-          <a:ln/>
-        </p:spPr>
-        <p:txBody>
-          <a:bodyPr wrap="square" lIns="0" tIns="0" rIns="0" bIns="0" rtlCol="0" anchor="ctr"/>
-          <a:lstStyle/>
-          <a:p>
-            <a:pPr indent="0" marL="0">
-              <a:buNone/>
-            </a:pPr>
-            <a:r>
-              <a:rPr lang="en-US" sz="1400" b="1" dirty="0">
-                <a:solidFill>
-                  <a:srgbClr val="16213E"/>
-                </a:solidFill>
-                <a:latin typeface="Calibri" pitchFamily="34" charset="0"/>
-                <a:ea typeface="Calibri" pitchFamily="34" charset="-122"/>
-                <a:cs typeface="Calibri" pitchFamily="34" charset="-120"/>
-              </a:rPr>
-              <a:t>この資格について / 対象者 / MQC像</a:t>
-            </a:r>
-            <a:endParaRPr lang="en-US" sz="1400" dirty="0"/>
-          </a:p>
-        </p:txBody>
-      </p:sp>
-      <p:sp>
-        <p:nvSpPr>
-          <p:cNvPr id="6" name="Text 4"/>
-          <p:cNvSpPr txBox="1"/>
-          <p:nvPr/>
-        </p:nvSpPr>
-        <p:spPr>
-          <a:xfrm>
-            <a:off x="1261872" y="1298448"/>
-            <a:ext cx="9966960" cy="292608"/>
-          </a:xfrm>
-          <a:prstGeom prst="rect">
-            <a:avLst/>
-          </a:prstGeom>
-          <a:noFill/>
-          <a:ln/>
-        </p:spPr>
-        <p:txBody>
-          <a:bodyPr wrap="square" lIns="0" tIns="0" rIns="0" bIns="0" rtlCol="0" anchor="ctr"/>
-          <a:lstStyle/>
-          <a:p>
-            <a:pPr indent="0" marL="0">
-              <a:buNone/>
-            </a:pPr>
-            <a:r>
-              <a:rPr lang="en-US" sz="1050" dirty="0">
-                <a:solidFill>
-                  <a:srgbClr val="5B6B8C"/>
-                </a:solidFill>
-                <a:latin typeface="Calibri" pitchFamily="34" charset="0"/>
-                <a:ea typeface="Calibri" pitchFamily="34" charset="-122"/>
-                <a:cs typeface="Calibri" pitchFamily="34" charset="-120"/>
-              </a:rPr>
-              <a:t>誰のための資格か、何を証明するか</a:t>
-            </a:r>
-            <a:endParaRPr lang="en-US" sz="1050" dirty="0"/>
-          </a:p>
-        </p:txBody>
-      </p:sp>
-      <p:sp>
-        <p:nvSpPr>
-          <p:cNvPr id="7" name="Shape 5"/>
-          <p:cNvSpPr/>
-          <p:nvPr/>
-        </p:nvSpPr>
-        <p:spPr>
-          <a:xfrm>
-            <a:off x="640080" y="1719072"/>
-            <a:ext cx="402336" cy="402336"/>
-          </a:xfrm>
-          <a:prstGeom prst="ellipse">
-            <a:avLst/>
-          </a:prstGeom>
-          <a:solidFill>
-            <a:srgbClr val="3E64FF"/>
-          </a:solidFill>
-          <a:ln/>
-        </p:spPr>
-      </p:sp>
-      <p:sp>
-        <p:nvSpPr>
-          <p:cNvPr id="8" name="Text 6"/>
-          <p:cNvSpPr txBox="1"/>
-          <p:nvPr/>
-        </p:nvSpPr>
-        <p:spPr>
-          <a:xfrm>
-            <a:off x="640080" y="1719072"/>
-            <a:ext cx="402336" cy="402336"/>
-          </a:xfrm>
-          <a:prstGeom prst="rect">
-            <a:avLst/>
-          </a:prstGeom>
-          <a:noFill/>
-          <a:ln/>
-        </p:spPr>
-        <p:txBody>
-          <a:bodyPr wrap="square" lIns="0" tIns="0" rIns="0" bIns="0" rtlCol="0" anchor="ctr"/>
-          <a:lstStyle/>
-          <a:p>
-            <a:pPr algn="ctr" indent="0" marL="0">
-              <a:buNone/>
-            </a:pPr>
-            <a:r>
-              <a:rPr lang="en-US" sz="1300" b="1" dirty="0">
-                <a:solidFill>
-                  <a:srgbClr val="FFFFFF"/>
-                </a:solidFill>
-                <a:latin typeface="Calibri" pitchFamily="34" charset="0"/>
-                <a:ea typeface="Calibri" pitchFamily="34" charset="-122"/>
-                <a:cs typeface="Calibri" pitchFamily="34" charset="-120"/>
-              </a:rPr>
-              <a:t>2</a:t>
-            </a:r>
-            <a:endParaRPr lang="en-US" sz="1300" dirty="0"/>
-          </a:p>
-        </p:txBody>
-      </p:sp>
-      <p:sp>
-        <p:nvSpPr>
-          <p:cNvPr id="9" name="Text 7"/>
-          <p:cNvSpPr txBox="1"/>
-          <p:nvPr/>
-        </p:nvSpPr>
-        <p:spPr>
-          <a:xfrm>
-            <a:off x="1261872" y="1691640"/>
-            <a:ext cx="9966960" cy="292608"/>
-          </a:xfrm>
-          <a:prstGeom prst="rect">
-            <a:avLst/>
-          </a:prstGeom>
-          <a:noFill/>
-          <a:ln/>
-        </p:spPr>
-        <p:txBody>
-          <a:bodyPr wrap="square" lIns="0" tIns="0" rIns="0" bIns="0" rtlCol="0" anchor="ctr"/>
-          <a:lstStyle/>
-          <a:p>
-            <a:pPr indent="0" marL="0">
-              <a:buNone/>
-            </a:pPr>
-            <a:r>
-              <a:rPr lang="en-US" sz="1400" b="1" dirty="0">
-                <a:solidFill>
-                  <a:srgbClr val="16213E"/>
-                </a:solidFill>
-                <a:latin typeface="Calibri" pitchFamily="34" charset="0"/>
-                <a:ea typeface="Calibri" pitchFamily="34" charset="-122"/>
-                <a:cs typeface="Calibri" pitchFamily="34" charset="-120"/>
-              </a:rPr>
-              <a:t>試験の概要と出題7分野</a:t>
-            </a:r>
-            <a:endParaRPr lang="en-US" sz="1400" dirty="0"/>
-          </a:p>
-        </p:txBody>
-      </p:sp>
-      <p:sp>
-        <p:nvSpPr>
-          <p:cNvPr id="10" name="Text 8"/>
-          <p:cNvSpPr txBox="1"/>
-          <p:nvPr/>
-        </p:nvSpPr>
-        <p:spPr>
-          <a:xfrm>
-            <a:off x="1261872" y="1965960"/>
-            <a:ext cx="9966960" cy="292608"/>
-          </a:xfrm>
-          <a:prstGeom prst="rect">
-            <a:avLst/>
-          </a:prstGeom>
-          <a:noFill/>
-          <a:ln/>
-        </p:spPr>
-        <p:txBody>
-          <a:bodyPr wrap="square" lIns="0" tIns="0" rIns="0" bIns="0" rtlCol="0" anchor="ctr"/>
-          <a:lstStyle/>
-          <a:p>
-            <a:pPr indent="0" marL="0">
-              <a:buNone/>
-            </a:pPr>
-            <a:r>
-              <a:rPr lang="en-US" sz="1050" dirty="0">
-                <a:solidFill>
-                  <a:srgbClr val="5B6B8C"/>
-                </a:solidFill>
-                <a:latin typeface="Calibri" pitchFamily="34" charset="0"/>
-                <a:ea typeface="Calibri" pitchFamily="34" charset="-122"/>
-                <a:cs typeface="Calibri" pitchFamily="34" charset="-120"/>
-              </a:rPr>
-              <a:t>問題数・時間・合格点、配点比率</a:t>
-            </a:r>
-            <a:endParaRPr lang="en-US" sz="1050" dirty="0"/>
-          </a:p>
-        </p:txBody>
-      </p:sp>
-      <p:sp>
-        <p:nvSpPr>
-          <p:cNvPr id="11" name="Shape 9"/>
-          <p:cNvSpPr/>
-          <p:nvPr/>
-        </p:nvSpPr>
-        <p:spPr>
-          <a:xfrm>
-            <a:off x="640080" y="2386584"/>
-            <a:ext cx="402336" cy="402336"/>
-          </a:xfrm>
-          <a:prstGeom prst="ellipse">
-            <a:avLst/>
-          </a:prstGeom>
-          <a:solidFill>
-            <a:srgbClr val="3E64FF"/>
-          </a:solidFill>
-          <a:ln/>
-        </p:spPr>
-      </p:sp>
-      <p:sp>
-        <p:nvSpPr>
-          <p:cNvPr id="12" name="Text 10"/>
-          <p:cNvSpPr txBox="1"/>
-          <p:nvPr/>
-        </p:nvSpPr>
-        <p:spPr>
-          <a:xfrm>
-            <a:off x="640080" y="2386584"/>
-            <a:ext cx="402336" cy="402336"/>
-          </a:xfrm>
-          <a:prstGeom prst="rect">
-            <a:avLst/>
-          </a:prstGeom>
-          <a:noFill/>
-          <a:ln/>
-        </p:spPr>
-        <p:txBody>
-          <a:bodyPr wrap="square" lIns="0" tIns="0" rIns="0" bIns="0" rtlCol="0" anchor="ctr"/>
-          <a:lstStyle/>
-          <a:p>
-            <a:pPr algn="ctr" indent="0" marL="0">
-              <a:buNone/>
-            </a:pPr>
-            <a:r>
-              <a:rPr lang="en-US" sz="1300" b="1" dirty="0">
-                <a:solidFill>
-                  <a:srgbClr val="FFFFFF"/>
-                </a:solidFill>
-                <a:latin typeface="Calibri" pitchFamily="34" charset="0"/>
-                <a:ea typeface="Calibri" pitchFamily="34" charset="-122"/>
-                <a:cs typeface="Calibri" pitchFamily="34" charset="-120"/>
-              </a:rPr>
-              <a:t>3</a:t>
-            </a:r>
-            <a:endParaRPr lang="en-US" sz="1300" dirty="0"/>
-          </a:p>
-        </p:txBody>
-      </p:sp>
-      <p:sp>
-        <p:nvSpPr>
-          <p:cNvPr id="13" name="Text 11"/>
-          <p:cNvSpPr txBox="1"/>
-          <p:nvPr/>
-        </p:nvSpPr>
-        <p:spPr>
-          <a:xfrm>
-            <a:off x="1261872" y="2359152"/>
-            <a:ext cx="9966960" cy="292608"/>
-          </a:xfrm>
-          <a:prstGeom prst="rect">
-            <a:avLst/>
-          </a:prstGeom>
-          <a:noFill/>
-          <a:ln/>
-        </p:spPr>
-        <p:txBody>
-          <a:bodyPr wrap="square" lIns="0" tIns="0" rIns="0" bIns="0" rtlCol="0" anchor="ctr"/>
-          <a:lstStyle/>
-          <a:p>
-            <a:pPr indent="0" marL="0">
-              <a:buNone/>
-            </a:pPr>
-            <a:r>
-              <a:rPr lang="en-US" sz="1400" b="1" dirty="0">
-                <a:solidFill>
-                  <a:srgbClr val="16213E"/>
-                </a:solidFill>
-                <a:latin typeface="Calibri" pitchFamily="34" charset="0"/>
-                <a:ea typeface="Calibri" pitchFamily="34" charset="-122"/>
-                <a:cs typeface="Calibri" pitchFamily="34" charset="-120"/>
-              </a:rPr>
-              <a:t>分野1〜7の詳細解説</a:t>
-            </a:r>
-            <a:endParaRPr lang="en-US" sz="1400" dirty="0"/>
-          </a:p>
-        </p:txBody>
-      </p:sp>
-      <p:sp>
-        <p:nvSpPr>
-          <p:cNvPr id="14" name="Text 12"/>
-          <p:cNvSpPr txBox="1"/>
-          <p:nvPr/>
-        </p:nvSpPr>
-        <p:spPr>
-          <a:xfrm>
-            <a:off x="1261872" y="2633472"/>
-            <a:ext cx="9966960" cy="292608"/>
-          </a:xfrm>
-          <a:prstGeom prst="rect">
-            <a:avLst/>
-          </a:prstGeom>
-          <a:noFill/>
-          <a:ln/>
-        </p:spPr>
-        <p:txBody>
-          <a:bodyPr wrap="square" lIns="0" tIns="0" rIns="0" bIns="0" rtlCol="0" anchor="ctr"/>
-          <a:lstStyle/>
-          <a:p>
-            <a:pPr indent="0" marL="0">
-              <a:buNone/>
-            </a:pPr>
-            <a:r>
-              <a:rPr lang="en-US" sz="1050" dirty="0">
-                <a:solidFill>
-                  <a:srgbClr val="5B6B8C"/>
-                </a:solidFill>
-                <a:latin typeface="Calibri" pitchFamily="34" charset="0"/>
-                <a:ea typeface="Calibri" pitchFamily="34" charset="-122"/>
-                <a:cs typeface="Calibri" pitchFamily="34" charset="-120"/>
-              </a:rPr>
-              <a:t>公式の学習目標 + 実例つき解説</a:t>
-            </a:r>
-            <a:endParaRPr lang="en-US" sz="1050" dirty="0"/>
-          </a:p>
-        </p:txBody>
-      </p:sp>
-      <p:sp>
-        <p:nvSpPr>
-          <p:cNvPr id="15" name="Shape 13"/>
-          <p:cNvSpPr/>
-          <p:nvPr/>
-        </p:nvSpPr>
-        <p:spPr>
-          <a:xfrm>
-            <a:off x="640080" y="3054096"/>
-            <a:ext cx="402336" cy="402336"/>
-          </a:xfrm>
-          <a:prstGeom prst="ellipse">
-            <a:avLst/>
-          </a:prstGeom>
-          <a:solidFill>
-            <a:srgbClr val="3E64FF"/>
-          </a:solidFill>
-          <a:ln/>
-        </p:spPr>
-      </p:sp>
-      <p:sp>
-        <p:nvSpPr>
-          <p:cNvPr id="16" name="Text 14"/>
-          <p:cNvSpPr txBox="1"/>
-          <p:nvPr/>
-        </p:nvSpPr>
-        <p:spPr>
-          <a:xfrm>
-            <a:off x="640080" y="3054096"/>
-            <a:ext cx="402336" cy="402336"/>
-          </a:xfrm>
-          <a:prstGeom prst="rect">
-            <a:avLst/>
-          </a:prstGeom>
-          <a:noFill/>
-          <a:ln/>
-        </p:spPr>
-        <p:txBody>
-          <a:bodyPr wrap="square" lIns="0" tIns="0" rIns="0" bIns="0" rtlCol="0" anchor="ctr"/>
-          <a:lstStyle/>
-          <a:p>
-            <a:pPr algn="ctr" indent="0" marL="0">
-              <a:buNone/>
-            </a:pPr>
-            <a:r>
-              <a:rPr lang="en-US" sz="1300" b="1" dirty="0">
-                <a:solidFill>
-                  <a:srgbClr val="FFFFFF"/>
-                </a:solidFill>
-                <a:latin typeface="Calibri" pitchFamily="34" charset="0"/>
-                <a:ea typeface="Calibri" pitchFamily="34" charset="-122"/>
-                <a:cs typeface="Calibri" pitchFamily="34" charset="-120"/>
-              </a:rPr>
-              <a:t>4</a:t>
-            </a:r>
-            <a:endParaRPr lang="en-US" sz="1300" dirty="0"/>
-          </a:p>
-        </p:txBody>
-      </p:sp>
-      <p:sp>
-        <p:nvSpPr>
-          <p:cNvPr id="17" name="Text 15"/>
-          <p:cNvSpPr txBox="1"/>
-          <p:nvPr/>
-        </p:nvSpPr>
-        <p:spPr>
-          <a:xfrm>
-            <a:off x="1261872" y="3026664"/>
-            <a:ext cx="9966960" cy="292608"/>
-          </a:xfrm>
-          <a:prstGeom prst="rect">
-            <a:avLst/>
-          </a:prstGeom>
-          <a:noFill/>
-          <a:ln/>
-        </p:spPr>
-        <p:txBody>
-          <a:bodyPr wrap="square" lIns="0" tIns="0" rIns="0" bIns="0" rtlCol="0" anchor="ctr"/>
-          <a:lstStyle/>
-          <a:p>
-            <a:pPr indent="0" marL="0">
-              <a:buNone/>
-            </a:pPr>
-            <a:r>
-              <a:rPr lang="en-US" sz="1400" b="1" dirty="0">
-                <a:solidFill>
-                  <a:srgbClr val="16213E"/>
-                </a:solidFill>
-                <a:latin typeface="Calibri" pitchFamily="34" charset="0"/>
-                <a:ea typeface="Calibri" pitchFamily="34" charset="-122"/>
-                <a:cs typeface="Calibri" pitchFamily="34" charset="-120"/>
-              </a:rPr>
-              <a:t>試験対策テクニック</a:t>
-            </a:r>
-            <a:endParaRPr lang="en-US" sz="1400" dirty="0"/>
-          </a:p>
-        </p:txBody>
-      </p:sp>
-      <p:sp>
-        <p:nvSpPr>
-          <p:cNvPr id="18" name="Text 16"/>
-          <p:cNvSpPr txBox="1"/>
-          <p:nvPr/>
-        </p:nvSpPr>
-        <p:spPr>
-          <a:xfrm>
-            <a:off x="1261872" y="3300984"/>
-            <a:ext cx="9966960" cy="292608"/>
-          </a:xfrm>
-          <a:prstGeom prst="rect">
-            <a:avLst/>
-          </a:prstGeom>
-          <a:noFill/>
-          <a:ln/>
-        </p:spPr>
-        <p:txBody>
-          <a:bodyPr wrap="square" lIns="0" tIns="0" rIns="0" bIns="0" rtlCol="0" anchor="ctr"/>
-          <a:lstStyle/>
-          <a:p>
-            <a:pPr indent="0" marL="0">
-              <a:buNone/>
-            </a:pPr>
-            <a:r>
-              <a:rPr lang="en-US" sz="1050" dirty="0">
-                <a:solidFill>
-                  <a:srgbClr val="5B6B8C"/>
-                </a:solidFill>
-                <a:latin typeface="Calibri" pitchFamily="34" charset="0"/>
-                <a:ea typeface="Calibri" pitchFamily="34" charset="-122"/>
-                <a:cs typeface="Calibri" pitchFamily="34" charset="-120"/>
-              </a:rPr>
-              <a:t>動詞パターンによる正誤の見極め方</a:t>
-            </a:r>
-            <a:endParaRPr lang="en-US" sz="1050" dirty="0"/>
-          </a:p>
-        </p:txBody>
-      </p:sp>
-      <p:sp>
-        <p:nvSpPr>
-          <p:cNvPr id="19" name="Shape 17"/>
-          <p:cNvSpPr/>
-          <p:nvPr/>
-        </p:nvSpPr>
-        <p:spPr>
-          <a:xfrm>
-            <a:off x="640080" y="3721608"/>
-            <a:ext cx="402336" cy="402336"/>
-          </a:xfrm>
-          <a:prstGeom prst="ellipse">
-            <a:avLst/>
-          </a:prstGeom>
-          <a:solidFill>
-            <a:srgbClr val="3E64FF"/>
-          </a:solidFill>
-          <a:ln/>
-        </p:spPr>
-      </p:sp>
-      <p:sp>
-        <p:nvSpPr>
-          <p:cNvPr id="20" name="Text 18"/>
-          <p:cNvSpPr txBox="1"/>
-          <p:nvPr/>
-        </p:nvSpPr>
-        <p:spPr>
-          <a:xfrm>
-            <a:off x="640080" y="3721608"/>
-            <a:ext cx="402336" cy="402336"/>
-          </a:xfrm>
-          <a:prstGeom prst="rect">
-            <a:avLst/>
-          </a:prstGeom>
-          <a:noFill/>
-          <a:ln/>
-        </p:spPr>
-        <p:txBody>
-          <a:bodyPr wrap="square" lIns="0" tIns="0" rIns="0" bIns="0" rtlCol="0" anchor="ctr"/>
-          <a:lstStyle/>
-          <a:p>
-            <a:pPr algn="ctr" indent="0" marL="0">
-              <a:buNone/>
-            </a:pPr>
-            <a:r>
-              <a:rPr lang="en-US" sz="1300" b="1" dirty="0">
-                <a:solidFill>
-                  <a:srgbClr val="FFFFFF"/>
-                </a:solidFill>
-                <a:latin typeface="Calibri" pitchFamily="34" charset="0"/>
-                <a:ea typeface="Calibri" pitchFamily="34" charset="-122"/>
-                <a:cs typeface="Calibri" pitchFamily="34" charset="-120"/>
-              </a:rPr>
-              <a:t>5</a:t>
-            </a:r>
-            <a:endParaRPr lang="en-US" sz="1300" dirty="0"/>
-          </a:p>
-        </p:txBody>
-      </p:sp>
-      <p:sp>
-        <p:nvSpPr>
-          <p:cNvPr id="21" name="Text 19"/>
-          <p:cNvSpPr txBox="1"/>
-          <p:nvPr/>
-        </p:nvSpPr>
-        <p:spPr>
-          <a:xfrm>
-            <a:off x="1261872" y="3694176"/>
-            <a:ext cx="9966960" cy="292608"/>
-          </a:xfrm>
-          <a:prstGeom prst="rect">
-            <a:avLst/>
-          </a:prstGeom>
-          <a:noFill/>
-          <a:ln/>
-        </p:spPr>
-        <p:txBody>
-          <a:bodyPr wrap="square" lIns="0" tIns="0" rIns="0" bIns="0" rtlCol="0" anchor="ctr"/>
-          <a:lstStyle/>
-          <a:p>
-            <a:pPr indent="0" marL="0">
-              <a:buNone/>
-            </a:pPr>
-            <a:r>
-              <a:rPr lang="en-US" sz="1400" b="1" dirty="0">
-                <a:solidFill>
-                  <a:srgbClr val="16213E"/>
-                </a:solidFill>
-                <a:latin typeface="Calibri" pitchFamily="34" charset="0"/>
-                <a:ea typeface="Calibri" pitchFamily="34" charset="-122"/>
-                <a:cs typeface="Calibri" pitchFamily="34" charset="-120"/>
-              </a:rPr>
-              <a:t>公式サンプル問題3問</a:t>
-            </a:r>
-            <a:endParaRPr lang="en-US" sz="1400" dirty="0"/>
-          </a:p>
-        </p:txBody>
-      </p:sp>
-      <p:sp>
-        <p:nvSpPr>
-          <p:cNvPr id="22" name="Text 20"/>
-          <p:cNvSpPr txBox="1"/>
-          <p:nvPr/>
-        </p:nvSpPr>
-        <p:spPr>
-          <a:xfrm>
-            <a:off x="1261872" y="3968496"/>
-            <a:ext cx="9966960" cy="292608"/>
-          </a:xfrm>
-          <a:prstGeom prst="rect">
-            <a:avLst/>
-          </a:prstGeom>
-          <a:noFill/>
-          <a:ln/>
-        </p:spPr>
-        <p:txBody>
-          <a:bodyPr wrap="square" lIns="0" tIns="0" rIns="0" bIns="0" rtlCol="0" anchor="ctr"/>
-          <a:lstStyle/>
-          <a:p>
-            <a:pPr indent="0" marL="0">
-              <a:buNone/>
-            </a:pPr>
-            <a:r>
-              <a:rPr lang="en-US" sz="1050" dirty="0">
-                <a:solidFill>
-                  <a:srgbClr val="5B6B8C"/>
-                </a:solidFill>
-                <a:latin typeface="Calibri" pitchFamily="34" charset="0"/>
-                <a:ea typeface="Calibri" pitchFamily="34" charset="-122"/>
-                <a:cs typeface="Calibri" pitchFamily="34" charset="-120"/>
-              </a:rPr>
-              <a:t>Exam Guide掲載の原文訳+解説</a:t>
-            </a:r>
-            <a:endParaRPr lang="en-US" sz="1050" dirty="0"/>
-          </a:p>
-        </p:txBody>
-      </p:sp>
-      <p:sp>
-        <p:nvSpPr>
-          <p:cNvPr id="23" name="Shape 21"/>
-          <p:cNvSpPr/>
-          <p:nvPr/>
-        </p:nvSpPr>
-        <p:spPr>
-          <a:xfrm>
-            <a:off x="640080" y="4389120"/>
-            <a:ext cx="402336" cy="402336"/>
-          </a:xfrm>
-          <a:prstGeom prst="ellipse">
-            <a:avLst/>
-          </a:prstGeom>
-          <a:solidFill>
-            <a:srgbClr val="3E64FF"/>
-          </a:solidFill>
-          <a:ln/>
-        </p:spPr>
-      </p:sp>
-      <p:sp>
-        <p:nvSpPr>
-          <p:cNvPr id="24" name="Text 22"/>
-          <p:cNvSpPr txBox="1"/>
-          <p:nvPr/>
-        </p:nvSpPr>
-        <p:spPr>
-          <a:xfrm>
-            <a:off x="640080" y="4389120"/>
-            <a:ext cx="402336" cy="402336"/>
-          </a:xfrm>
-          <a:prstGeom prst="rect">
-            <a:avLst/>
-          </a:prstGeom>
-          <a:noFill/>
-          <a:ln/>
-        </p:spPr>
-        <p:txBody>
-          <a:bodyPr wrap="square" lIns="0" tIns="0" rIns="0" bIns="0" rtlCol="0" anchor="ctr"/>
-          <a:lstStyle/>
-          <a:p>
-            <a:pPr algn="ctr" indent="0" marL="0">
-              <a:buNone/>
-            </a:pPr>
-            <a:r>
-              <a:rPr lang="en-US" sz="1300" b="1" dirty="0">
-                <a:solidFill>
-                  <a:srgbClr val="FFFFFF"/>
-                </a:solidFill>
-                <a:latin typeface="Calibri" pitchFamily="34" charset="0"/>
-                <a:ea typeface="Calibri" pitchFamily="34" charset="-122"/>
-                <a:cs typeface="Calibri" pitchFamily="34" charset="-120"/>
-              </a:rPr>
-              <a:t>6</a:t>
-            </a:r>
-            <a:endParaRPr lang="en-US" sz="1300" dirty="0"/>
-          </a:p>
-        </p:txBody>
-      </p:sp>
-      <p:sp>
-        <p:nvSpPr>
-          <p:cNvPr id="25" name="Text 23"/>
-          <p:cNvSpPr txBox="1"/>
-          <p:nvPr/>
-        </p:nvSpPr>
-        <p:spPr>
-          <a:xfrm>
-            <a:off x="1261872" y="4361688"/>
-            <a:ext cx="9966960" cy="292608"/>
-          </a:xfrm>
-          <a:prstGeom prst="rect">
-            <a:avLst/>
-          </a:prstGeom>
-          <a:noFill/>
-          <a:ln/>
-        </p:spPr>
-        <p:txBody>
-          <a:bodyPr wrap="square" lIns="0" tIns="0" rIns="0" bIns="0" rtlCol="0" anchor="ctr"/>
-          <a:lstStyle/>
-          <a:p>
-            <a:pPr indent="0" marL="0">
-              <a:buNone/>
-            </a:pPr>
-            <a:r>
-              <a:rPr lang="en-US" sz="1400" b="1" dirty="0">
-                <a:solidFill>
-                  <a:srgbClr val="16213E"/>
-                </a:solidFill>
-                <a:latin typeface="Calibri" pitchFamily="34" charset="0"/>
-                <a:ea typeface="Calibri" pitchFamily="34" charset="-122"/>
-                <a:cs typeface="Calibri" pitchFamily="34" charset="-120"/>
-              </a:rPr>
-              <a:t>試験ポリシー</a:t>
-            </a:r>
-            <a:endParaRPr lang="en-US" sz="1400" dirty="0"/>
-          </a:p>
-        </p:txBody>
-      </p:sp>
-      <p:sp>
-        <p:nvSpPr>
-          <p:cNvPr id="26" name="Text 24"/>
-          <p:cNvSpPr txBox="1"/>
-          <p:nvPr/>
-        </p:nvSpPr>
-        <p:spPr>
-          <a:xfrm>
-            <a:off x="1261872" y="4636008"/>
-            <a:ext cx="9966960" cy="292608"/>
-          </a:xfrm>
-          <a:prstGeom prst="rect">
-            <a:avLst/>
-          </a:prstGeom>
-          <a:noFill/>
-          <a:ln/>
-        </p:spPr>
-        <p:txBody>
-          <a:bodyPr wrap="square" lIns="0" tIns="0" rIns="0" bIns="0" rtlCol="0" anchor="ctr"/>
-          <a:lstStyle/>
-          <a:p>
-            <a:pPr indent="0" marL="0">
-              <a:buNone/>
-            </a:pPr>
-            <a:r>
-              <a:rPr lang="en-US" sz="1050" dirty="0">
-                <a:solidFill>
-                  <a:srgbClr val="5B6B8C"/>
-                </a:solidFill>
-                <a:latin typeface="Calibri" pitchFamily="34" charset="0"/>
-                <a:ea typeface="Calibri" pitchFamily="34" charset="-122"/>
-                <a:cs typeface="Calibri" pitchFamily="34" charset="-120"/>
-              </a:rPr>
-              <a:t>申込み・本人確認・再受験・資格更新</a:t>
-            </a:r>
-            <a:endParaRPr lang="en-US" sz="1050" dirty="0"/>
-          </a:p>
-        </p:txBody>
-      </p:sp>
-      <p:sp>
-        <p:nvSpPr>
-          <p:cNvPr id="27" name="Shape 25"/>
-          <p:cNvSpPr/>
-          <p:nvPr/>
-        </p:nvSpPr>
-        <p:spPr>
-          <a:xfrm>
-            <a:off x="640080" y="5056632"/>
-            <a:ext cx="402336" cy="402336"/>
-          </a:xfrm>
-          <a:prstGeom prst="ellipse">
-            <a:avLst/>
-          </a:prstGeom>
-          <a:solidFill>
-            <a:srgbClr val="3E64FF"/>
-          </a:solidFill>
-          <a:ln/>
-        </p:spPr>
-      </p:sp>
-      <p:sp>
-        <p:nvSpPr>
-          <p:cNvPr id="28" name="Text 26"/>
-          <p:cNvSpPr txBox="1"/>
-          <p:nvPr/>
-        </p:nvSpPr>
-        <p:spPr>
-          <a:xfrm>
-            <a:off x="640080" y="5056632"/>
-            <a:ext cx="402336" cy="402336"/>
-          </a:xfrm>
-          <a:prstGeom prst="rect">
-            <a:avLst/>
-          </a:prstGeom>
-          <a:noFill/>
-          <a:ln/>
-        </p:spPr>
-        <p:txBody>
-          <a:bodyPr wrap="square" lIns="0" tIns="0" rIns="0" bIns="0" rtlCol="0" anchor="ctr"/>
-          <a:lstStyle/>
-          <a:p>
-            <a:pPr algn="ctr" indent="0" marL="0">
-              <a:buNone/>
-            </a:pPr>
-            <a:r>
-              <a:rPr lang="en-US" sz="1300" b="1" dirty="0">
-                <a:solidFill>
-                  <a:srgbClr val="FFFFFF"/>
-                </a:solidFill>
-                <a:latin typeface="Calibri" pitchFamily="34" charset="0"/>
-                <a:ea typeface="Calibri" pitchFamily="34" charset="-122"/>
-                <a:cs typeface="Calibri" pitchFamily="34" charset="-120"/>
-              </a:rPr>
-              <a:t>7</a:t>
-            </a:r>
-            <a:endParaRPr lang="en-US" sz="1300" dirty="0"/>
-          </a:p>
-        </p:txBody>
-      </p:sp>
-      <p:sp>
-        <p:nvSpPr>
-          <p:cNvPr id="29" name="Text 27"/>
-          <p:cNvSpPr txBox="1"/>
-          <p:nvPr/>
-        </p:nvSpPr>
-        <p:spPr>
-          <a:xfrm>
-            <a:off x="1261872" y="5029200"/>
-            <a:ext cx="9966960" cy="292608"/>
-          </a:xfrm>
-          <a:prstGeom prst="rect">
-            <a:avLst/>
-          </a:prstGeom>
-          <a:noFill/>
-          <a:ln/>
-        </p:spPr>
-        <p:txBody>
-          <a:bodyPr wrap="square" lIns="0" tIns="0" rIns="0" bIns="0" rtlCol="0" anchor="ctr"/>
-          <a:lstStyle/>
-          <a:p>
-            <a:pPr indent="0" marL="0">
-              <a:buNone/>
-            </a:pPr>
-            <a:r>
-              <a:rPr lang="en-US" sz="1400" b="1" dirty="0">
-                <a:solidFill>
-                  <a:srgbClr val="16213E"/>
-                </a:solidFill>
-                <a:latin typeface="Calibri" pitchFamily="34" charset="0"/>
-                <a:ea typeface="Calibri" pitchFamily="34" charset="-122"/>
-                <a:cs typeface="Calibri" pitchFamily="34" charset="-120"/>
-              </a:rPr>
-              <a:t>他のClaude認定資格との違い</a:t>
-            </a:r>
-            <a:endParaRPr lang="en-US" sz="1400" dirty="0"/>
-          </a:p>
-        </p:txBody>
-      </p:sp>
-      <p:sp>
-        <p:nvSpPr>
-          <p:cNvPr id="30" name="Text 28"/>
-          <p:cNvSpPr txBox="1"/>
-          <p:nvPr/>
-        </p:nvSpPr>
-        <p:spPr>
-          <a:xfrm>
-            <a:off x="1261872" y="5303520"/>
-            <a:ext cx="9966960" cy="292608"/>
-          </a:xfrm>
-          <a:prstGeom prst="rect">
-            <a:avLst/>
-          </a:prstGeom>
-          <a:noFill/>
-          <a:ln/>
-        </p:spPr>
-        <p:txBody>
-          <a:bodyPr wrap="square" lIns="0" tIns="0" rIns="0" bIns="0" rtlCol="0" anchor="ctr"/>
-          <a:lstStyle/>
-          <a:p>
-            <a:pPr indent="0" marL="0">
-              <a:buNone/>
-            </a:pPr>
-            <a:r>
-              <a:rPr lang="en-US" sz="1050" dirty="0">
-                <a:solidFill>
-                  <a:srgbClr val="5B6B8C"/>
-                </a:solidFill>
-                <a:latin typeface="Calibri" pitchFamily="34" charset="0"/>
-                <a:ea typeface="Calibri" pitchFamily="34" charset="-122"/>
-                <a:cs typeface="Calibri" pitchFamily="34" charset="-120"/>
-              </a:rPr>
-              <a:t>CCAO-F/CCDV-F/CCAR-F/CCAR-Pの比較</a:t>
-            </a:r>
-            <a:endParaRPr lang="en-US" sz="1050" dirty="0"/>
-          </a:p>
-        </p:txBody>
-      </p:sp>
-      <p:sp>
-        <p:nvSpPr>
-          <p:cNvPr id="31" name="Shape 29"/>
-          <p:cNvSpPr/>
-          <p:nvPr/>
-        </p:nvSpPr>
-        <p:spPr>
-          <a:xfrm>
-            <a:off x="640080" y="5724144"/>
-            <a:ext cx="402336" cy="402336"/>
-          </a:xfrm>
-          <a:prstGeom prst="ellipse">
-            <a:avLst/>
-          </a:prstGeom>
-          <a:solidFill>
-            <a:srgbClr val="3E64FF"/>
-          </a:solidFill>
-          <a:ln/>
-        </p:spPr>
-      </p:sp>
-      <p:sp>
-        <p:nvSpPr>
-          <p:cNvPr id="32" name="Text 30"/>
-          <p:cNvSpPr txBox="1"/>
-          <p:nvPr/>
-        </p:nvSpPr>
-        <p:spPr>
-          <a:xfrm>
-            <a:off x="640080" y="5724144"/>
-            <a:ext cx="402336" cy="402336"/>
-          </a:xfrm>
-          <a:prstGeom prst="rect">
-            <a:avLst/>
-          </a:prstGeom>
-          <a:noFill/>
-          <a:ln/>
-        </p:spPr>
-        <p:txBody>
-          <a:bodyPr wrap="square" lIns="0" tIns="0" rIns="0" bIns="0" rtlCol="0" anchor="ctr"/>
-          <a:lstStyle/>
-          <a:p>
-            <a:pPr algn="ctr" indent="0" marL="0">
-              <a:buNone/>
-            </a:pPr>
-            <a:r>
-              <a:rPr lang="en-US" sz="1300" b="1" dirty="0">
-                <a:solidFill>
-                  <a:srgbClr val="FFFFFF"/>
-                </a:solidFill>
-                <a:latin typeface="Calibri" pitchFamily="34" charset="0"/>
-                <a:ea typeface="Calibri" pitchFamily="34" charset="-122"/>
-                <a:cs typeface="Calibri" pitchFamily="34" charset="-120"/>
-              </a:rPr>
-              <a:t>8</a:t>
-            </a:r>
-            <a:endParaRPr lang="en-US" sz="1300" dirty="0"/>
-          </a:p>
-        </p:txBody>
-      </p:sp>
-      <p:sp>
-        <p:nvSpPr>
-          <p:cNvPr id="33" name="Text 31"/>
-          <p:cNvSpPr txBox="1"/>
-          <p:nvPr/>
-        </p:nvSpPr>
-        <p:spPr>
-          <a:xfrm>
-            <a:off x="1261872" y="5696712"/>
-            <a:ext cx="9966960" cy="292608"/>
-          </a:xfrm>
-          <a:prstGeom prst="rect">
-            <a:avLst/>
-          </a:prstGeom>
-          <a:noFill/>
-          <a:ln/>
-        </p:spPr>
-        <p:txBody>
-          <a:bodyPr wrap="square" lIns="0" tIns="0" rIns="0" bIns="0" rtlCol="0" anchor="ctr"/>
-          <a:lstStyle/>
-          <a:p>
-            <a:pPr indent="0" marL="0">
-              <a:buNone/>
-            </a:pPr>
-            <a:r>
-              <a:rPr lang="en-US" sz="1400" b="1" dirty="0">
-                <a:solidFill>
-                  <a:srgbClr val="16213E"/>
-                </a:solidFill>
-                <a:latin typeface="Calibri" pitchFamily="34" charset="0"/>
-                <a:ea typeface="Calibri" pitchFamily="34" charset="-122"/>
-                <a:cs typeface="Calibri" pitchFamily="34" charset="-120"/>
-              </a:rPr>
-              <a:t>用語集・誤答パターン・まとめ</a:t>
-            </a:r>
-            <a:endParaRPr lang="en-US" sz="1400" dirty="0"/>
-          </a:p>
-        </p:txBody>
-      </p:sp>
-      <p:sp>
-        <p:nvSpPr>
-          <p:cNvPr id="34" name="Text 32"/>
-          <p:cNvSpPr txBox="1"/>
-          <p:nvPr/>
-        </p:nvSpPr>
-        <p:spPr>
-          <a:xfrm>
-            <a:off x="1261872" y="5971032"/>
-            <a:ext cx="9966960" cy="292608"/>
-          </a:xfrm>
-          <a:prstGeom prst="rect">
-            <a:avLst/>
-          </a:prstGeom>
-          <a:noFill/>
-          <a:ln/>
-        </p:spPr>
-        <p:txBody>
-          <a:bodyPr wrap="square" lIns="0" tIns="0" rIns="0" bIns="0" rtlCol="0" anchor="ctr"/>
-          <a:lstStyle/>
-          <a:p>
-            <a:pPr indent="0" marL="0">
-              <a:buNone/>
-            </a:pPr>
-            <a:r>
-              <a:rPr lang="en-US" sz="1050" dirty="0">
-                <a:solidFill>
-                  <a:srgbClr val="5B6B8C"/>
-                </a:solidFill>
-                <a:latin typeface="Calibri" pitchFamily="34" charset="0"/>
-                <a:ea typeface="Calibri" pitchFamily="34" charset="-122"/>
-                <a:cs typeface="Calibri" pitchFamily="34" charset="-120"/>
-              </a:rPr>
-              <a:t>頻出の引っかけ選択肢</a:t>
-            </a:r>
-            <a:endParaRPr lang="en-US" sz="1050" dirty="0"/>
-          </a:p>
-        </p:txBody>
-      </p:sp>
-      <p:sp>
-        <p:nvSpPr>
-          <p:cNvPr id="35" name="Text 33"/>
-          <p:cNvSpPr txBox="1"/>
-          <p:nvPr/>
-        </p:nvSpPr>
-        <p:spPr>
-          <a:xfrm>
-            <a:off x="548640" y="6355080"/>
-            <a:ext cx="11064240" cy="320040"/>
-          </a:xfrm>
-          <a:prstGeom prst="rect">
-            <a:avLst/>
-          </a:prstGeom>
-          <a:noFill/>
-          <a:ln/>
-        </p:spPr>
-        <p:txBody>
-          <a:bodyPr wrap="square" lIns="0" tIns="0" rIns="0" bIns="0" rtlCol="0" anchor="ctr"/>
-          <a:lstStyle/>
-          <a:p>
-            <a:pPr indent="0" marL="0">
-              <a:buNone/>
-            </a:pPr>
-            <a:r>
-              <a:rPr lang="en-US" sz="1000" i="1" dirty="0">
-                <a:solidFill>
-                  <a:srgbClr val="E0A526"/>
-                </a:solidFill>
-                <a:latin typeface="Calibri" pitchFamily="34" charset="0"/>
-                <a:ea typeface="Calibri" pitchFamily="34" charset="-122"/>
-                <a:cs typeface="Calibri" pitchFamily="34" charset="-120"/>
-              </a:rPr>
-              <a:t>⚠ 2026年12月7日より試験内容が更新予定(本資料はVersion 1.0/2026年7月発効に基づく)</a:t>
-            </a:r>
-            <a:endParaRPr lang="en-US" sz="1000" dirty="0"/>
-          </a:p>
-        </p:txBody>
-      </p:sp>
-      <p:sp>
-        <p:nvSpPr>
-          <p:cNvPr id="36" name="Text 34"/>
-          <p:cNvSpPr txBox="1"/>
-          <p:nvPr/>
-        </p:nvSpPr>
-        <p:spPr>
-          <a:xfrm>
-            <a:off x="11521440" y="6492240"/>
-            <a:ext cx="457200" cy="274320"/>
-          </a:xfrm>
-          <a:prstGeom prst="rect">
-            <a:avLst/>
-          </a:prstGeom>
-          <a:noFill/>
-          <a:ln/>
-        </p:spPr>
-        <p:txBody>
-          <a:bodyPr wrap="square" lIns="0" tIns="0" rIns="0" bIns="0" rtlCol="0" anchor="ctr"/>
-          <a:lstStyle/>
-          <a:p>
-            <a:pPr algn="r" indent="0" marL="0">
-              <a:buNone/>
-            </a:pPr>
-            <a:r>
-              <a:rPr lang="en-US" sz="1000" dirty="0">
-                <a:solidFill>
-                  <a:srgbClr val="5B6B8C"/>
-                </a:solidFill>
-                <a:latin typeface="Calibri" pitchFamily="34" charset="0"/>
-                <a:ea typeface="Calibri" pitchFamily="34" charset="-122"/>
-                <a:cs typeface="Calibri" pitchFamily="34" charset="-120"/>
-              </a:rPr>
-              <a:t>2</a:t>
-            </a:r>
-            <a:endParaRPr lang="en-US" sz="1000" dirty="0"/>
-          </a:p>
-        </p:txBody>
-      </p:sp>
-    </p:spTree>
-  </p:cSld>
-  <p:clrMapOvr>
-    <a:masterClrMapping/>
-  </p:clrMapOvr>
-</p:sld>
-</file>
-
-<file path=ppt/slides/slide20.xml><?xml version="1.0" encoding="utf-8"?>
-<p:sld xmlns:a="http://schemas.openxmlformats.org/drawingml/2006/main" xmlns:r="http://schemas.openxmlformats.org/officeDocument/2006/relationships" xmlns:p="http://schemas.openxmlformats.org/presentationml/2006/main">
-  <p:cSld name="Slide 20">
-    <p:bg>
-      <p:bgPr>
-        <a:solidFill>
-          <a:srgbClr val="FFFFFF"/>
-        </a:solidFill>
-      </p:bgPr>
-    </p:bg>
-    <p:spTree>
-      <p:nvGrpSpPr>
-        <p:cNvPr id="1" name=""/>
-        <p:cNvGrpSpPr/>
-        <p:nvPr/>
-      </p:nvGrpSpPr>
-      <p:grpSpPr>
-        <a:xfrm>
-          <a:off x="0" y="0"/>
-          <a:ext cx="0" cy="0"/>
-          <a:chOff x="0" y="0"/>
-          <a:chExt cx="0" cy="0"/>
-        </a:xfrm>
-      </p:grpSpPr>
-      <p:sp>
-        <p:nvSpPr>
-          <p:cNvPr id="2" name="Text 0"/>
-          <p:cNvSpPr txBox="1"/>
-          <p:nvPr/>
-        </p:nvSpPr>
-        <p:spPr>
-          <a:xfrm>
             <a:off x="548640" y="457200"/>
             <a:ext cx="10881360" cy="640080"/>
           </a:xfrm>
@@ -11737,7 +12804,7 @@
                 <a:ea typeface="Calibri" pitchFamily="34" charset="-122"/>
                 <a:cs typeface="Calibri" pitchFamily="34" charset="-120"/>
               </a:rPr>
-              <a:t>Anthropic公式試験ガイド(バージョン1.0・2026年7月発効)+ 公式サンプル問題 + 複数の受験記事・練習問題サンプルを統合した学習ノート。試験内容は2026年12月7日より更新予定のため、受験前に必ず最新版の試験ガイドを確認すること</a:t>
+              <a:t>Anthropic公式試験ガイド(バージョン1.0・2026年7月発効)+ 公式サンプル問題 + 複数の受験記事・Udemy模擬試験を統合した学習ノート。全30問の問題集(解答確認済み)は md版(ccao-f-study-guide.md)に収録。試験内容は2026年12月7日より更新予定のため、受験前に必ず最新版の試験ガイドを確認すること</a:t>
             </a:r>
             <a:endParaRPr lang="en-US" sz="1050" dirty="0"/>
           </a:p>
@@ -11776,7 +12843,7 @@
                 <a:ea typeface="Calibri" pitchFamily="34" charset="-122"/>
                 <a:cs typeface="Calibri" pitchFamily="34" charset="-120"/>
               </a:rPr>
-              <a:t>20</a:t>
+              <a:t>22</a:t>
             </a:r>
             <a:endParaRPr lang="en-US" sz="1000" dirty="0"/>
           </a:p>
